--- a/courses/03-introduction-to-machine-learning/17-calculus-basics/Topics7_8_Lesson_90min.pptx
+++ b/courses/03-introduction-to-machine-learning/17-calculus-basics/Topics7_8_Lesson_90min.pptx
@@ -5,57 +5,53 @@
     <p:sldMasterId id="2147483648" r:id="rId1"/>
   </p:sldMasterIdLst>
   <p:notesMasterIdLst>
-    <p:notesMasterId r:id="rId50"/>
+    <p:notesMasterId r:id="rId46"/>
   </p:notesMasterIdLst>
   <p:sldIdLst>
     <p:sldId id="256" r:id="rId2"/>
     <p:sldId id="257" r:id="rId3"/>
-    <p:sldId id="258" r:id="rId4"/>
-    <p:sldId id="259" r:id="rId5"/>
-    <p:sldId id="260" r:id="rId6"/>
-    <p:sldId id="261" r:id="rId7"/>
-    <p:sldId id="262" r:id="rId8"/>
-    <p:sldId id="263" r:id="rId9"/>
-    <p:sldId id="264" r:id="rId10"/>
-    <p:sldId id="265" r:id="rId11"/>
-    <p:sldId id="266" r:id="rId12"/>
-    <p:sldId id="267" r:id="rId13"/>
-    <p:sldId id="268" r:id="rId14"/>
-    <p:sldId id="269" r:id="rId15"/>
-    <p:sldId id="270" r:id="rId16"/>
-    <p:sldId id="271" r:id="rId17"/>
-    <p:sldId id="272" r:id="rId18"/>
-    <p:sldId id="273" r:id="rId19"/>
-    <p:sldId id="274" r:id="rId20"/>
-    <p:sldId id="275" r:id="rId21"/>
-    <p:sldId id="276" r:id="rId22"/>
-    <p:sldId id="277" r:id="rId23"/>
-    <p:sldId id="278" r:id="rId24"/>
-    <p:sldId id="279" r:id="rId25"/>
-    <p:sldId id="280" r:id="rId26"/>
-    <p:sldId id="281" r:id="rId27"/>
-    <p:sldId id="282" r:id="rId28"/>
-    <p:sldId id="283" r:id="rId29"/>
-    <p:sldId id="284" r:id="rId30"/>
-    <p:sldId id="285" r:id="rId31"/>
-    <p:sldId id="286" r:id="rId32"/>
-    <p:sldId id="287" r:id="rId33"/>
-    <p:sldId id="288" r:id="rId34"/>
-    <p:sldId id="289" r:id="rId35"/>
-    <p:sldId id="290" r:id="rId36"/>
-    <p:sldId id="291" r:id="rId37"/>
-    <p:sldId id="292" r:id="rId38"/>
-    <p:sldId id="293" r:id="rId39"/>
-    <p:sldId id="294" r:id="rId40"/>
-    <p:sldId id="295" r:id="rId41"/>
-    <p:sldId id="296" r:id="rId42"/>
-    <p:sldId id="297" r:id="rId43"/>
-    <p:sldId id="298" r:id="rId44"/>
-    <p:sldId id="299" r:id="rId45"/>
-    <p:sldId id="300" r:id="rId46"/>
-    <p:sldId id="301" r:id="rId47"/>
-    <p:sldId id="302" r:id="rId48"/>
-    <p:sldId id="303" r:id="rId49"/>
+    <p:sldId id="259" r:id="rId4"/>
+    <p:sldId id="260" r:id="rId5"/>
+    <p:sldId id="261" r:id="rId6"/>
+    <p:sldId id="262" r:id="rId7"/>
+    <p:sldId id="263" r:id="rId8"/>
+    <p:sldId id="264" r:id="rId9"/>
+    <p:sldId id="265" r:id="rId10"/>
+    <p:sldId id="266" r:id="rId11"/>
+    <p:sldId id="267" r:id="rId12"/>
+    <p:sldId id="268" r:id="rId13"/>
+    <p:sldId id="269" r:id="rId14"/>
+    <p:sldId id="270" r:id="rId15"/>
+    <p:sldId id="271" r:id="rId16"/>
+    <p:sldId id="272" r:id="rId17"/>
+    <p:sldId id="273" r:id="rId18"/>
+    <p:sldId id="274" r:id="rId19"/>
+    <p:sldId id="275" r:id="rId20"/>
+    <p:sldId id="277" r:id="rId21"/>
+    <p:sldId id="279" r:id="rId22"/>
+    <p:sldId id="280" r:id="rId23"/>
+    <p:sldId id="281" r:id="rId24"/>
+    <p:sldId id="282" r:id="rId25"/>
+    <p:sldId id="284" r:id="rId26"/>
+    <p:sldId id="285" r:id="rId27"/>
+    <p:sldId id="286" r:id="rId28"/>
+    <p:sldId id="287" r:id="rId29"/>
+    <p:sldId id="288" r:id="rId30"/>
+    <p:sldId id="289" r:id="rId31"/>
+    <p:sldId id="290" r:id="rId32"/>
+    <p:sldId id="291" r:id="rId33"/>
+    <p:sldId id="292" r:id="rId34"/>
+    <p:sldId id="293" r:id="rId35"/>
+    <p:sldId id="294" r:id="rId36"/>
+    <p:sldId id="295" r:id="rId37"/>
+    <p:sldId id="296" r:id="rId38"/>
+    <p:sldId id="297" r:id="rId39"/>
+    <p:sldId id="298" r:id="rId40"/>
+    <p:sldId id="299" r:id="rId41"/>
+    <p:sldId id="300" r:id="rId42"/>
+    <p:sldId id="301" r:id="rId43"/>
+    <p:sldId id="302" r:id="rId44"/>
+    <p:sldId id="303" r:id="rId45"/>
   </p:sldIdLst>
   <p:sldSz cx="12192000" cy="6858000"/>
   <p:notesSz cx="6858000" cy="12192000"/>
@@ -417,7 +413,7 @@
           <a:p>
             <a:r>
               <a:rPr lang="en-US" dirty="0"/>
-              <a:t>The map shows the error landscape from above: rings are equal-error lines, the star is the minimum. At the dot, the red arrow is the gradient - uphill. The blue arrow is minus gradient - downhill, straight toward the star. Link to Topic 6: the gradient is a VECTOR.</a:t>
+              <a:t>Walk left to right. Each one is a bigger version of the previous. The gradient is highlighted because it drives training. Jacobian: for functions with several outputs, like a neural-network layer. Hessian: second derivatives, it measures curvature. Keep Jacobian and Hessian light - name them, one sentence each.</a:t>
             </a:r>
           </a:p>
         </p:txBody>
@@ -504,7 +500,7 @@
           <a:p>
             <a:r>
               <a:rPr lang="en-US" dirty="0"/>
-              <a:t>Walk left to right. Each one is a bigger version of the previous. The gradient is highlighted because it drives training. Jacobian: for functions with several outputs, like a neural-network layer. Hessian: second derivatives, it measures curvature. Keep Jacobian and Hessian light - name them, one sentence each.</a:t>
+              <a:t>The gradient says flat; the Hessian says what KIND of flat. Bowl = minimum, dome = maximum, the third shape is flat but not a valley. Link to Topic 6: 'positive definite' Hessian means bowl. Example: f=x^2+y^2 has Hessian [[2,0],[0,2]] - positive -&gt; a bowl -&gt; minimum at (0,0).</a:t>
             </a:r>
           </a:p>
         </p:txBody>
@@ -591,7 +587,7 @@
           <a:p>
             <a:r>
               <a:rPr lang="en-US" dirty="0"/>
-              <a:t>The gradient says flat; the Hessian says what KIND of flat. Bowl = minimum, dome = maximum, the third shape is flat but not a valley. Link to Topic 6: 'positive definite' Hessian means bowl. Example: f=x^2+y^2 has Hessian [[2,0],[0,2]] - positive -&gt; a bowl -&gt; minimum at (0,0).</a:t>
+              <a:t>Answer: D, the Hessian - it measures curvature.</a:t>
             </a:r>
           </a:p>
         </p:txBody>
@@ -678,7 +674,7 @@
           <a:p>
             <a:r>
               <a:rPr lang="en-US" dirty="0"/>
-              <a:t>Answer: D, the Hessian - it measures curvature.</a:t>
+              <a:t>Optimization means searching for the best value. The loss curve measures how wrong the model is. Unconstrained: the star, where the slope is zero. Constrained: if a rule forbids part of the space (grey), the best ALLOWED point is the red dot. Lagrange multipliers solve that - optional, just mention.</a:t>
             </a:r>
           </a:p>
         </p:txBody>
@@ -765,7 +761,7 @@
           <a:p>
             <a:r>
               <a:rPr lang="en-US" dirty="0"/>
-              <a:t>Optimization means searching for the best value. The loss curve measures how wrong the model is. Unconstrained: the star, where the slope is zero. Constrained: if a rule forbids part of the space (grey), the best ALLOWED point is the red dot. Lagrange multipliers solve that - optional, just mention.</a:t>
+              <a:t>This formula is the most important line in ML training. Read it slowly. The minus is 'go downhill', the gradient is 'which way is uphill', the learning rate is 'how big a step'. Three-step loop.</a:t>
             </a:r>
           </a:p>
         </p:txBody>
@@ -852,7 +848,7 @@
           <a:p>
             <a:r>
               <a:rPr lang="en-US" dirty="0"/>
-              <a:t>This formula is the most important line in ML training. Read it slowly. The minus is 'go downhill', the gradient is 'which way is uphill', the learning rate is 'how big a step'. Three-step loop.</a:t>
+              <a:t>Point at step 0: steep, so a big jump. Steps get smaller automatically because the gradient gets smaller near the bottom. Nobody tells it to slow down - the maths does it.</a:t>
             </a:r>
           </a:p>
         </p:txBody>
@@ -939,7 +935,7 @@
           <a:p>
             <a:r>
               <a:rPr lang="en-US" dirty="0"/>
-              <a:t>Point at step 0: steep, so a big jump. Steps get smaller automatically because the gradient gets smaller near the bottom. Nobody tells it to slow down - the maths does it.</a:t>
+              <a:t>Give 3 minutes. Students compute by hand. Step 1: grad=6, x_new=3-1.5=1.5. Step 2: grad=3, x_new=0.75. Step 3: grad=1.5, x_new=0.375. Pattern: x halves each step and approaches 0, the minimum.</a:t>
             </a:r>
           </a:p>
         </p:txBody>
@@ -1026,7 +1022,7 @@
           <a:p>
             <a:r>
               <a:rPr lang="en-US" dirty="0"/>
-              <a:t>Give 3 minutes. Students compute by hand. Step 1: grad=6, x_new=3-1.5=1.5. Step 2: grad=3, x_new=0.75. Step 3: grad=1.5, x_new=0.375. Pattern: x halves each step and approaches 0, the minimum.</a:t>
+              <a:t>Reveal. Celebrate the fastest pair. Emphasise: steps get smaller on their own because the gradient shrinks.</a:t>
             </a:r>
           </a:p>
         </p:txBody>
@@ -1113,7 +1109,7 @@
           <a:p>
             <a:r>
               <a:rPr lang="en-US" dirty="0"/>
-              <a:t>Reveal. Celebrate the fastest pair. Emphasise: steps get smaller on their own because the gradient shrinks.</a:t>
+              <a:t>Goldilocks. Tiny steps: you arrive... next week. Huge steps: you jump from one side of the valley to the other and never land. In our activity, what would happen with lr = 1.0? x_new = x - 2x = -x: it bounces 3, -3, 3 forever!</a:t>
             </a:r>
           </a:p>
         </p:txBody>
@@ -1200,7 +1196,7 @@
           <a:p>
             <a:r>
               <a:rPr lang="en-US" dirty="0"/>
-              <a:t>Goldilocks. Tiny steps: you arrive... next week. Huge steps: you jump from one side of the valley to the other and never land. In our activity, what would happen with lr = 1.0? x_new = x - 2x = -x: it bounces 3, -3, 3 forever!</a:t>
+              <a:t>Answer: C. x_new = x - 5*2x = -9x. From 3: -27, 243... it explodes.</a:t>
             </a:r>
           </a:p>
         </p:txBody>
@@ -1374,7 +1370,7 @@
           <a:p>
             <a:r>
               <a:rPr lang="en-US" dirty="0"/>
-              <a:t>Answer: C. x_new = x - 5*2x = -9x. From 3: -27, 243... it explodes.</a:t>
+              <a:t>Compare the three paths. Full batch walks carefully. SGD staggers like a tired person but gets there fast, and the wobble can shake it out of a local dip. Mini-batch is the compromise everyone uses. This is exactly practice exercise 3.</a:t>
             </a:r>
           </a:p>
         </p:txBody>
@@ -1461,7 +1457,7 @@
           <a:p>
             <a:r>
               <a:rPr lang="en-US" dirty="0"/>
-              <a:t>Story: the blindfolded hiker reaches a small hollow, feels flat ground and sits down - but the real valley is over the next hill. That's a local minimum. Ask: how could the hiker escape? (take random steps, carry momentum...). That leads to SGD.</a:t>
+              <a:t>Read together. One-line summary: training = rolling downhill to the lowest error. Stretch break of 30 seconds before Part 2.</a:t>
             </a:r>
           </a:p>
         </p:txBody>
@@ -1548,7 +1544,7 @@
           <a:p>
             <a:r>
               <a:rPr lang="en-US" dirty="0"/>
-              <a:t>Compare the three paths. Full batch walks carefully. SGD staggers like a tired person but gets there fast, and the wobble can shake it out of a local dip. Mini-batch is the compromise everyone uses. This is exactly practice exercise 3.</a:t>
+              <a:t>Switch gear. After learning, a model must deal with uncertainty: noisy data, unknown future.</a:t>
             </a:r>
           </a:p>
         </p:txBody>
@@ -1635,7 +1631,7 @@
           <a:p>
             <a:r>
               <a:rPr lang="en-US" dirty="0"/>
-              <a:t>Expect: linear regression, logistic regression, neural networks, deep learning, SVM, matrix factorization, LLMs. Say: nearly every modern model - even ChatGPT-style models - is trained with (mini-batch) gradient descent.</a:t>
+              <a:t>Ask: what does 70% chance of rain mean? Collect answers. Then: ML models output probabilities all the time. Key distinction: probability goes from model to data (predict), statistics goes from data back to model (infer). ML uses both.</a:t>
             </a:r>
           </a:p>
         </p:txBody>
@@ -1722,7 +1718,7 @@
           <a:p>
             <a:r>
               <a:rPr lang="en-US" dirty="0"/>
-              <a:t>Read together. One-line summary: training = rolling downhill to the lowest error. Stretch break of 30 seconds before Part 2.</a:t>
+              <a:t>Build from the die example to the email example. Stress: probabilities of all outcomes add up to 1 - that's why softmax outputs sum to 1.</a:t>
             </a:r>
           </a:p>
         </p:txBody>
@@ -1809,7 +1805,7 @@
           <a:p>
             <a:r>
               <a:rPr lang="en-US" dirty="0"/>
-              <a:t>Switch gear. After learning, a model must deal with uncertainty: noisy data, unknown future.</a:t>
+              <a:t>Don't reveal yet. Most students pick 99% or 90%. Show the result bars, then go to the next slide.</a:t>
             </a:r>
           </a:p>
         </p:txBody>
@@ -1896,7 +1892,7 @@
           <a:p>
             <a:r>
               <a:rPr lang="en-US" dirty="0"/>
-              <a:t>Ask: what does 70% chance of rain mean? Collect answers. Then: ML models output probabilities all the time. Key distinction: probability goes from model to data (predict), statistics goes from data back to model (infer). ML uses both.</a:t>
+              <a:t>Count with them: 10 red, 50 lime. Out of 60 positives, only 10 are sick. Formula: 0.99*0.01 / (0.99*0.01 + 0.05*0.99) = 0.167. ML lesson: with rare classes (fraud, disease) a 'positive' is often a false alarm. Bayes = start with a prior, add evidence, get an updated belief.</a:t>
             </a:r>
           </a:p>
         </p:txBody>
@@ -1983,7 +1979,7 @@
           <a:p>
             <a:r>
               <a:rPr lang="en-US" dirty="0"/>
-              <a:t>Build from the die example to the email example. Stress: probabilities of all outcomes add up to 1 - that's why softmax outputs sum to 1.</a:t>
+              <a:t>Tour the gallery with a real example per shape. Top row we count, bottom row we measure. Mention Multinomial (like Bernoulli with many categories - classifying digits 0-9) and Geometric (how many tries until the first success).</a:t>
             </a:r>
           </a:p>
         </p:txBody>
@@ -2070,7 +2066,7 @@
           <a:p>
             <a:r>
               <a:rPr lang="en-US" dirty="0"/>
-              <a:t>Count on the picture. 'Given' means: shrink your world to only the ringed emails. There are 50 rings, 30 of them red: 30/50 = 60%. Compare with P(spam) overall = 40%. Seeing the word 'free' raised our belief - that's conditional probability. Independence: two coin flips - the first tells nothing about the second.</a:t>
+              <a:t>Two minutes in pairs, then run six quick Menti quiz questions. Answers on next slide.</a:t>
             </a:r>
           </a:p>
         </p:txBody>
@@ -2157,7 +2153,7 @@
           <a:p>
             <a:r>
               <a:rPr lang="en-US" dirty="0"/>
-              <a:t>Don't reveal yet. Most students pick 99% or 90%. Show the result bars, then go to the next slide.</a:t>
+              <a:t>Reveal and give the memory trick at the bottom.</a:t>
             </a:r>
           </a:p>
         </p:txBody>
@@ -2244,7 +2240,7 @@
           <a:p>
             <a:r>
               <a:rPr lang="en-US" dirty="0"/>
-              <a:t>Let the cloud grow. Typical words: data, patterns, improve, mistakes, training. Pick 'improve' or 'mistakes' and say: exactly - a model learns by making mistakes and reducing them step by step. Today we see the maths of 'reducing mistakes'.</a:t>
+              <a:t>Calculus is the study of change. In ML we care about one question: if I change a model setting a little, how does the error change?</a:t>
             </a:r>
           </a:p>
         </p:txBody>
@@ -2331,7 +2327,7 @@
           <a:p>
             <a:r>
               <a:rPr lang="en-US" dirty="0"/>
-              <a:t>Count with them: 10 red, 50 lime. Out of 60 positives, only 10 are sick. Formula: 0.99*0.01 / (0.99*0.01 + 0.05*0.99) = 0.167. ML lesson: with rare classes (fraud, disease) a 'positive' is often a false alarm. Bayes = start with a prior, add evidence, get an updated belief.</a:t>
+              <a:t>Expected value: you never roll 3.5, but the long-run average is 3.5. Two archers with the same average but different spread - variance measures spread. Covariance: bigger house, higher price - they move together. PCA uses the covariance matrix to find directions of biggest spread.</a:t>
             </a:r>
           </a:p>
         </p:txBody>
@@ -2418,7 +2414,7 @@
           <a:p>
             <a:r>
               <a:rPr lang="en-US" dirty="0"/>
-              <a:t>Tour the gallery with a real example per shape. Top row we count, bottom row we measure. Mention Multinomial (like Bernoulli with many categories - classifying digits 0-9) and Geometric (how many tries until the first success).</a:t>
+              <a:t>Left: coin flips - early the average jumps around, later it settles at 0.5. Middle: very skewed data. Right: take averages of 30 values, many times - a bell appears. That's the magic of the CLT and why the normal curve is everywhere.</a:t>
             </a:r>
           </a:p>
         </p:txBody>
@@ -2505,7 +2501,7 @@
           <a:p>
             <a:r>
               <a:rPr lang="en-US" dirty="0"/>
-              <a:t>Two minutes in pairs, then run six quick Menti quiz questions. Answers on next slide.</a:t>
+              <a:t>Room of 9 teachers earning about 1200. A CEO walks in. The average salary jumps to 3060 - does anyone earn that? No. The median stays 1200. Mode = most common value. Descriptive statistics describe the data you have.</a:t>
             </a:r>
           </a:p>
         </p:txBody>
@@ -2592,7 +2588,7 @@
           <a:p>
             <a:r>
               <a:rPr lang="en-US" dirty="0"/>
-              <a:t>Reveal and give the memory trick at the bottom.</a:t>
+              <a:t>Courtroom: we assume innocent (the null) until the evidence is too surprising. The p-value measures how surprising. Red tails = rare results if innocent. Land in the tail -&gt; reject the null. ML example: model B scored 1% higher - real improvement or luck? A test answers that.</a:t>
             </a:r>
           </a:p>
         </p:txBody>
@@ -2679,7 +2675,7 @@
           <a:p>
             <a:r>
               <a:rPr lang="en-US" dirty="0"/>
-              <a:t>Expected value: you never roll 3.5, but the long-run average is 3.5. Two archers with the same average but different spread - variance measures spread. Covariance: bigger house, higher price - they move together. PCA uses the covariance matrix to find directions of biggest spread.</a:t>
+              <a:t>Each vertical line is an interval from a different sample. 19 of 20 catch the true mean; the red one missed. That's what 95% means - about the method, not one interval. Practice exercise 1 asks them to compute these.</a:t>
             </a:r>
           </a:p>
         </p:txBody>
@@ -2766,7 +2762,7 @@
           <a:p>
             <a:r>
               <a:rPr lang="en-US" dirty="0"/>
-              <a:t>Left: coin flips - early the average jumps around, later it settles at 0.5. Middle: very skewed data. Right: take averages of 30 values, many times - a bell appears. That's the magic of the CLT and why the normal curve is everywhere.</a:t>
+              <a:t>Answer: FALSE - the most common misunderstanding in science. p = 0.03 means: IF the null were true, results this extreme would appear only 3% of the time.</a:t>
             </a:r>
           </a:p>
         </p:txBody>
@@ -2853,7 +2849,7 @@
           <a:p>
             <a:r>
               <a:rPr lang="en-US" dirty="0"/>
-              <a:t>Room of 9 teachers earning about 1200. A CEO walks in. The average salary jumps to 3060 - does anyone earn that? No. The median stays 1200. Mode = most common value. Descriptive statistics describe the data you have.</a:t>
+              <a:t>Ask: should we ban ice cream to stop drownings? Laughter. The hidden cause is summer heat. ML models find patterns, not reasons.</a:t>
             </a:r>
           </a:p>
         </p:txBody>
@@ -2940,7 +2936,7 @@
           <a:p>
             <a:r>
               <a:rPr lang="en-US" dirty="0"/>
-              <a:t>Courtroom: we assume innocent (the null) until the evidence is too surprising. The p-value measures how surprising. Red tails = rare results if innocent. Land in the tail -&gt; reject the null. ML example: model B scored 1% higher - real improvement or luck? A test answers that.</a:t>
+              <a:t>1) correlation - hidden cause: bigger fires need more firefighters AND cause more damage. 2) causation - randomised experiments can show cause. 3) correlation - wealth drives both.</a:t>
             </a:r>
           </a:p>
         </p:txBody>
@@ -3027,7 +3023,7 @@
           <a:p>
             <a:r>
               <a:rPr lang="en-US" dirty="0"/>
-              <a:t>Each vertical line is an interval from a different sample. 19 of 20 catch the true mean; the red one missed. That's what 95% means - about the method, not one interval. Practice exercise 1 asks them to compute these.</a:t>
+              <a:t>A study of exercise habits done only at the gym. The answer is way off, not because of maths, but because of WHO we asked. ML version: a face-recognition model trained mostly on one group performs badly on others. Representative data matters more than big data.</a:t>
             </a:r>
           </a:p>
         </p:txBody>
@@ -3114,7 +3110,7 @@
           <a:p>
             <a:r>
               <a:rPr lang="en-US" dirty="0"/>
-              <a:t>Answer: FALSE - the most common misunderstanding in science. p = 0.03 means: IF the null were true, results this extreme would appear only 3% of the time.</a:t>
+              <a:t>Connect every concept to a real ML task. Calibration: a well-calibrated model that says 90% is right about 90% of the time. Then preview the practice: ECDF = fraction of data below each value; chi-squared = are two categories related; KS = do two samples come from the same distribution.</a:t>
             </a:r>
           </a:p>
         </p:txBody>
@@ -3201,7 +3197,7 @@
           <a:p>
             <a:r>
               <a:rPr lang="en-US" dirty="0"/>
-              <a:t>Calculus is the study of change. In ML we care about one question: if I change a model setting a little, how does the error change?</a:t>
+              <a:t>Story time. Ask: 'You are blindfolded on a mountain and must reach the valley. What do you do?' Let 2-3 students answer. Answer: feel which way the ground slopes and step downhill, again and again. That is exactly gradient descent - and calculus is the tool that 'feels the slope'.</a:t>
             </a:r>
           </a:p>
         </p:txBody>
@@ -3288,7 +3284,7 @@
           <a:p>
             <a:r>
               <a:rPr lang="en-US" dirty="0"/>
-              <a:t>Ask: should we ban ice cream to stop drownings? Laughter. The hidden cause is summer heat. ML models find patterns, not reasons.</a:t>
+              <a:t>One-line summary: ML is managing uncertainty with numbers.</a:t>
             </a:r>
           </a:p>
         </p:txBody>
@@ -3375,7 +3371,7 @@
           <a:p>
             <a:r>
               <a:rPr lang="en-US" dirty="0"/>
-              <a:t>1) correlation - hidden cause: bigger fires need more firefighters AND cause more damage. 2) causation - randomised experiments can show cause. 3) correlation - wealth drives both.</a:t>
+              <a:t>Build these as 5 Menti Quiz questions (20 s each). Answers: 1 uphill, 2 overshoot, 3 3.5, 4 Poisson, 5 median. Show the leaderboard.</a:t>
             </a:r>
           </a:p>
         </p:txBody>
@@ -3462,7 +3458,7 @@
           <a:p>
             <a:r>
               <a:rPr lang="en-US" dirty="0"/>
-              <a:t>A study of exercise habits done only at the gym. The answer is way off, not because of maths, but because of WHO we asked. ML version: a face-recognition model trained mostly on one group performs badly on others. Representative data matters more than big data.</a:t>
+              <a:t>Tie it together: calculus finds the weights, probability defines what good means, statistics tells us if we can trust the result.</a:t>
             </a:r>
           </a:p>
         </p:txBody>
@@ -3549,7 +3545,7 @@
           <a:p>
             <a:r>
               <a:rPr lang="en-US" dirty="0"/>
-              <a:t>Connect every concept to a real ML task. Calibration: a well-calibrated model that says 90% is right about 90% of the time. Then preview the practice: ECDF = fraction of data below each value; chi-squared = are two categories related; KS = do two samples come from the same distribution.</a:t>
+              <a:t>Read a few answers aloud. Use the 'still confusing' answers to plan the start of the practice session.</a:t>
             </a:r>
           </a:p>
         </p:txBody>
@@ -3636,7 +3632,7 @@
           <a:p>
             <a:r>
               <a:rPr lang="en-US" dirty="0"/>
-              <a:t>One-line summary: ML is managing uncertainty with numbers.</a:t>
+              <a:t>Close. Remind them the practice is auto-checked by unit tests in AutoCode.</a:t>
             </a:r>
           </a:p>
         </p:txBody>
@@ -3659,354 +3655,6 @@
             <a:fld id="{F7021451-1387-4CA6-816F-3879F97B5CBC}" type="slidenum">
               <a:rPr lang="en-US"/>
               <a:t>44</a:t>
-            </a:fld>
-            <a:endParaRPr lang="en-US"/>
-          </a:p>
-        </p:txBody>
-      </p:sp>
-    </p:spTree>
-    <p:extLst>
-      <p:ext uri="{BB962C8B-B14F-4D97-AF65-F5344CB8AC3E}">
-        <p14:creationId xmlns:p14="http://schemas.microsoft.com/office/powerpoint/2010/main" val="1024086991"/>
-      </p:ext>
-    </p:extLst>
-  </p:cSld>
-  <p:clrMapOvr>
-    <a:masterClrMapping/>
-  </p:clrMapOvr>
-</p:notes>
-</file>
-
-<file path=ppt/notesSlides/notesSlide45.xml><?xml version="1.0" encoding="utf-8"?>
-<p:notes xmlns:a="http://schemas.openxmlformats.org/drawingml/2006/main" xmlns:r="http://schemas.openxmlformats.org/officeDocument/2006/relationships" xmlns:p="http://schemas.openxmlformats.org/presentationml/2006/main">
-  <p:cSld>
-    <p:spTree>
-      <p:nvGrpSpPr>
-        <p:cNvPr id="1" name=""/>
-        <p:cNvGrpSpPr/>
-        <p:nvPr/>
-      </p:nvGrpSpPr>
-      <p:grpSpPr>
-        <a:xfrm>
-          <a:off x="0" y="0"/>
-          <a:ext cx="0" cy="0"/>
-          <a:chOff x="0" y="0"/>
-          <a:chExt cx="0" cy="0"/>
-        </a:xfrm>
-      </p:grpSpPr>
-      <p:sp>
-        <p:nvSpPr>
-          <p:cNvPr id="2" name="Slide Image Placeholder 1"/>
-          <p:cNvSpPr>
-            <a:spLocks noGrp="1" noRot="1" noChangeAspect="1"/>
-          </p:cNvSpPr>
-          <p:nvPr>
-            <p:ph type="sldImg"/>
-          </p:nvPr>
-        </p:nvSpPr>
-        <p:spPr/>
-      </p:sp>
-      <p:sp>
-        <p:nvSpPr>
-          <p:cNvPr id="3" name="Notes Placeholder 2"/>
-          <p:cNvSpPr>
-            <a:spLocks noGrp="1"/>
-          </p:cNvSpPr>
-          <p:nvPr>
-            <p:ph type="body" idx="1"/>
-          </p:nvPr>
-        </p:nvSpPr>
-        <p:spPr/>
-        <p:txBody>
-          <a:bodyPr/>
-          <a:lstStyle/>
-          <a:p>
-            <a:r>
-              <a:rPr lang="en-US" dirty="0"/>
-              <a:t>Build these as 5 Menti Quiz questions (20 s each). Answers: 1 uphill, 2 overshoot, 3 3.5, 4 Poisson, 5 median. Show the leaderboard.</a:t>
-            </a:r>
-          </a:p>
-        </p:txBody>
-      </p:sp>
-      <p:sp>
-        <p:nvSpPr>
-          <p:cNvPr id="4" name="Slide Number Placeholder 3"/>
-          <p:cNvSpPr>
-            <a:spLocks noGrp="1"/>
-          </p:cNvSpPr>
-          <p:nvPr>
-            <p:ph type="sldNum" sz="quarter" idx="10"/>
-          </p:nvPr>
-        </p:nvSpPr>
-        <p:spPr/>
-        <p:txBody>
-          <a:bodyPr/>
-          <a:lstStyle/>
-          <a:p>
-            <a:fld id="{F7021451-1387-4CA6-816F-3879F97B5CBC}" type="slidenum">
-              <a:rPr lang="en-US"/>
-              <a:t>45</a:t>
-            </a:fld>
-            <a:endParaRPr lang="en-US"/>
-          </a:p>
-        </p:txBody>
-      </p:sp>
-    </p:spTree>
-    <p:extLst>
-      <p:ext uri="{BB962C8B-B14F-4D97-AF65-F5344CB8AC3E}">
-        <p14:creationId xmlns:p14="http://schemas.microsoft.com/office/powerpoint/2010/main" val="1024086991"/>
-      </p:ext>
-    </p:extLst>
-  </p:cSld>
-  <p:clrMapOvr>
-    <a:masterClrMapping/>
-  </p:clrMapOvr>
-</p:notes>
-</file>
-
-<file path=ppt/notesSlides/notesSlide46.xml><?xml version="1.0" encoding="utf-8"?>
-<p:notes xmlns:a="http://schemas.openxmlformats.org/drawingml/2006/main" xmlns:r="http://schemas.openxmlformats.org/officeDocument/2006/relationships" xmlns:p="http://schemas.openxmlformats.org/presentationml/2006/main">
-  <p:cSld>
-    <p:spTree>
-      <p:nvGrpSpPr>
-        <p:cNvPr id="1" name=""/>
-        <p:cNvGrpSpPr/>
-        <p:nvPr/>
-      </p:nvGrpSpPr>
-      <p:grpSpPr>
-        <a:xfrm>
-          <a:off x="0" y="0"/>
-          <a:ext cx="0" cy="0"/>
-          <a:chOff x="0" y="0"/>
-          <a:chExt cx="0" cy="0"/>
-        </a:xfrm>
-      </p:grpSpPr>
-      <p:sp>
-        <p:nvSpPr>
-          <p:cNvPr id="2" name="Slide Image Placeholder 1"/>
-          <p:cNvSpPr>
-            <a:spLocks noGrp="1" noRot="1" noChangeAspect="1"/>
-          </p:cNvSpPr>
-          <p:nvPr>
-            <p:ph type="sldImg"/>
-          </p:nvPr>
-        </p:nvSpPr>
-        <p:spPr/>
-      </p:sp>
-      <p:sp>
-        <p:nvSpPr>
-          <p:cNvPr id="3" name="Notes Placeholder 2"/>
-          <p:cNvSpPr>
-            <a:spLocks noGrp="1"/>
-          </p:cNvSpPr>
-          <p:nvPr>
-            <p:ph type="body" idx="1"/>
-          </p:nvPr>
-        </p:nvSpPr>
-        <p:spPr/>
-        <p:txBody>
-          <a:bodyPr/>
-          <a:lstStyle/>
-          <a:p>
-            <a:r>
-              <a:rPr lang="en-US" dirty="0"/>
-              <a:t>Tie it together: calculus finds the weights, probability defines what good means, statistics tells us if we can trust the result.</a:t>
-            </a:r>
-          </a:p>
-        </p:txBody>
-      </p:sp>
-      <p:sp>
-        <p:nvSpPr>
-          <p:cNvPr id="4" name="Slide Number Placeholder 3"/>
-          <p:cNvSpPr>
-            <a:spLocks noGrp="1"/>
-          </p:cNvSpPr>
-          <p:nvPr>
-            <p:ph type="sldNum" sz="quarter" idx="10"/>
-          </p:nvPr>
-        </p:nvSpPr>
-        <p:spPr/>
-        <p:txBody>
-          <a:bodyPr/>
-          <a:lstStyle/>
-          <a:p>
-            <a:fld id="{F7021451-1387-4CA6-816F-3879F97B5CBC}" type="slidenum">
-              <a:rPr lang="en-US"/>
-              <a:t>46</a:t>
-            </a:fld>
-            <a:endParaRPr lang="en-US"/>
-          </a:p>
-        </p:txBody>
-      </p:sp>
-    </p:spTree>
-    <p:extLst>
-      <p:ext uri="{BB962C8B-B14F-4D97-AF65-F5344CB8AC3E}">
-        <p14:creationId xmlns:p14="http://schemas.microsoft.com/office/powerpoint/2010/main" val="1024086991"/>
-      </p:ext>
-    </p:extLst>
-  </p:cSld>
-  <p:clrMapOvr>
-    <a:masterClrMapping/>
-  </p:clrMapOvr>
-</p:notes>
-</file>
-
-<file path=ppt/notesSlides/notesSlide47.xml><?xml version="1.0" encoding="utf-8"?>
-<p:notes xmlns:a="http://schemas.openxmlformats.org/drawingml/2006/main" xmlns:r="http://schemas.openxmlformats.org/officeDocument/2006/relationships" xmlns:p="http://schemas.openxmlformats.org/presentationml/2006/main">
-  <p:cSld>
-    <p:spTree>
-      <p:nvGrpSpPr>
-        <p:cNvPr id="1" name=""/>
-        <p:cNvGrpSpPr/>
-        <p:nvPr/>
-      </p:nvGrpSpPr>
-      <p:grpSpPr>
-        <a:xfrm>
-          <a:off x="0" y="0"/>
-          <a:ext cx="0" cy="0"/>
-          <a:chOff x="0" y="0"/>
-          <a:chExt cx="0" cy="0"/>
-        </a:xfrm>
-      </p:grpSpPr>
-      <p:sp>
-        <p:nvSpPr>
-          <p:cNvPr id="2" name="Slide Image Placeholder 1"/>
-          <p:cNvSpPr>
-            <a:spLocks noGrp="1" noRot="1" noChangeAspect="1"/>
-          </p:cNvSpPr>
-          <p:nvPr>
-            <p:ph type="sldImg"/>
-          </p:nvPr>
-        </p:nvSpPr>
-        <p:spPr/>
-      </p:sp>
-      <p:sp>
-        <p:nvSpPr>
-          <p:cNvPr id="3" name="Notes Placeholder 2"/>
-          <p:cNvSpPr>
-            <a:spLocks noGrp="1"/>
-          </p:cNvSpPr>
-          <p:nvPr>
-            <p:ph type="body" idx="1"/>
-          </p:nvPr>
-        </p:nvSpPr>
-        <p:spPr/>
-        <p:txBody>
-          <a:bodyPr/>
-          <a:lstStyle/>
-          <a:p>
-            <a:r>
-              <a:rPr lang="en-US" dirty="0"/>
-              <a:t>Read a few answers aloud. Use the 'still confusing' answers to plan the start of the practice session.</a:t>
-            </a:r>
-          </a:p>
-        </p:txBody>
-      </p:sp>
-      <p:sp>
-        <p:nvSpPr>
-          <p:cNvPr id="4" name="Slide Number Placeholder 3"/>
-          <p:cNvSpPr>
-            <a:spLocks noGrp="1"/>
-          </p:cNvSpPr>
-          <p:nvPr>
-            <p:ph type="sldNum" sz="quarter" idx="10"/>
-          </p:nvPr>
-        </p:nvSpPr>
-        <p:spPr/>
-        <p:txBody>
-          <a:bodyPr/>
-          <a:lstStyle/>
-          <a:p>
-            <a:fld id="{F7021451-1387-4CA6-816F-3879F97B5CBC}" type="slidenum">
-              <a:rPr lang="en-US"/>
-              <a:t>47</a:t>
-            </a:fld>
-            <a:endParaRPr lang="en-US"/>
-          </a:p>
-        </p:txBody>
-      </p:sp>
-    </p:spTree>
-    <p:extLst>
-      <p:ext uri="{BB962C8B-B14F-4D97-AF65-F5344CB8AC3E}">
-        <p14:creationId xmlns:p14="http://schemas.microsoft.com/office/powerpoint/2010/main" val="1024086991"/>
-      </p:ext>
-    </p:extLst>
-  </p:cSld>
-  <p:clrMapOvr>
-    <a:masterClrMapping/>
-  </p:clrMapOvr>
-</p:notes>
-</file>
-
-<file path=ppt/notesSlides/notesSlide48.xml><?xml version="1.0" encoding="utf-8"?>
-<p:notes xmlns:a="http://schemas.openxmlformats.org/drawingml/2006/main" xmlns:r="http://schemas.openxmlformats.org/officeDocument/2006/relationships" xmlns:p="http://schemas.openxmlformats.org/presentationml/2006/main">
-  <p:cSld>
-    <p:spTree>
-      <p:nvGrpSpPr>
-        <p:cNvPr id="1" name=""/>
-        <p:cNvGrpSpPr/>
-        <p:nvPr/>
-      </p:nvGrpSpPr>
-      <p:grpSpPr>
-        <a:xfrm>
-          <a:off x="0" y="0"/>
-          <a:ext cx="0" cy="0"/>
-          <a:chOff x="0" y="0"/>
-          <a:chExt cx="0" cy="0"/>
-        </a:xfrm>
-      </p:grpSpPr>
-      <p:sp>
-        <p:nvSpPr>
-          <p:cNvPr id="2" name="Slide Image Placeholder 1"/>
-          <p:cNvSpPr>
-            <a:spLocks noGrp="1" noRot="1" noChangeAspect="1"/>
-          </p:cNvSpPr>
-          <p:nvPr>
-            <p:ph type="sldImg"/>
-          </p:nvPr>
-        </p:nvSpPr>
-        <p:spPr/>
-      </p:sp>
-      <p:sp>
-        <p:nvSpPr>
-          <p:cNvPr id="3" name="Notes Placeholder 2"/>
-          <p:cNvSpPr>
-            <a:spLocks noGrp="1"/>
-          </p:cNvSpPr>
-          <p:nvPr>
-            <p:ph type="body" idx="1"/>
-          </p:nvPr>
-        </p:nvSpPr>
-        <p:spPr/>
-        <p:txBody>
-          <a:bodyPr/>
-          <a:lstStyle/>
-          <a:p>
-            <a:r>
-              <a:rPr lang="en-US" dirty="0"/>
-              <a:t>Close. Remind them the practice is auto-checked by unit tests in AutoCode.</a:t>
-            </a:r>
-          </a:p>
-        </p:txBody>
-      </p:sp>
-      <p:sp>
-        <p:nvSpPr>
-          <p:cNvPr id="4" name="Slide Number Placeholder 3"/>
-          <p:cNvSpPr>
-            <a:spLocks noGrp="1"/>
-          </p:cNvSpPr>
-          <p:nvPr>
-            <p:ph type="sldNum" sz="quarter" idx="10"/>
-          </p:nvPr>
-        </p:nvSpPr>
-        <p:spPr/>
-        <p:txBody>
-          <a:bodyPr/>
-          <a:lstStyle/>
-          <a:p>
-            <a:fld id="{F7021451-1387-4CA6-816F-3879F97B5CBC}" type="slidenum">
-              <a:rPr lang="en-US"/>
-              <a:t>48</a:t>
             </a:fld>
             <a:endParaRPr lang="en-US"/>
           </a:p>
@@ -4071,7 +3719,7 @@
           <a:p>
             <a:r>
               <a:rPr lang="en-US" dirty="0"/>
-              <a:t>Story time. Ask: 'You are blindfolded on a mountain and must reach the valley. What do you do?' Let 2-3 students answer. Answer: feel which way the ground slopes and step downhill, again and again. That is exactly gradient descent - and calculus is the tool that 'feels the slope'.</a:t>
+              <a:t>Two branches. Differential = how fast something changes. Integral = how much accumulates. Training uses differential, so that's our focus. Integrals come back in Topic 8 because probability is area under a curve.</a:t>
             </a:r>
           </a:p>
         </p:txBody>
@@ -4158,7 +3806,7 @@
           <a:p>
             <a:r>
               <a:rPr lang="en-US" dirty="0"/>
-              <a:t>Two branches. Differential = how fast something changes. Integral = how much accumulates. Training uses differential, so that's our focus. Integrals come back in Topic 8 because probability is area under a curve.</a:t>
+              <a:t>Everyday example: the speedometer. Position changes over time; the derivative of position is speed. Point at the three coloured tangents: down, flat, up. Key sentence: 'the derivative tells us which direction makes the error smaller'. Example: f(x)=x^2-2x+1, derivative 2x-2, at x=3 slope is 4 -&gt; going up, so move left.</a:t>
             </a:r>
           </a:p>
         </p:txBody>
@@ -4245,7 +3893,7 @@
           <a:p>
             <a:r>
               <a:rPr lang="en-US" dirty="0"/>
-              <a:t>Everyday example: the speedometer. Position changes over time; the derivative of position is speed. Point at the three coloured tangents: down, flat, up. Key sentence: 'the derivative tells us which direction makes the error smaller'. Example: f(x)=x^2-2x+1, derivative 2x-2, at x=3 slope is 4 -&gt; going up, so move left.</a:t>
+              <a:t>Answer: B, zero. At the bottom the ground is flat. That is why a training algorithm knows it has arrived: the slope becomes (almost) zero.</a:t>
             </a:r>
           </a:p>
         </p:txBody>
@@ -4332,7 +3980,7 @@
           <a:p>
             <a:r>
               <a:rPr lang="en-US" dirty="0"/>
-              <a:t>Answer: B, zero. At the bottom the ground is flat. That is why a training algorithm knows it has arrived: the slope becomes (almost) zero.</a:t>
+              <a:t>Exam score depends on study hours AND sleep hours. The partial derivative with respect to sleep: sleep one more hour, keep study the same, how does the score change? Notice sleep helps, then too much sleep hurts - the slope changes sign. Math: f(x,y)=x^2+y^2, df/dx=2x, df/dy=2y.</a:t>
             </a:r>
           </a:p>
         </p:txBody>
@@ -4419,7 +4067,7 @@
           <a:p>
             <a:r>
               <a:rPr lang="en-US" dirty="0"/>
-              <a:t>Exam score depends on study hours AND sleep hours. The partial derivative with respect to sleep: sleep one more hour, keep study the same, how does the score change? Notice sleep helps, then too much sleep hurts - the slope changes sign. Math: f(x,y)=x^2+y^2, df/dx=2x, df/dy=2y.</a:t>
+              <a:t>The map shows the error landscape from above: rings are equal-error lines, the star is the minimum. At the dot, the red arrow is the gradient - uphill. The blue arrow is minus gradient - downhill, straight toward the star. Link to Topic 6: the gradient is a VECTOR.</a:t>
             </a:r>
           </a:p>
         </p:txBody>
@@ -4991,538 +4639,6 @@
 
 <file path=ppt/slides/slide10.xml><?xml version="1.0" encoding="utf-8"?>
 <p:sld xmlns:a="http://schemas.openxmlformats.org/drawingml/2006/main" xmlns:r="http://schemas.openxmlformats.org/officeDocument/2006/relationships" xmlns:p="http://schemas.openxmlformats.org/presentationml/2006/main">
-  <p:cSld name="Slide 10">
-    <p:bg>
-      <p:bgPr>
-        <a:solidFill>
-          <a:srgbClr val="FFFFFF"/>
-        </a:solidFill>
-        <a:effectLst/>
-      </p:bgPr>
-    </p:bg>
-    <p:spTree>
-      <p:nvGrpSpPr>
-        <p:cNvPr id="1" name=""/>
-        <p:cNvGrpSpPr/>
-        <p:nvPr/>
-      </p:nvGrpSpPr>
-      <p:grpSpPr>
-        <a:xfrm>
-          <a:off x="0" y="0"/>
-          <a:ext cx="0" cy="0"/>
-          <a:chOff x="0" y="0"/>
-          <a:chExt cx="0" cy="0"/>
-        </a:xfrm>
-      </p:grpSpPr>
-      <p:sp>
-        <p:nvSpPr>
-          <p:cNvPr id="2" name="Shape 0"/>
-          <p:cNvSpPr/>
-          <p:nvPr/>
-        </p:nvSpPr>
-        <p:spPr>
-          <a:xfrm>
-            <a:off x="457200" y="411480"/>
-            <a:ext cx="2103120" cy="502920"/>
-          </a:xfrm>
-          <a:prstGeom prst="rect">
-            <a:avLst/>
-          </a:prstGeom>
-          <a:solidFill>
-            <a:srgbClr val="39C2D7"/>
-          </a:solidFill>
-          <a:ln/>
-        </p:spPr>
-      </p:sp>
-      <p:sp>
-        <p:nvSpPr>
-          <p:cNvPr id="3" name="Text 1"/>
-          <p:cNvSpPr txBox="1"/>
-          <p:nvPr/>
-        </p:nvSpPr>
-        <p:spPr>
-          <a:xfrm>
-            <a:off x="457200" y="411480"/>
-            <a:ext cx="2103120" cy="502920"/>
-          </a:xfrm>
-          <a:prstGeom prst="rect">
-            <a:avLst/>
-          </a:prstGeom>
-          <a:noFill/>
-          <a:ln/>
-        </p:spPr>
-        <p:txBody>
-          <a:bodyPr wrap="square" lIns="0" tIns="0" rIns="0" bIns="0" rtlCol="0" anchor="ctr"/>
-          <a:lstStyle/>
-          <a:p>
-            <a:pPr marL="0" indent="0" algn="ctr">
-              <a:buNone/>
-            </a:pPr>
-            <a:r>
-              <a:rPr lang="en-US" sz="1400" b="1" dirty="0">
-                <a:solidFill>
-                  <a:srgbClr val="FFFFFF"/>
-                </a:solidFill>
-                <a:latin typeface="Montserrat" pitchFamily="34" charset="0"/>
-                <a:ea typeface="Montserrat" pitchFamily="34" charset="-122"/>
-                <a:cs typeface="Montserrat" pitchFamily="34" charset="-120"/>
-              </a:rPr>
-              <a:t>Gradient</a:t>
-            </a:r>
-            <a:endParaRPr lang="en-US" sz="1400" dirty="0"/>
-          </a:p>
-        </p:txBody>
-      </p:sp>
-      <p:sp>
-        <p:nvSpPr>
-          <p:cNvPr id="4" name="Text 2"/>
-          <p:cNvSpPr txBox="1"/>
-          <p:nvPr/>
-        </p:nvSpPr>
-        <p:spPr>
-          <a:xfrm>
-            <a:off x="10149840" y="457200"/>
-            <a:ext cx="1600200" cy="411480"/>
-          </a:xfrm>
-          <a:prstGeom prst="rect">
-            <a:avLst/>
-          </a:prstGeom>
-          <a:noFill/>
-          <a:ln/>
-        </p:spPr>
-        <p:txBody>
-          <a:bodyPr wrap="square" lIns="0" tIns="0" rIns="0" bIns="0" rtlCol="0" anchor="ctr"/>
-          <a:lstStyle/>
-          <a:p>
-            <a:pPr marL="0" indent="0" algn="r">
-              <a:buNone/>
-            </a:pPr>
-            <a:r>
-              <a:rPr lang="en-US" sz="1300" i="1" dirty="0">
-                <a:solidFill>
-                  <a:srgbClr val="464547"/>
-                </a:solidFill>
-                <a:latin typeface="Calibri" pitchFamily="34" charset="0"/>
-                <a:ea typeface="Calibri" pitchFamily="34" charset="-122"/>
-                <a:cs typeface="Calibri" pitchFamily="34" charset="-120"/>
-              </a:rPr>
-              <a:t>~4 min</a:t>
-            </a:r>
-            <a:endParaRPr lang="en-US" sz="1300" dirty="0"/>
-          </a:p>
-        </p:txBody>
-      </p:sp>
-      <p:sp>
-        <p:nvSpPr>
-          <p:cNvPr id="5" name="Text 3"/>
-          <p:cNvSpPr txBox="1"/>
-          <p:nvPr/>
-        </p:nvSpPr>
-        <p:spPr>
-          <a:xfrm>
-            <a:off x="457200" y="1024128"/>
-            <a:ext cx="11247120" cy="594360"/>
-          </a:xfrm>
-          <a:prstGeom prst="rect">
-            <a:avLst/>
-          </a:prstGeom>
-          <a:noFill/>
-          <a:ln/>
-        </p:spPr>
-        <p:txBody>
-          <a:bodyPr wrap="square" lIns="0" tIns="0" rIns="0" bIns="0" rtlCol="0" anchor="ctr"/>
-          <a:lstStyle/>
-          <a:p>
-            <a:pPr marL="0" indent="0">
-              <a:buNone/>
-            </a:pPr>
-            <a:r>
-              <a:rPr lang="en-US" sz="2500" b="1" dirty="0">
-                <a:solidFill>
-                  <a:srgbClr val="222222"/>
-                </a:solidFill>
-                <a:latin typeface="Montserrat" pitchFamily="34" charset="0"/>
-                <a:ea typeface="Montserrat" pitchFamily="34" charset="-122"/>
-                <a:cs typeface="Montserrat" pitchFamily="34" charset="-120"/>
-              </a:rPr>
-              <a:t>Gradient = all partial derivatives in one arrow</a:t>
-            </a:r>
-            <a:endParaRPr lang="en-US" sz="2500" dirty="0"/>
-          </a:p>
-        </p:txBody>
-      </p:sp>
-      <p:pic>
-        <p:nvPicPr>
-          <p:cNvPr id="6" name="Image 0" descr="/home/claude/d78/gradient.png"/>
-          <p:cNvPicPr>
-            <a:picLocks noChangeAspect="1"/>
-          </p:cNvPicPr>
-          <p:nvPr/>
-        </p:nvPicPr>
-        <p:blipFill>
-          <a:blip r:embed="rId3"/>
-          <a:stretch>
-            <a:fillRect/>
-          </a:stretch>
-        </p:blipFill>
-        <p:spPr>
-          <a:xfrm>
-            <a:off x="1744789" y="1737360"/>
-            <a:ext cx="4648581" cy="4480560"/>
-          </a:xfrm>
-          <a:prstGeom prst="rect">
-            <a:avLst/>
-          </a:prstGeom>
-        </p:spPr>
-      </p:pic>
-      <p:sp>
-        <p:nvSpPr>
-          <p:cNvPr id="7" name="Shape 4"/>
-          <p:cNvSpPr/>
-          <p:nvPr/>
-        </p:nvSpPr>
-        <p:spPr>
-          <a:xfrm>
-            <a:off x="7955280" y="1737360"/>
-            <a:ext cx="3794760" cy="4480560"/>
-          </a:xfrm>
-          <a:prstGeom prst="rect">
-            <a:avLst/>
-          </a:prstGeom>
-          <a:solidFill>
-            <a:srgbClr val="F6F6F6"/>
-          </a:solidFill>
-          <a:ln/>
-        </p:spPr>
-      </p:sp>
-      <p:sp>
-        <p:nvSpPr>
-          <p:cNvPr id="8" name="Shape 5"/>
-          <p:cNvSpPr/>
-          <p:nvPr/>
-        </p:nvSpPr>
-        <p:spPr>
-          <a:xfrm>
-            <a:off x="7955280" y="1737360"/>
-            <a:ext cx="3794760" cy="457200"/>
-          </a:xfrm>
-          <a:prstGeom prst="rect">
-            <a:avLst/>
-          </a:prstGeom>
-          <a:solidFill>
-            <a:srgbClr val="39C2D7"/>
-          </a:solidFill>
-          <a:ln/>
-        </p:spPr>
-      </p:sp>
-      <p:sp>
-        <p:nvSpPr>
-          <p:cNvPr id="9" name="Text 6"/>
-          <p:cNvSpPr txBox="1"/>
-          <p:nvPr/>
-        </p:nvSpPr>
-        <p:spPr>
-          <a:xfrm>
-            <a:off x="8138160" y="1737360"/>
-            <a:ext cx="3474720" cy="457200"/>
-          </a:xfrm>
-          <a:prstGeom prst="rect">
-            <a:avLst/>
-          </a:prstGeom>
-          <a:noFill/>
-          <a:ln/>
-        </p:spPr>
-        <p:txBody>
-          <a:bodyPr wrap="square" lIns="0" tIns="0" rIns="0" bIns="0" rtlCol="0" anchor="ctr"/>
-          <a:lstStyle/>
-          <a:p>
-            <a:pPr marL="0" indent="0">
-              <a:buNone/>
-            </a:pPr>
-            <a:r>
-              <a:rPr lang="en-US" sz="1300" b="1" dirty="0">
-                <a:solidFill>
-                  <a:srgbClr val="FFFFFF"/>
-                </a:solidFill>
-                <a:latin typeface="Montserrat" pitchFamily="34" charset="0"/>
-                <a:ea typeface="Montserrat" pitchFamily="34" charset="-122"/>
-                <a:cs typeface="Montserrat" pitchFamily="34" charset="-120"/>
-              </a:rPr>
-              <a:t>KEY IDEA</a:t>
-            </a:r>
-            <a:endParaRPr lang="en-US" sz="1300" dirty="0"/>
-          </a:p>
-        </p:txBody>
-      </p:sp>
-      <p:sp>
-        <p:nvSpPr>
-          <p:cNvPr id="10" name="Text 7"/>
-          <p:cNvSpPr/>
-          <p:nvPr/>
-        </p:nvSpPr>
-        <p:spPr>
-          <a:xfrm>
-            <a:off x="8092440" y="2331720"/>
-            <a:ext cx="3520440" cy="2743200"/>
-          </a:xfrm>
-          <a:prstGeom prst="rect">
-            <a:avLst/>
-          </a:prstGeom>
-          <a:noFill/>
-          <a:ln/>
-        </p:spPr>
-        <p:txBody>
-          <a:bodyPr wrap="square" lIns="254" tIns="254" rIns="254" bIns="254" rtlCol="0" anchor="t"/>
-          <a:lstStyle/>
-          <a:p>
-            <a:pPr marL="342900" indent="-342900">
-              <a:spcAft>
-                <a:spcPts val="800"/>
-              </a:spcAft>
-              <a:buSzPct val="100000"/>
-              <a:buChar char="•"/>
-            </a:pPr>
-            <a:r>
-              <a:rPr lang="en-US" sz="1500" dirty="0">
-                <a:solidFill>
-                  <a:srgbClr val="222222"/>
-                </a:solidFill>
-                <a:latin typeface="Calibri" pitchFamily="34" charset="0"/>
-                <a:ea typeface="Calibri" pitchFamily="34" charset="-122"/>
-                <a:cs typeface="Calibri" pitchFamily="34" charset="-120"/>
-              </a:rPr>
-              <a:t>Gradient = [df/dx, df/dy, ...] - a vector</a:t>
-            </a:r>
-            <a:endParaRPr lang="en-US" sz="1500" dirty="0"/>
-          </a:p>
-          <a:p>
-            <a:pPr marL="342900" indent="-342900">
-              <a:spcAft>
-                <a:spcPts val="800"/>
-              </a:spcAft>
-              <a:buSzPct val="100000"/>
-              <a:buChar char="•"/>
-            </a:pPr>
-            <a:r>
-              <a:rPr lang="en-US" sz="1500" dirty="0">
-                <a:solidFill>
-                  <a:srgbClr val="222222"/>
-                </a:solidFill>
-                <a:latin typeface="Calibri" pitchFamily="34" charset="0"/>
-                <a:ea typeface="Calibri" pitchFamily="34" charset="-122"/>
-                <a:cs typeface="Calibri" pitchFamily="34" charset="-120"/>
-              </a:rPr>
-              <a:t>It points in the steepest UPHILL direction</a:t>
-            </a:r>
-            <a:endParaRPr lang="en-US" sz="1500" dirty="0"/>
-          </a:p>
-          <a:p>
-            <a:pPr marL="342900" indent="-342900">
-              <a:spcAft>
-                <a:spcPts val="800"/>
-              </a:spcAft>
-              <a:buSzPct val="100000"/>
-              <a:buChar char="•"/>
-            </a:pPr>
-            <a:r>
-              <a:rPr lang="en-US" sz="1500" dirty="0">
-                <a:solidFill>
-                  <a:srgbClr val="222222"/>
-                </a:solidFill>
-                <a:latin typeface="Calibri" pitchFamily="34" charset="0"/>
-                <a:ea typeface="Calibri" pitchFamily="34" charset="-122"/>
-                <a:cs typeface="Calibri" pitchFamily="34" charset="-120"/>
-              </a:rPr>
-              <a:t>Minus gradient = steepest DOWNHILL</a:t>
-            </a:r>
-            <a:endParaRPr lang="en-US" sz="1500" dirty="0"/>
-          </a:p>
-          <a:p>
-            <a:pPr marL="342900" indent="-342900">
-              <a:spcAft>
-                <a:spcPts val="800"/>
-              </a:spcAft>
-              <a:buSzPct val="100000"/>
-              <a:buChar char="•"/>
-            </a:pPr>
-            <a:r>
-              <a:rPr lang="en-US" sz="1500" dirty="0">
-                <a:solidFill>
-                  <a:srgbClr val="222222"/>
-                </a:solidFill>
-                <a:latin typeface="Calibri" pitchFamily="34" charset="0"/>
-                <a:ea typeface="Calibri" pitchFamily="34" charset="-122"/>
-                <a:cs typeface="Calibri" pitchFamily="34" charset="-120"/>
-              </a:rPr>
-              <a:t>f(x,y)=x^2+y^2 at (2,1): gradient = [4, 2]</a:t>
-            </a:r>
-            <a:endParaRPr lang="en-US" sz="1500" dirty="0"/>
-          </a:p>
-        </p:txBody>
-      </p:sp>
-      <p:sp>
-        <p:nvSpPr>
-          <p:cNvPr id="11" name="Shape 8"/>
-          <p:cNvSpPr/>
-          <p:nvPr/>
-        </p:nvSpPr>
-        <p:spPr>
-          <a:xfrm>
-            <a:off x="8092440" y="5166360"/>
-            <a:ext cx="3520440" cy="914400"/>
-          </a:xfrm>
-          <a:prstGeom prst="rect">
-            <a:avLst/>
-          </a:prstGeom>
-          <a:solidFill>
-            <a:srgbClr val="FFFFFF"/>
-          </a:solidFill>
-          <a:ln w="19050">
-            <a:solidFill>
-              <a:srgbClr val="39C2D7"/>
-            </a:solidFill>
-            <a:prstDash val="solid"/>
-          </a:ln>
-        </p:spPr>
-      </p:sp>
-      <p:sp>
-        <p:nvSpPr>
-          <p:cNvPr id="12" name="Text 9"/>
-          <p:cNvSpPr/>
-          <p:nvPr/>
-        </p:nvSpPr>
-        <p:spPr>
-          <a:xfrm>
-            <a:off x="8183880" y="5166360"/>
-            <a:ext cx="3383280" cy="914400"/>
-          </a:xfrm>
-          <a:prstGeom prst="rect">
-            <a:avLst/>
-          </a:prstGeom>
-          <a:noFill/>
-          <a:ln/>
-        </p:spPr>
-        <p:txBody>
-          <a:bodyPr wrap="square" lIns="254" tIns="254" rIns="254" bIns="254" rtlCol="0" anchor="ctr"/>
-          <a:lstStyle/>
-          <a:p>
-            <a:pPr marL="0" indent="0">
-              <a:buNone/>
-            </a:pPr>
-            <a:r>
-              <a:rPr lang="en-US" sz="1300" b="1" dirty="0">
-                <a:solidFill>
-                  <a:srgbClr val="39C2D7"/>
-                </a:solidFill>
-                <a:latin typeface="Montserrat" pitchFamily="34" charset="0"/>
-                <a:ea typeface="Montserrat" pitchFamily="34" charset="-122"/>
-                <a:cs typeface="Montserrat" pitchFamily="34" charset="-120"/>
-              </a:rPr>
-              <a:t>In ML:  </a:t>
-            </a:r>
-            <a:r>
-              <a:rPr lang="en-US" sz="1300" dirty="0">
-                <a:solidFill>
-                  <a:srgbClr val="222222"/>
-                </a:solidFill>
-                <a:latin typeface="Calibri" pitchFamily="34" charset="0"/>
-                <a:ea typeface="Calibri" pitchFamily="34" charset="-122"/>
-                <a:cs typeface="Calibri" pitchFamily="34" charset="-120"/>
-              </a:rPr>
-              <a:t>we step in the minus-gradient direction to reduce the loss.</a:t>
-            </a:r>
-            <a:endParaRPr lang="en-US" sz="1300" dirty="0"/>
-          </a:p>
-        </p:txBody>
-      </p:sp>
-      <p:sp>
-        <p:nvSpPr>
-          <p:cNvPr id="13" name="Text 10"/>
-          <p:cNvSpPr txBox="1"/>
-          <p:nvPr/>
-        </p:nvSpPr>
-        <p:spPr>
-          <a:xfrm>
-            <a:off x="457200" y="6382512"/>
-            <a:ext cx="1097280" cy="292608"/>
-          </a:xfrm>
-          <a:prstGeom prst="rect">
-            <a:avLst/>
-          </a:prstGeom>
-          <a:noFill/>
-          <a:ln/>
-        </p:spPr>
-        <p:txBody>
-          <a:bodyPr wrap="square" lIns="0" tIns="0" rIns="0" bIns="0" rtlCol="0" anchor="ctr"/>
-          <a:lstStyle/>
-          <a:p>
-            <a:pPr marL="0" indent="0">
-              <a:buNone/>
-            </a:pPr>
-            <a:r>
-              <a:rPr lang="en-US" sz="1300" b="1" dirty="0">
-                <a:solidFill>
-                  <a:srgbClr val="39C2D7"/>
-                </a:solidFill>
-                <a:latin typeface="Montserrat" pitchFamily="34" charset="0"/>
-                <a:ea typeface="Montserrat" pitchFamily="34" charset="-122"/>
-                <a:cs typeface="Montserrat" pitchFamily="34" charset="-120"/>
-              </a:rPr>
-              <a:t>iTPU</a:t>
-            </a:r>
-            <a:endParaRPr lang="en-US" sz="1300" dirty="0"/>
-          </a:p>
-        </p:txBody>
-      </p:sp>
-      <p:sp>
-        <p:nvSpPr>
-          <p:cNvPr id="14" name="Text 11"/>
-          <p:cNvSpPr txBox="1"/>
-          <p:nvPr/>
-        </p:nvSpPr>
-        <p:spPr>
-          <a:xfrm>
-            <a:off x="1371600" y="6400800"/>
-            <a:ext cx="6400800" cy="256032"/>
-          </a:xfrm>
-          <a:prstGeom prst="rect">
-            <a:avLst/>
-          </a:prstGeom>
-          <a:noFill/>
-          <a:ln/>
-        </p:spPr>
-        <p:txBody>
-          <a:bodyPr wrap="square" lIns="0" tIns="0" rIns="0" bIns="0" rtlCol="0" anchor="ctr"/>
-          <a:lstStyle/>
-          <a:p>
-            <a:pPr marL="0" indent="0">
-              <a:buNone/>
-            </a:pPr>
-            <a:r>
-              <a:rPr lang="en-US" sz="900" dirty="0">
-                <a:solidFill>
-                  <a:srgbClr val="464547"/>
-                </a:solidFill>
-                <a:latin typeface="Calibri" pitchFamily="34" charset="0"/>
-                <a:ea typeface="Calibri" pitchFamily="34" charset="-122"/>
-                <a:cs typeface="Calibri" pitchFamily="34" charset="-120"/>
-              </a:rPr>
-              <a:t>Part 1  |  Calculus - how a model learns</a:t>
-            </a:r>
-            <a:endParaRPr lang="en-US" sz="900" dirty="0"/>
-          </a:p>
-        </p:txBody>
-      </p:sp>
-    </p:spTree>
-  </p:cSld>
-  <p:clrMapOvr>
-    <a:masterClrMapping/>
-  </p:clrMapOvr>
-</p:sld>
-</file>
-
-<file path=ppt/slides/slide11.xml><?xml version="1.0" encoding="utf-8"?>
-<p:sld xmlns:a="http://schemas.openxmlformats.org/drawingml/2006/main" xmlns:r="http://schemas.openxmlformats.org/officeDocument/2006/relationships" xmlns:p="http://schemas.openxmlformats.org/presentationml/2006/main">
   <p:cSld name="Slide 11">
     <p:bg>
       <p:bgPr>
@@ -6645,7 +5761,7 @@
 </p:sld>
 </file>
 
-<file path=ppt/slides/slide12.xml><?xml version="1.0" encoding="utf-8"?>
+<file path=ppt/slides/slide11.xml><?xml version="1.0" encoding="utf-8"?>
 <p:sld xmlns:a="http://schemas.openxmlformats.org/drawingml/2006/main" xmlns:r="http://schemas.openxmlformats.org/officeDocument/2006/relationships" xmlns:p="http://schemas.openxmlformats.org/presentationml/2006/main">
   <p:cSld name="Slide 12">
     <p:bg>
@@ -7007,7 +6123,7 @@
 </p:sld>
 </file>
 
-<file path=ppt/slides/slide13.xml><?xml version="1.0" encoding="utf-8"?>
+<file path=ppt/slides/slide12.xml><?xml version="1.0" encoding="utf-8"?>
 <p:sld xmlns:a="http://schemas.openxmlformats.org/drawingml/2006/main" xmlns:r="http://schemas.openxmlformats.org/officeDocument/2006/relationships" xmlns:p="http://schemas.openxmlformats.org/presentationml/2006/main">
   <p:cSld name="Slide 13">
     <p:bg>
@@ -7422,7 +6538,7 @@
 </p:sld>
 </file>
 
-<file path=ppt/slides/slide14.xml><?xml version="1.0" encoding="utf-8"?>
+<file path=ppt/slides/slide13.xml><?xml version="1.0" encoding="utf-8"?>
 <p:sld xmlns:a="http://schemas.openxmlformats.org/drawingml/2006/main" xmlns:r="http://schemas.openxmlformats.org/officeDocument/2006/relationships" xmlns:p="http://schemas.openxmlformats.org/presentationml/2006/main">
   <p:cSld name="Slide 14">
     <p:bg>
@@ -7894,7 +7010,7 @@
 </p:sld>
 </file>
 
-<file path=ppt/slides/slide15.xml><?xml version="1.0" encoding="utf-8"?>
+<file path=ppt/slides/slide14.xml><?xml version="1.0" encoding="utf-8"?>
 <p:sld xmlns:a="http://schemas.openxmlformats.org/drawingml/2006/main" xmlns:r="http://schemas.openxmlformats.org/officeDocument/2006/relationships" xmlns:p="http://schemas.openxmlformats.org/presentationml/2006/main">
   <p:cSld name="Slide 15">
     <p:bg>
@@ -8672,7 +7788,7 @@
 </p:sld>
 </file>
 
-<file path=ppt/slides/slide16.xml><?xml version="1.0" encoding="utf-8"?>
+<file path=ppt/slides/slide15.xml><?xml version="1.0" encoding="utf-8"?>
 <p:sld xmlns:a="http://schemas.openxmlformats.org/drawingml/2006/main" xmlns:r="http://schemas.openxmlformats.org/officeDocument/2006/relationships" xmlns:p="http://schemas.openxmlformats.org/presentationml/2006/main">
   <p:cSld name="Slide 16">
     <p:bg>
@@ -9165,7 +8281,7 @@
 </p:sld>
 </file>
 
-<file path=ppt/slides/slide17.xml><?xml version="1.0" encoding="utf-8"?>
+<file path=ppt/slides/slide16.xml><?xml version="1.0" encoding="utf-8"?>
 <p:sld xmlns:a="http://schemas.openxmlformats.org/drawingml/2006/main" xmlns:r="http://schemas.openxmlformats.org/officeDocument/2006/relationships" xmlns:p="http://schemas.openxmlformats.org/presentationml/2006/main">
   <p:cSld name="Slide 17">
     <p:bg>
@@ -10673,7 +9789,7 @@
 </p:sld>
 </file>
 
-<file path=ppt/slides/slide18.xml><?xml version="1.0" encoding="utf-8"?>
+<file path=ppt/slides/slide17.xml><?xml version="1.0" encoding="utf-8"?>
 <p:sld xmlns:a="http://schemas.openxmlformats.org/drawingml/2006/main" xmlns:r="http://schemas.openxmlformats.org/officeDocument/2006/relationships" xmlns:p="http://schemas.openxmlformats.org/presentationml/2006/main">
   <p:cSld name="Slide 18">
     <p:bg>
@@ -11984,7 +11100,7 @@
 </p:sld>
 </file>
 
-<file path=ppt/slides/slide19.xml><?xml version="1.0" encoding="utf-8"?>
+<file path=ppt/slides/slide18.xml><?xml version="1.0" encoding="utf-8"?>
 <p:sld xmlns:a="http://schemas.openxmlformats.org/drawingml/2006/main" xmlns:r="http://schemas.openxmlformats.org/officeDocument/2006/relationships" xmlns:p="http://schemas.openxmlformats.org/presentationml/2006/main">
   <p:cSld name="Slide 19">
     <p:bg>
@@ -12374,6 +11490,510 @@
               <a:t>Part 1  |  Calculus - how a model learns</a:t>
             </a:r>
             <a:endParaRPr lang="en-US" sz="900" dirty="0"/>
+          </a:p>
+        </p:txBody>
+      </p:sp>
+    </p:spTree>
+  </p:cSld>
+  <p:clrMapOvr>
+    <a:masterClrMapping/>
+  </p:clrMapOvr>
+</p:sld>
+</file>
+
+<file path=ppt/slides/slide19.xml><?xml version="1.0" encoding="utf-8"?>
+<p:sld xmlns:a="http://schemas.openxmlformats.org/drawingml/2006/main" xmlns:r="http://schemas.openxmlformats.org/officeDocument/2006/relationships" xmlns:p="http://schemas.openxmlformats.org/presentationml/2006/main">
+  <p:cSld name="Slide 20">
+    <p:bg>
+      <p:bgPr>
+        <a:solidFill>
+          <a:srgbClr val="39C2D7"/>
+        </a:solidFill>
+        <a:effectLst/>
+      </p:bgPr>
+    </p:bg>
+    <p:spTree>
+      <p:nvGrpSpPr>
+        <p:cNvPr id="1" name=""/>
+        <p:cNvGrpSpPr/>
+        <p:nvPr/>
+      </p:nvGrpSpPr>
+      <p:grpSpPr>
+        <a:xfrm>
+          <a:off x="0" y="0"/>
+          <a:ext cx="0" cy="0"/>
+          <a:chOff x="0" y="0"/>
+          <a:chExt cx="0" cy="0"/>
+        </a:xfrm>
+      </p:grpSpPr>
+      <p:sp>
+        <p:nvSpPr>
+          <p:cNvPr id="2" name="Shape 0"/>
+          <p:cNvSpPr/>
+          <p:nvPr/>
+        </p:nvSpPr>
+        <p:spPr>
+          <a:xfrm>
+            <a:off x="457200" y="411480"/>
+            <a:ext cx="4389120" cy="502920"/>
+          </a:xfrm>
+          <a:prstGeom prst="rect">
+            <a:avLst/>
+          </a:prstGeom>
+          <a:solidFill>
+            <a:srgbClr val="FFFFFF"/>
+          </a:solidFill>
+          <a:ln/>
+        </p:spPr>
+      </p:sp>
+      <p:sp>
+        <p:nvSpPr>
+          <p:cNvPr id="3" name="Text 1"/>
+          <p:cNvSpPr txBox="1"/>
+          <p:nvPr/>
+        </p:nvSpPr>
+        <p:spPr>
+          <a:xfrm>
+            <a:off x="457200" y="411480"/>
+            <a:ext cx="4389120" cy="502920"/>
+          </a:xfrm>
+          <a:prstGeom prst="rect">
+            <a:avLst/>
+          </a:prstGeom>
+          <a:noFill/>
+          <a:ln/>
+        </p:spPr>
+        <p:txBody>
+          <a:bodyPr wrap="square" lIns="0" tIns="0" rIns="0" bIns="0" rtlCol="0" anchor="ctr"/>
+          <a:lstStyle/>
+          <a:p>
+            <a:pPr marL="0" indent="0" algn="ctr">
+              <a:buNone/>
+            </a:pPr>
+            <a:r>
+              <a:rPr lang="en-US" sz="1400" b="1" dirty="0">
+                <a:solidFill>
+                  <a:srgbClr val="39C2D7"/>
+                </a:solidFill>
+                <a:latin typeface="Montserrat" pitchFamily="34" charset="0"/>
+                <a:ea typeface="Montserrat" pitchFamily="34" charset="-122"/>
+                <a:cs typeface="Montserrat" pitchFamily="34" charset="-120"/>
+              </a:rPr>
+              <a:t>MENTI  |  Multiple choice</a:t>
+            </a:r>
+            <a:endParaRPr lang="en-US" sz="1400" dirty="0"/>
+          </a:p>
+        </p:txBody>
+      </p:sp>
+      <p:sp>
+        <p:nvSpPr>
+          <p:cNvPr id="4" name="Text 2"/>
+          <p:cNvSpPr txBox="1"/>
+          <p:nvPr/>
+        </p:nvSpPr>
+        <p:spPr>
+          <a:xfrm>
+            <a:off x="10149840" y="457200"/>
+            <a:ext cx="1600200" cy="411480"/>
+          </a:xfrm>
+          <a:prstGeom prst="rect">
+            <a:avLst/>
+          </a:prstGeom>
+          <a:noFill/>
+          <a:ln/>
+        </p:spPr>
+        <p:txBody>
+          <a:bodyPr wrap="square" lIns="0" tIns="0" rIns="0" bIns="0" rtlCol="0" anchor="ctr"/>
+          <a:lstStyle/>
+          <a:p>
+            <a:pPr marL="0" indent="0" algn="r">
+              <a:buNone/>
+            </a:pPr>
+            <a:r>
+              <a:rPr lang="en-US" sz="1300" i="1" dirty="0">
+                <a:solidFill>
+                  <a:srgbClr val="FFFFFF"/>
+                </a:solidFill>
+                <a:latin typeface="Calibri" pitchFamily="34" charset="0"/>
+                <a:ea typeface="Calibri" pitchFamily="34" charset="-122"/>
+                <a:cs typeface="Calibri" pitchFamily="34" charset="-120"/>
+              </a:rPr>
+              <a:t>~2 min</a:t>
+            </a:r>
+            <a:endParaRPr lang="en-US" sz="1300" dirty="0"/>
+          </a:p>
+        </p:txBody>
+      </p:sp>
+      <p:sp>
+        <p:nvSpPr>
+          <p:cNvPr id="5" name="Shape 3"/>
+          <p:cNvSpPr/>
+          <p:nvPr/>
+        </p:nvSpPr>
+        <p:spPr>
+          <a:xfrm>
+            <a:off x="7818120" y="1051560"/>
+            <a:ext cx="3931920" cy="502920"/>
+          </a:xfrm>
+          <a:prstGeom prst="rect">
+            <a:avLst/>
+          </a:prstGeom>
+          <a:solidFill>
+            <a:srgbClr val="FFFFFF"/>
+          </a:solidFill>
+          <a:ln/>
+        </p:spPr>
+      </p:sp>
+      <p:sp>
+        <p:nvSpPr>
+          <p:cNvPr id="6" name="Text 4"/>
+          <p:cNvSpPr txBox="1"/>
+          <p:nvPr/>
+        </p:nvSpPr>
+        <p:spPr>
+          <a:xfrm>
+            <a:off x="7818120" y="1051560"/>
+            <a:ext cx="3931920" cy="502920"/>
+          </a:xfrm>
+          <a:prstGeom prst="rect">
+            <a:avLst/>
+          </a:prstGeom>
+          <a:noFill/>
+          <a:ln/>
+        </p:spPr>
+        <p:txBody>
+          <a:bodyPr wrap="square" lIns="0" tIns="0" rIns="0" bIns="0" rtlCol="0" anchor="ctr"/>
+          <a:lstStyle/>
+          <a:p>
+            <a:pPr marL="0" indent="0" algn="ctr">
+              <a:buNone/>
+            </a:pPr>
+            <a:r>
+              <a:rPr lang="en-US" sz="1300" b="1" dirty="0">
+                <a:solidFill>
+                  <a:srgbClr val="39C2D7"/>
+                </a:solidFill>
+                <a:latin typeface="Montserrat" pitchFamily="34" charset="0"/>
+                <a:ea typeface="Montserrat" pitchFamily="34" charset="-122"/>
+                <a:cs typeface="Montserrat" pitchFamily="34" charset="-120"/>
+              </a:rPr>
+              <a:t>menti.com   code:  ____ ____</a:t>
+            </a:r>
+            <a:endParaRPr lang="en-US" sz="1300" dirty="0"/>
+          </a:p>
+        </p:txBody>
+      </p:sp>
+      <p:sp>
+        <p:nvSpPr>
+          <p:cNvPr id="7" name="Text 5"/>
+          <p:cNvSpPr txBox="1"/>
+          <p:nvPr/>
+        </p:nvSpPr>
+        <p:spPr>
+          <a:xfrm>
+            <a:off x="640080" y="1691640"/>
+            <a:ext cx="10972800" cy="1325880"/>
+          </a:xfrm>
+          <a:prstGeom prst="rect">
+            <a:avLst/>
+          </a:prstGeom>
+          <a:noFill/>
+          <a:ln/>
+        </p:spPr>
+        <p:txBody>
+          <a:bodyPr wrap="square" lIns="0" tIns="0" rIns="0" bIns="0" rtlCol="0" anchor="t"/>
+          <a:lstStyle/>
+          <a:p>
+            <a:pPr marL="0" indent="0">
+              <a:buNone/>
+            </a:pPr>
+            <a:r>
+              <a:rPr lang="en-US" sz="2700" b="1" dirty="0">
+                <a:solidFill>
+                  <a:srgbClr val="FFFFFF"/>
+                </a:solidFill>
+                <a:latin typeface="Montserrat" pitchFamily="34" charset="0"/>
+                <a:ea typeface="Montserrat" pitchFamily="34" charset="-122"/>
+                <a:cs typeface="Montserrat" pitchFamily="34" charset="-120"/>
+              </a:rPr>
+              <a:t>You set the learning rate to 5.0 on f(x) = x². What happens?</a:t>
+            </a:r>
+            <a:endParaRPr lang="en-US" sz="2700" dirty="0"/>
+          </a:p>
+        </p:txBody>
+      </p:sp>
+      <p:sp>
+        <p:nvSpPr>
+          <p:cNvPr id="8" name="Shape 6"/>
+          <p:cNvSpPr/>
+          <p:nvPr/>
+        </p:nvSpPr>
+        <p:spPr>
+          <a:xfrm>
+            <a:off x="822960" y="3108960"/>
+            <a:ext cx="10515600" cy="621792"/>
+          </a:xfrm>
+          <a:prstGeom prst="rect">
+            <a:avLst/>
+          </a:prstGeom>
+          <a:solidFill>
+            <a:srgbClr val="FFFFFF"/>
+          </a:solidFill>
+          <a:ln/>
+        </p:spPr>
+      </p:sp>
+      <p:sp>
+        <p:nvSpPr>
+          <p:cNvPr id="9" name="Text 7"/>
+          <p:cNvSpPr txBox="1"/>
+          <p:nvPr/>
+        </p:nvSpPr>
+        <p:spPr>
+          <a:xfrm>
+            <a:off x="1097280" y="3108960"/>
+            <a:ext cx="10149840" cy="621792"/>
+          </a:xfrm>
+          <a:prstGeom prst="rect">
+            <a:avLst/>
+          </a:prstGeom>
+          <a:noFill/>
+          <a:ln/>
+        </p:spPr>
+        <p:txBody>
+          <a:bodyPr wrap="square" lIns="0" tIns="0" rIns="0" bIns="0" rtlCol="0" anchor="ctr"/>
+          <a:lstStyle/>
+          <a:p>
+            <a:pPr marL="0" indent="0">
+              <a:buNone/>
+            </a:pPr>
+            <a:r>
+              <a:rPr lang="en-US" sz="1900" dirty="0">
+                <a:solidFill>
+                  <a:srgbClr val="222222"/>
+                </a:solidFill>
+                <a:latin typeface="Calibri" pitchFamily="34" charset="0"/>
+                <a:ea typeface="Calibri" pitchFamily="34" charset="-122"/>
+                <a:cs typeface="Calibri" pitchFamily="34" charset="-120"/>
+              </a:rPr>
+              <a:t>A)  Very slow but correct</a:t>
+            </a:r>
+            <a:endParaRPr lang="en-US" sz="1900" dirty="0"/>
+          </a:p>
+        </p:txBody>
+      </p:sp>
+      <p:sp>
+        <p:nvSpPr>
+          <p:cNvPr id="10" name="Shape 8"/>
+          <p:cNvSpPr/>
+          <p:nvPr/>
+        </p:nvSpPr>
+        <p:spPr>
+          <a:xfrm>
+            <a:off x="822960" y="3858768"/>
+            <a:ext cx="10515600" cy="621792"/>
+          </a:xfrm>
+          <a:prstGeom prst="rect">
+            <a:avLst/>
+          </a:prstGeom>
+          <a:solidFill>
+            <a:srgbClr val="FFFFFF"/>
+          </a:solidFill>
+          <a:ln/>
+        </p:spPr>
+      </p:sp>
+      <p:sp>
+        <p:nvSpPr>
+          <p:cNvPr id="11" name="Text 9"/>
+          <p:cNvSpPr txBox="1"/>
+          <p:nvPr/>
+        </p:nvSpPr>
+        <p:spPr>
+          <a:xfrm>
+            <a:off x="1097280" y="3858768"/>
+            <a:ext cx="10149840" cy="621792"/>
+          </a:xfrm>
+          <a:prstGeom prst="rect">
+            <a:avLst/>
+          </a:prstGeom>
+          <a:noFill/>
+          <a:ln/>
+        </p:spPr>
+        <p:txBody>
+          <a:bodyPr wrap="square" lIns="0" tIns="0" rIns="0" bIns="0" rtlCol="0" anchor="ctr"/>
+          <a:lstStyle/>
+          <a:p>
+            <a:pPr marL="0" indent="0">
+              <a:buNone/>
+            </a:pPr>
+            <a:r>
+              <a:rPr lang="en-US" sz="1900" dirty="0">
+                <a:solidFill>
+                  <a:srgbClr val="222222"/>
+                </a:solidFill>
+                <a:latin typeface="Calibri" pitchFamily="34" charset="0"/>
+                <a:ea typeface="Calibri" pitchFamily="34" charset="-122"/>
+                <a:cs typeface="Calibri" pitchFamily="34" charset="-120"/>
+              </a:rPr>
+              <a:t>B)  Perfect - converges fast</a:t>
+            </a:r>
+            <a:endParaRPr lang="en-US" sz="1900" dirty="0"/>
+          </a:p>
+        </p:txBody>
+      </p:sp>
+      <p:sp>
+        <p:nvSpPr>
+          <p:cNvPr id="12" name="Shape 10"/>
+          <p:cNvSpPr/>
+          <p:nvPr/>
+        </p:nvSpPr>
+        <p:spPr>
+          <a:xfrm>
+            <a:off x="822960" y="4608576"/>
+            <a:ext cx="10515600" cy="621792"/>
+          </a:xfrm>
+          <a:prstGeom prst="rect">
+            <a:avLst/>
+          </a:prstGeom>
+          <a:solidFill>
+            <a:srgbClr val="FFFFFF"/>
+          </a:solidFill>
+          <a:ln/>
+        </p:spPr>
+      </p:sp>
+      <p:sp>
+        <p:nvSpPr>
+          <p:cNvPr id="13" name="Text 11"/>
+          <p:cNvSpPr txBox="1"/>
+          <p:nvPr/>
+        </p:nvSpPr>
+        <p:spPr>
+          <a:xfrm>
+            <a:off x="1097280" y="4608576"/>
+            <a:ext cx="10149840" cy="621792"/>
+          </a:xfrm>
+          <a:prstGeom prst="rect">
+            <a:avLst/>
+          </a:prstGeom>
+          <a:noFill/>
+          <a:ln/>
+        </p:spPr>
+        <p:txBody>
+          <a:bodyPr wrap="square" lIns="0" tIns="0" rIns="0" bIns="0" rtlCol="0" anchor="ctr"/>
+          <a:lstStyle/>
+          <a:p>
+            <a:pPr marL="0" indent="0">
+              <a:buNone/>
+            </a:pPr>
+            <a:r>
+              <a:rPr lang="en-US" sz="1900" dirty="0">
+                <a:solidFill>
+                  <a:srgbClr val="222222"/>
+                </a:solidFill>
+                <a:latin typeface="Calibri" pitchFamily="34" charset="0"/>
+                <a:ea typeface="Calibri" pitchFamily="34" charset="-122"/>
+                <a:cs typeface="Calibri" pitchFamily="34" charset="-120"/>
+              </a:rPr>
+              <a:t>C)  Overshoots and the loss explodes</a:t>
+            </a:r>
+            <a:endParaRPr lang="en-US" sz="1900" dirty="0"/>
+          </a:p>
+        </p:txBody>
+      </p:sp>
+      <p:sp>
+        <p:nvSpPr>
+          <p:cNvPr id="14" name="Shape 12"/>
+          <p:cNvSpPr/>
+          <p:nvPr/>
+        </p:nvSpPr>
+        <p:spPr>
+          <a:xfrm>
+            <a:off x="822960" y="5358384"/>
+            <a:ext cx="10515600" cy="621792"/>
+          </a:xfrm>
+          <a:prstGeom prst="rect">
+            <a:avLst/>
+          </a:prstGeom>
+          <a:solidFill>
+            <a:srgbClr val="FFFFFF"/>
+          </a:solidFill>
+          <a:ln/>
+        </p:spPr>
+      </p:sp>
+      <p:sp>
+        <p:nvSpPr>
+          <p:cNvPr id="15" name="Text 13"/>
+          <p:cNvSpPr txBox="1"/>
+          <p:nvPr/>
+        </p:nvSpPr>
+        <p:spPr>
+          <a:xfrm>
+            <a:off x="1097280" y="5358384"/>
+            <a:ext cx="10149840" cy="621792"/>
+          </a:xfrm>
+          <a:prstGeom prst="rect">
+            <a:avLst/>
+          </a:prstGeom>
+          <a:noFill/>
+          <a:ln/>
+        </p:spPr>
+        <p:txBody>
+          <a:bodyPr wrap="square" lIns="0" tIns="0" rIns="0" bIns="0" rtlCol="0" anchor="ctr"/>
+          <a:lstStyle/>
+          <a:p>
+            <a:pPr marL="0" indent="0">
+              <a:buNone/>
+            </a:pPr>
+            <a:r>
+              <a:rPr lang="en-US" sz="1900" dirty="0">
+                <a:solidFill>
+                  <a:srgbClr val="222222"/>
+                </a:solidFill>
+                <a:latin typeface="Calibri" pitchFamily="34" charset="0"/>
+                <a:ea typeface="Calibri" pitchFamily="34" charset="-122"/>
+                <a:cs typeface="Calibri" pitchFamily="34" charset="-120"/>
+              </a:rPr>
+              <a:t>D)  Nothing changes</a:t>
+            </a:r>
+            <a:endParaRPr lang="en-US" sz="1900" dirty="0"/>
+          </a:p>
+        </p:txBody>
+      </p:sp>
+      <p:sp>
+        <p:nvSpPr>
+          <p:cNvPr id="16" name="Text 14"/>
+          <p:cNvSpPr txBox="1"/>
+          <p:nvPr/>
+        </p:nvSpPr>
+        <p:spPr>
+          <a:xfrm>
+            <a:off x="640080" y="6153912"/>
+            <a:ext cx="10058400" cy="365760"/>
+          </a:xfrm>
+          <a:prstGeom prst="rect">
+            <a:avLst/>
+          </a:prstGeom>
+          <a:noFill/>
+          <a:ln/>
+        </p:spPr>
+        <p:txBody>
+          <a:bodyPr wrap="square" lIns="0" tIns="0" rIns="0" bIns="0" rtlCol="0" anchor="ctr"/>
+          <a:lstStyle/>
+          <a:p>
+            <a:pPr marL="0" indent="0">
+              <a:buNone/>
+            </a:pPr>
+            <a:r>
+              <a:rPr lang="en-US" sz="1500" i="1" dirty="0">
+                <a:solidFill>
+                  <a:srgbClr val="FFFFFF"/>
+                </a:solidFill>
+                <a:latin typeface="Calibri" pitchFamily="34" charset="0"/>
+                <a:ea typeface="Calibri" pitchFamily="34" charset="-122"/>
+                <a:cs typeface="Calibri" pitchFamily="34" charset="-120"/>
+              </a:rPr>
+              <a:t>Vote on your phone now  -  45 seconds</a:t>
+            </a:r>
+            <a:endParaRPr lang="en-US" sz="1500" dirty="0"/>
           </a:p>
         </p:txBody>
       </p:sp>
@@ -13351,1021 +12971,6 @@
 
 <file path=ppt/slides/slide20.xml><?xml version="1.0" encoding="utf-8"?>
 <p:sld xmlns:a="http://schemas.openxmlformats.org/drawingml/2006/main" xmlns:r="http://schemas.openxmlformats.org/officeDocument/2006/relationships" xmlns:p="http://schemas.openxmlformats.org/presentationml/2006/main">
-  <p:cSld name="Slide 20">
-    <p:bg>
-      <p:bgPr>
-        <a:solidFill>
-          <a:srgbClr val="39C2D7"/>
-        </a:solidFill>
-        <a:effectLst/>
-      </p:bgPr>
-    </p:bg>
-    <p:spTree>
-      <p:nvGrpSpPr>
-        <p:cNvPr id="1" name=""/>
-        <p:cNvGrpSpPr/>
-        <p:nvPr/>
-      </p:nvGrpSpPr>
-      <p:grpSpPr>
-        <a:xfrm>
-          <a:off x="0" y="0"/>
-          <a:ext cx="0" cy="0"/>
-          <a:chOff x="0" y="0"/>
-          <a:chExt cx="0" cy="0"/>
-        </a:xfrm>
-      </p:grpSpPr>
-      <p:sp>
-        <p:nvSpPr>
-          <p:cNvPr id="2" name="Shape 0"/>
-          <p:cNvSpPr/>
-          <p:nvPr/>
-        </p:nvSpPr>
-        <p:spPr>
-          <a:xfrm>
-            <a:off x="457200" y="411480"/>
-            <a:ext cx="4389120" cy="502920"/>
-          </a:xfrm>
-          <a:prstGeom prst="rect">
-            <a:avLst/>
-          </a:prstGeom>
-          <a:solidFill>
-            <a:srgbClr val="FFFFFF"/>
-          </a:solidFill>
-          <a:ln/>
-        </p:spPr>
-      </p:sp>
-      <p:sp>
-        <p:nvSpPr>
-          <p:cNvPr id="3" name="Text 1"/>
-          <p:cNvSpPr txBox="1"/>
-          <p:nvPr/>
-        </p:nvSpPr>
-        <p:spPr>
-          <a:xfrm>
-            <a:off x="457200" y="411480"/>
-            <a:ext cx="4389120" cy="502920"/>
-          </a:xfrm>
-          <a:prstGeom prst="rect">
-            <a:avLst/>
-          </a:prstGeom>
-          <a:noFill/>
-          <a:ln/>
-        </p:spPr>
-        <p:txBody>
-          <a:bodyPr wrap="square" lIns="0" tIns="0" rIns="0" bIns="0" rtlCol="0" anchor="ctr"/>
-          <a:lstStyle/>
-          <a:p>
-            <a:pPr marL="0" indent="0" algn="ctr">
-              <a:buNone/>
-            </a:pPr>
-            <a:r>
-              <a:rPr lang="en-US" sz="1400" b="1" dirty="0">
-                <a:solidFill>
-                  <a:srgbClr val="39C2D7"/>
-                </a:solidFill>
-                <a:latin typeface="Montserrat" pitchFamily="34" charset="0"/>
-                <a:ea typeface="Montserrat" pitchFamily="34" charset="-122"/>
-                <a:cs typeface="Montserrat" pitchFamily="34" charset="-120"/>
-              </a:rPr>
-              <a:t>MENTI  |  Multiple choice</a:t>
-            </a:r>
-            <a:endParaRPr lang="en-US" sz="1400" dirty="0"/>
-          </a:p>
-        </p:txBody>
-      </p:sp>
-      <p:sp>
-        <p:nvSpPr>
-          <p:cNvPr id="4" name="Text 2"/>
-          <p:cNvSpPr txBox="1"/>
-          <p:nvPr/>
-        </p:nvSpPr>
-        <p:spPr>
-          <a:xfrm>
-            <a:off x="10149840" y="457200"/>
-            <a:ext cx="1600200" cy="411480"/>
-          </a:xfrm>
-          <a:prstGeom prst="rect">
-            <a:avLst/>
-          </a:prstGeom>
-          <a:noFill/>
-          <a:ln/>
-        </p:spPr>
-        <p:txBody>
-          <a:bodyPr wrap="square" lIns="0" tIns="0" rIns="0" bIns="0" rtlCol="0" anchor="ctr"/>
-          <a:lstStyle/>
-          <a:p>
-            <a:pPr marL="0" indent="0" algn="r">
-              <a:buNone/>
-            </a:pPr>
-            <a:r>
-              <a:rPr lang="en-US" sz="1300" i="1" dirty="0">
-                <a:solidFill>
-                  <a:srgbClr val="FFFFFF"/>
-                </a:solidFill>
-                <a:latin typeface="Calibri" pitchFamily="34" charset="0"/>
-                <a:ea typeface="Calibri" pitchFamily="34" charset="-122"/>
-                <a:cs typeface="Calibri" pitchFamily="34" charset="-120"/>
-              </a:rPr>
-              <a:t>~2 min</a:t>
-            </a:r>
-            <a:endParaRPr lang="en-US" sz="1300" dirty="0"/>
-          </a:p>
-        </p:txBody>
-      </p:sp>
-      <p:sp>
-        <p:nvSpPr>
-          <p:cNvPr id="5" name="Shape 3"/>
-          <p:cNvSpPr/>
-          <p:nvPr/>
-        </p:nvSpPr>
-        <p:spPr>
-          <a:xfrm>
-            <a:off x="7818120" y="1051560"/>
-            <a:ext cx="3931920" cy="502920"/>
-          </a:xfrm>
-          <a:prstGeom prst="rect">
-            <a:avLst/>
-          </a:prstGeom>
-          <a:solidFill>
-            <a:srgbClr val="FFFFFF"/>
-          </a:solidFill>
-          <a:ln/>
-        </p:spPr>
-      </p:sp>
-      <p:sp>
-        <p:nvSpPr>
-          <p:cNvPr id="6" name="Text 4"/>
-          <p:cNvSpPr txBox="1"/>
-          <p:nvPr/>
-        </p:nvSpPr>
-        <p:spPr>
-          <a:xfrm>
-            <a:off x="7818120" y="1051560"/>
-            <a:ext cx="3931920" cy="502920"/>
-          </a:xfrm>
-          <a:prstGeom prst="rect">
-            <a:avLst/>
-          </a:prstGeom>
-          <a:noFill/>
-          <a:ln/>
-        </p:spPr>
-        <p:txBody>
-          <a:bodyPr wrap="square" lIns="0" tIns="0" rIns="0" bIns="0" rtlCol="0" anchor="ctr"/>
-          <a:lstStyle/>
-          <a:p>
-            <a:pPr marL="0" indent="0" algn="ctr">
-              <a:buNone/>
-            </a:pPr>
-            <a:r>
-              <a:rPr lang="en-US" sz="1300" b="1" dirty="0">
-                <a:solidFill>
-                  <a:srgbClr val="39C2D7"/>
-                </a:solidFill>
-                <a:latin typeface="Montserrat" pitchFamily="34" charset="0"/>
-                <a:ea typeface="Montserrat" pitchFamily="34" charset="-122"/>
-                <a:cs typeface="Montserrat" pitchFamily="34" charset="-120"/>
-              </a:rPr>
-              <a:t>menti.com   code:  ____ ____</a:t>
-            </a:r>
-            <a:endParaRPr lang="en-US" sz="1300" dirty="0"/>
-          </a:p>
-        </p:txBody>
-      </p:sp>
-      <p:sp>
-        <p:nvSpPr>
-          <p:cNvPr id="7" name="Text 5"/>
-          <p:cNvSpPr txBox="1"/>
-          <p:nvPr/>
-        </p:nvSpPr>
-        <p:spPr>
-          <a:xfrm>
-            <a:off x="640080" y="1691640"/>
-            <a:ext cx="10972800" cy="1325880"/>
-          </a:xfrm>
-          <a:prstGeom prst="rect">
-            <a:avLst/>
-          </a:prstGeom>
-          <a:noFill/>
-          <a:ln/>
-        </p:spPr>
-        <p:txBody>
-          <a:bodyPr wrap="square" lIns="0" tIns="0" rIns="0" bIns="0" rtlCol="0" anchor="t"/>
-          <a:lstStyle/>
-          <a:p>
-            <a:pPr marL="0" indent="0">
-              <a:buNone/>
-            </a:pPr>
-            <a:r>
-              <a:rPr lang="en-US" sz="2700" b="1" dirty="0">
-                <a:solidFill>
-                  <a:srgbClr val="FFFFFF"/>
-                </a:solidFill>
-                <a:latin typeface="Montserrat" pitchFamily="34" charset="0"/>
-                <a:ea typeface="Montserrat" pitchFamily="34" charset="-122"/>
-                <a:cs typeface="Montserrat" pitchFamily="34" charset="-120"/>
-              </a:rPr>
-              <a:t>You set the learning rate to 5.0 on f(x) = x². What happens?</a:t>
-            </a:r>
-            <a:endParaRPr lang="en-US" sz="2700" dirty="0"/>
-          </a:p>
-        </p:txBody>
-      </p:sp>
-      <p:sp>
-        <p:nvSpPr>
-          <p:cNvPr id="8" name="Shape 6"/>
-          <p:cNvSpPr/>
-          <p:nvPr/>
-        </p:nvSpPr>
-        <p:spPr>
-          <a:xfrm>
-            <a:off x="822960" y="3108960"/>
-            <a:ext cx="10515600" cy="621792"/>
-          </a:xfrm>
-          <a:prstGeom prst="rect">
-            <a:avLst/>
-          </a:prstGeom>
-          <a:solidFill>
-            <a:srgbClr val="FFFFFF"/>
-          </a:solidFill>
-          <a:ln/>
-        </p:spPr>
-      </p:sp>
-      <p:sp>
-        <p:nvSpPr>
-          <p:cNvPr id="9" name="Text 7"/>
-          <p:cNvSpPr txBox="1"/>
-          <p:nvPr/>
-        </p:nvSpPr>
-        <p:spPr>
-          <a:xfrm>
-            <a:off x="1097280" y="3108960"/>
-            <a:ext cx="10149840" cy="621792"/>
-          </a:xfrm>
-          <a:prstGeom prst="rect">
-            <a:avLst/>
-          </a:prstGeom>
-          <a:noFill/>
-          <a:ln/>
-        </p:spPr>
-        <p:txBody>
-          <a:bodyPr wrap="square" lIns="0" tIns="0" rIns="0" bIns="0" rtlCol="0" anchor="ctr"/>
-          <a:lstStyle/>
-          <a:p>
-            <a:pPr marL="0" indent="0">
-              <a:buNone/>
-            </a:pPr>
-            <a:r>
-              <a:rPr lang="en-US" sz="1900" dirty="0">
-                <a:solidFill>
-                  <a:srgbClr val="222222"/>
-                </a:solidFill>
-                <a:latin typeface="Calibri" pitchFamily="34" charset="0"/>
-                <a:ea typeface="Calibri" pitchFamily="34" charset="-122"/>
-                <a:cs typeface="Calibri" pitchFamily="34" charset="-120"/>
-              </a:rPr>
-              <a:t>A)  Very slow but correct</a:t>
-            </a:r>
-            <a:endParaRPr lang="en-US" sz="1900" dirty="0"/>
-          </a:p>
-        </p:txBody>
-      </p:sp>
-      <p:sp>
-        <p:nvSpPr>
-          <p:cNvPr id="10" name="Shape 8"/>
-          <p:cNvSpPr/>
-          <p:nvPr/>
-        </p:nvSpPr>
-        <p:spPr>
-          <a:xfrm>
-            <a:off x="822960" y="3858768"/>
-            <a:ext cx="10515600" cy="621792"/>
-          </a:xfrm>
-          <a:prstGeom prst="rect">
-            <a:avLst/>
-          </a:prstGeom>
-          <a:solidFill>
-            <a:srgbClr val="FFFFFF"/>
-          </a:solidFill>
-          <a:ln/>
-        </p:spPr>
-      </p:sp>
-      <p:sp>
-        <p:nvSpPr>
-          <p:cNvPr id="11" name="Text 9"/>
-          <p:cNvSpPr txBox="1"/>
-          <p:nvPr/>
-        </p:nvSpPr>
-        <p:spPr>
-          <a:xfrm>
-            <a:off x="1097280" y="3858768"/>
-            <a:ext cx="10149840" cy="621792"/>
-          </a:xfrm>
-          <a:prstGeom prst="rect">
-            <a:avLst/>
-          </a:prstGeom>
-          <a:noFill/>
-          <a:ln/>
-        </p:spPr>
-        <p:txBody>
-          <a:bodyPr wrap="square" lIns="0" tIns="0" rIns="0" bIns="0" rtlCol="0" anchor="ctr"/>
-          <a:lstStyle/>
-          <a:p>
-            <a:pPr marL="0" indent="0">
-              <a:buNone/>
-            </a:pPr>
-            <a:r>
-              <a:rPr lang="en-US" sz="1900" dirty="0">
-                <a:solidFill>
-                  <a:srgbClr val="222222"/>
-                </a:solidFill>
-                <a:latin typeface="Calibri" pitchFamily="34" charset="0"/>
-                <a:ea typeface="Calibri" pitchFamily="34" charset="-122"/>
-                <a:cs typeface="Calibri" pitchFamily="34" charset="-120"/>
-              </a:rPr>
-              <a:t>B)  Perfect - converges fast</a:t>
-            </a:r>
-            <a:endParaRPr lang="en-US" sz="1900" dirty="0"/>
-          </a:p>
-        </p:txBody>
-      </p:sp>
-      <p:sp>
-        <p:nvSpPr>
-          <p:cNvPr id="12" name="Shape 10"/>
-          <p:cNvSpPr/>
-          <p:nvPr/>
-        </p:nvSpPr>
-        <p:spPr>
-          <a:xfrm>
-            <a:off x="822960" y="4608576"/>
-            <a:ext cx="10515600" cy="621792"/>
-          </a:xfrm>
-          <a:prstGeom prst="rect">
-            <a:avLst/>
-          </a:prstGeom>
-          <a:solidFill>
-            <a:srgbClr val="FFFFFF"/>
-          </a:solidFill>
-          <a:ln/>
-        </p:spPr>
-      </p:sp>
-      <p:sp>
-        <p:nvSpPr>
-          <p:cNvPr id="13" name="Text 11"/>
-          <p:cNvSpPr txBox="1"/>
-          <p:nvPr/>
-        </p:nvSpPr>
-        <p:spPr>
-          <a:xfrm>
-            <a:off x="1097280" y="4608576"/>
-            <a:ext cx="10149840" cy="621792"/>
-          </a:xfrm>
-          <a:prstGeom prst="rect">
-            <a:avLst/>
-          </a:prstGeom>
-          <a:noFill/>
-          <a:ln/>
-        </p:spPr>
-        <p:txBody>
-          <a:bodyPr wrap="square" lIns="0" tIns="0" rIns="0" bIns="0" rtlCol="0" anchor="ctr"/>
-          <a:lstStyle/>
-          <a:p>
-            <a:pPr marL="0" indent="0">
-              <a:buNone/>
-            </a:pPr>
-            <a:r>
-              <a:rPr lang="en-US" sz="1900" dirty="0">
-                <a:solidFill>
-                  <a:srgbClr val="222222"/>
-                </a:solidFill>
-                <a:latin typeface="Calibri" pitchFamily="34" charset="0"/>
-                <a:ea typeface="Calibri" pitchFamily="34" charset="-122"/>
-                <a:cs typeface="Calibri" pitchFamily="34" charset="-120"/>
-              </a:rPr>
-              <a:t>C)  Overshoots and the loss explodes</a:t>
-            </a:r>
-            <a:endParaRPr lang="en-US" sz="1900" dirty="0"/>
-          </a:p>
-        </p:txBody>
-      </p:sp>
-      <p:sp>
-        <p:nvSpPr>
-          <p:cNvPr id="14" name="Shape 12"/>
-          <p:cNvSpPr/>
-          <p:nvPr/>
-        </p:nvSpPr>
-        <p:spPr>
-          <a:xfrm>
-            <a:off x="822960" y="5358384"/>
-            <a:ext cx="10515600" cy="621792"/>
-          </a:xfrm>
-          <a:prstGeom prst="rect">
-            <a:avLst/>
-          </a:prstGeom>
-          <a:solidFill>
-            <a:srgbClr val="FFFFFF"/>
-          </a:solidFill>
-          <a:ln/>
-        </p:spPr>
-      </p:sp>
-      <p:sp>
-        <p:nvSpPr>
-          <p:cNvPr id="15" name="Text 13"/>
-          <p:cNvSpPr txBox="1"/>
-          <p:nvPr/>
-        </p:nvSpPr>
-        <p:spPr>
-          <a:xfrm>
-            <a:off x="1097280" y="5358384"/>
-            <a:ext cx="10149840" cy="621792"/>
-          </a:xfrm>
-          <a:prstGeom prst="rect">
-            <a:avLst/>
-          </a:prstGeom>
-          <a:noFill/>
-          <a:ln/>
-        </p:spPr>
-        <p:txBody>
-          <a:bodyPr wrap="square" lIns="0" tIns="0" rIns="0" bIns="0" rtlCol="0" anchor="ctr"/>
-          <a:lstStyle/>
-          <a:p>
-            <a:pPr marL="0" indent="0">
-              <a:buNone/>
-            </a:pPr>
-            <a:r>
-              <a:rPr lang="en-US" sz="1900" dirty="0">
-                <a:solidFill>
-                  <a:srgbClr val="222222"/>
-                </a:solidFill>
-                <a:latin typeface="Calibri" pitchFamily="34" charset="0"/>
-                <a:ea typeface="Calibri" pitchFamily="34" charset="-122"/>
-                <a:cs typeface="Calibri" pitchFamily="34" charset="-120"/>
-              </a:rPr>
-              <a:t>D)  Nothing changes</a:t>
-            </a:r>
-            <a:endParaRPr lang="en-US" sz="1900" dirty="0"/>
-          </a:p>
-        </p:txBody>
-      </p:sp>
-      <p:sp>
-        <p:nvSpPr>
-          <p:cNvPr id="16" name="Text 14"/>
-          <p:cNvSpPr txBox="1"/>
-          <p:nvPr/>
-        </p:nvSpPr>
-        <p:spPr>
-          <a:xfrm>
-            <a:off x="640080" y="6153912"/>
-            <a:ext cx="10058400" cy="365760"/>
-          </a:xfrm>
-          <a:prstGeom prst="rect">
-            <a:avLst/>
-          </a:prstGeom>
-          <a:noFill/>
-          <a:ln/>
-        </p:spPr>
-        <p:txBody>
-          <a:bodyPr wrap="square" lIns="0" tIns="0" rIns="0" bIns="0" rtlCol="0" anchor="ctr"/>
-          <a:lstStyle/>
-          <a:p>
-            <a:pPr marL="0" indent="0">
-              <a:buNone/>
-            </a:pPr>
-            <a:r>
-              <a:rPr lang="en-US" sz="1500" i="1" dirty="0">
-                <a:solidFill>
-                  <a:srgbClr val="FFFFFF"/>
-                </a:solidFill>
-                <a:latin typeface="Calibri" pitchFamily="34" charset="0"/>
-                <a:ea typeface="Calibri" pitchFamily="34" charset="-122"/>
-                <a:cs typeface="Calibri" pitchFamily="34" charset="-120"/>
-              </a:rPr>
-              <a:t>Vote on your phone now  -  45 seconds</a:t>
-            </a:r>
-            <a:endParaRPr lang="en-US" sz="1500" dirty="0"/>
-          </a:p>
-        </p:txBody>
-      </p:sp>
-    </p:spTree>
-  </p:cSld>
-  <p:clrMapOvr>
-    <a:masterClrMapping/>
-  </p:clrMapOvr>
-</p:sld>
-</file>
-
-<file path=ppt/slides/slide21.xml><?xml version="1.0" encoding="utf-8"?>
-<p:sld xmlns:a="http://schemas.openxmlformats.org/drawingml/2006/main" xmlns:r="http://schemas.openxmlformats.org/officeDocument/2006/relationships" xmlns:p="http://schemas.openxmlformats.org/presentationml/2006/main">
-  <p:cSld name="Slide 21">
-    <p:bg>
-      <p:bgPr>
-        <a:solidFill>
-          <a:srgbClr val="FFFFFF"/>
-        </a:solidFill>
-        <a:effectLst/>
-      </p:bgPr>
-    </p:bg>
-    <p:spTree>
-      <p:nvGrpSpPr>
-        <p:cNvPr id="1" name=""/>
-        <p:cNvGrpSpPr/>
-        <p:nvPr/>
-      </p:nvGrpSpPr>
-      <p:grpSpPr>
-        <a:xfrm>
-          <a:off x="0" y="0"/>
-          <a:ext cx="0" cy="0"/>
-          <a:chOff x="0" y="0"/>
-          <a:chExt cx="0" cy="0"/>
-        </a:xfrm>
-      </p:grpSpPr>
-      <p:sp>
-        <p:nvSpPr>
-          <p:cNvPr id="2" name="Shape 0"/>
-          <p:cNvSpPr/>
-          <p:nvPr/>
-        </p:nvSpPr>
-        <p:spPr>
-          <a:xfrm>
-            <a:off x="457200" y="411480"/>
-            <a:ext cx="2103120" cy="502920"/>
-          </a:xfrm>
-          <a:prstGeom prst="rect">
-            <a:avLst/>
-          </a:prstGeom>
-          <a:solidFill>
-            <a:srgbClr val="39C2D7"/>
-          </a:solidFill>
-          <a:ln/>
-        </p:spPr>
-      </p:sp>
-      <p:sp>
-        <p:nvSpPr>
-          <p:cNvPr id="3" name="Text 1"/>
-          <p:cNvSpPr txBox="1"/>
-          <p:nvPr/>
-        </p:nvSpPr>
-        <p:spPr>
-          <a:xfrm>
-            <a:off x="457200" y="411480"/>
-            <a:ext cx="2103120" cy="502920"/>
-          </a:xfrm>
-          <a:prstGeom prst="rect">
-            <a:avLst/>
-          </a:prstGeom>
-          <a:noFill/>
-          <a:ln/>
-        </p:spPr>
-        <p:txBody>
-          <a:bodyPr wrap="square" lIns="0" tIns="0" rIns="0" bIns="0" rtlCol="0" anchor="ctr"/>
-          <a:lstStyle/>
-          <a:p>
-            <a:pPr marL="0" indent="0" algn="ctr">
-              <a:buNone/>
-            </a:pPr>
-            <a:r>
-              <a:rPr lang="en-US" sz="1400" b="1" dirty="0">
-                <a:solidFill>
-                  <a:srgbClr val="FFFFFF"/>
-                </a:solidFill>
-                <a:latin typeface="Montserrat" pitchFamily="34" charset="0"/>
-                <a:ea typeface="Montserrat" pitchFamily="34" charset="-122"/>
-                <a:cs typeface="Montserrat" pitchFamily="34" charset="-120"/>
-              </a:rPr>
-              <a:t>The trap</a:t>
-            </a:r>
-            <a:endParaRPr lang="en-US" sz="1400" dirty="0"/>
-          </a:p>
-        </p:txBody>
-      </p:sp>
-      <p:sp>
-        <p:nvSpPr>
-          <p:cNvPr id="4" name="Text 2"/>
-          <p:cNvSpPr txBox="1"/>
-          <p:nvPr/>
-        </p:nvSpPr>
-        <p:spPr>
-          <a:xfrm>
-            <a:off x="10149840" y="457200"/>
-            <a:ext cx="1600200" cy="411480"/>
-          </a:xfrm>
-          <a:prstGeom prst="rect">
-            <a:avLst/>
-          </a:prstGeom>
-          <a:noFill/>
-          <a:ln/>
-        </p:spPr>
-        <p:txBody>
-          <a:bodyPr wrap="square" lIns="0" tIns="0" rIns="0" bIns="0" rtlCol="0" anchor="ctr"/>
-          <a:lstStyle/>
-          <a:p>
-            <a:pPr marL="0" indent="0" algn="r">
-              <a:buNone/>
-            </a:pPr>
-            <a:r>
-              <a:rPr lang="en-US" sz="1300" i="1" dirty="0">
-                <a:solidFill>
-                  <a:srgbClr val="464547"/>
-                </a:solidFill>
-                <a:latin typeface="Calibri" pitchFamily="34" charset="0"/>
-                <a:ea typeface="Calibri" pitchFamily="34" charset="-122"/>
-                <a:cs typeface="Calibri" pitchFamily="34" charset="-120"/>
-              </a:rPr>
-              <a:t>~3 min</a:t>
-            </a:r>
-            <a:endParaRPr lang="en-US" sz="1300" dirty="0"/>
-          </a:p>
-        </p:txBody>
-      </p:sp>
-      <p:sp>
-        <p:nvSpPr>
-          <p:cNvPr id="5" name="Text 3"/>
-          <p:cNvSpPr txBox="1"/>
-          <p:nvPr/>
-        </p:nvSpPr>
-        <p:spPr>
-          <a:xfrm>
-            <a:off x="457200" y="1024128"/>
-            <a:ext cx="11247120" cy="594360"/>
-          </a:xfrm>
-          <a:prstGeom prst="rect">
-            <a:avLst/>
-          </a:prstGeom>
-          <a:noFill/>
-          <a:ln/>
-        </p:spPr>
-        <p:txBody>
-          <a:bodyPr wrap="square" lIns="0" tIns="0" rIns="0" bIns="0" rtlCol="0" anchor="ctr"/>
-          <a:lstStyle/>
-          <a:p>
-            <a:pPr marL="0" indent="0">
-              <a:buNone/>
-            </a:pPr>
-            <a:r>
-              <a:rPr lang="en-US" sz="2500" b="1" dirty="0">
-                <a:solidFill>
-                  <a:srgbClr val="222222"/>
-                </a:solidFill>
-                <a:latin typeface="Montserrat" pitchFamily="34" charset="0"/>
-                <a:ea typeface="Montserrat" pitchFamily="34" charset="-122"/>
-                <a:cs typeface="Montserrat" pitchFamily="34" charset="-120"/>
-              </a:rPr>
-              <a:t>Local minima: stuck in a small valley</a:t>
-            </a:r>
-            <a:endParaRPr lang="en-US" sz="2500" dirty="0"/>
-          </a:p>
-        </p:txBody>
-      </p:sp>
-      <p:pic>
-        <p:nvPicPr>
-          <p:cNvPr id="6" name="Image 0" descr="/home/claude/d78/local_minima.png"/>
-          <p:cNvPicPr>
-            <a:picLocks noChangeAspect="1"/>
-          </p:cNvPicPr>
-          <p:nvPr/>
-        </p:nvPicPr>
-        <p:blipFill>
-          <a:blip r:embed="rId3"/>
-          <a:stretch>
-            <a:fillRect/>
-          </a:stretch>
-        </p:blipFill>
-        <p:spPr>
-          <a:xfrm>
-            <a:off x="411480" y="2193445"/>
-            <a:ext cx="7315200" cy="3568390"/>
-          </a:xfrm>
-          <a:prstGeom prst="rect">
-            <a:avLst/>
-          </a:prstGeom>
-        </p:spPr>
-      </p:pic>
-      <p:sp>
-        <p:nvSpPr>
-          <p:cNvPr id="7" name="Shape 4"/>
-          <p:cNvSpPr/>
-          <p:nvPr/>
-        </p:nvSpPr>
-        <p:spPr>
-          <a:xfrm>
-            <a:off x="7955280" y="1737360"/>
-            <a:ext cx="3794760" cy="4480560"/>
-          </a:xfrm>
-          <a:prstGeom prst="rect">
-            <a:avLst/>
-          </a:prstGeom>
-          <a:solidFill>
-            <a:srgbClr val="F6F6F6"/>
-          </a:solidFill>
-          <a:ln/>
-        </p:spPr>
-      </p:sp>
-      <p:sp>
-        <p:nvSpPr>
-          <p:cNvPr id="8" name="Shape 5"/>
-          <p:cNvSpPr/>
-          <p:nvPr/>
-        </p:nvSpPr>
-        <p:spPr>
-          <a:xfrm>
-            <a:off x="7955280" y="1737360"/>
-            <a:ext cx="3794760" cy="457200"/>
-          </a:xfrm>
-          <a:prstGeom prst="rect">
-            <a:avLst/>
-          </a:prstGeom>
-          <a:solidFill>
-            <a:srgbClr val="39C2D7"/>
-          </a:solidFill>
-          <a:ln/>
-        </p:spPr>
-      </p:sp>
-      <p:sp>
-        <p:nvSpPr>
-          <p:cNvPr id="9" name="Text 6"/>
-          <p:cNvSpPr txBox="1"/>
-          <p:nvPr/>
-        </p:nvSpPr>
-        <p:spPr>
-          <a:xfrm>
-            <a:off x="8138160" y="1737360"/>
-            <a:ext cx="3474720" cy="457200"/>
-          </a:xfrm>
-          <a:prstGeom prst="rect">
-            <a:avLst/>
-          </a:prstGeom>
-          <a:noFill/>
-          <a:ln/>
-        </p:spPr>
-        <p:txBody>
-          <a:bodyPr wrap="square" lIns="0" tIns="0" rIns="0" bIns="0" rtlCol="0" anchor="ctr"/>
-          <a:lstStyle/>
-          <a:p>
-            <a:pPr marL="0" indent="0">
-              <a:buNone/>
-            </a:pPr>
-            <a:r>
-              <a:rPr lang="en-US" sz="1300" b="1" dirty="0">
-                <a:solidFill>
-                  <a:srgbClr val="FFFFFF"/>
-                </a:solidFill>
-                <a:latin typeface="Montserrat" pitchFamily="34" charset="0"/>
-                <a:ea typeface="Montserrat" pitchFamily="34" charset="-122"/>
-                <a:cs typeface="Montserrat" pitchFamily="34" charset="-120"/>
-              </a:rPr>
-              <a:t>KEY IDEA</a:t>
-            </a:r>
-            <a:endParaRPr lang="en-US" sz="1300" dirty="0"/>
-          </a:p>
-        </p:txBody>
-      </p:sp>
-      <p:sp>
-        <p:nvSpPr>
-          <p:cNvPr id="10" name="Text 7"/>
-          <p:cNvSpPr/>
-          <p:nvPr/>
-        </p:nvSpPr>
-        <p:spPr>
-          <a:xfrm>
-            <a:off x="8092440" y="2331720"/>
-            <a:ext cx="3520440" cy="2743200"/>
-          </a:xfrm>
-          <a:prstGeom prst="rect">
-            <a:avLst/>
-          </a:prstGeom>
-          <a:noFill/>
-          <a:ln/>
-        </p:spPr>
-        <p:txBody>
-          <a:bodyPr wrap="square" lIns="254" tIns="254" rIns="254" bIns="254" rtlCol="0" anchor="t"/>
-          <a:lstStyle/>
-          <a:p>
-            <a:pPr marL="342900" indent="-342900">
-              <a:spcAft>
-                <a:spcPts val="800"/>
-              </a:spcAft>
-              <a:buSzPct val="100000"/>
-              <a:buChar char="•"/>
-            </a:pPr>
-            <a:r>
-              <a:rPr lang="en-US" sz="1500" dirty="0">
-                <a:solidFill>
-                  <a:srgbClr val="222222"/>
-                </a:solidFill>
-                <a:latin typeface="Calibri" pitchFamily="34" charset="0"/>
-                <a:ea typeface="Calibri" pitchFamily="34" charset="-122"/>
-                <a:cs typeface="Calibri" pitchFamily="34" charset="-120"/>
-              </a:rPr>
-              <a:t>Gradient descent only feels the slope where it stands</a:t>
-            </a:r>
-            <a:endParaRPr lang="en-US" sz="1500" dirty="0"/>
-          </a:p>
-          <a:p>
-            <a:pPr marL="342900" indent="-342900">
-              <a:spcAft>
-                <a:spcPts val="800"/>
-              </a:spcAft>
-              <a:buSzPct val="100000"/>
-              <a:buChar char="•"/>
-            </a:pPr>
-            <a:r>
-              <a:rPr lang="en-US" sz="1500" dirty="0">
-                <a:solidFill>
-                  <a:srgbClr val="222222"/>
-                </a:solidFill>
-                <a:latin typeface="Calibri" pitchFamily="34" charset="0"/>
-                <a:ea typeface="Calibri" pitchFamily="34" charset="-122"/>
-                <a:cs typeface="Calibri" pitchFamily="34" charset="-120"/>
-              </a:rPr>
-              <a:t>A small dip also has slope 0 -&gt; it stops</a:t>
-            </a:r>
-            <a:endParaRPr lang="en-US" sz="1500" dirty="0"/>
-          </a:p>
-          <a:p>
-            <a:pPr marL="342900" indent="-342900">
-              <a:spcAft>
-                <a:spcPts val="800"/>
-              </a:spcAft>
-              <a:buSzPct val="100000"/>
-              <a:buChar char="•"/>
-            </a:pPr>
-            <a:r>
-              <a:rPr lang="en-US" sz="1500" dirty="0">
-                <a:solidFill>
-                  <a:srgbClr val="222222"/>
-                </a:solidFill>
-                <a:latin typeface="Calibri" pitchFamily="34" charset="0"/>
-                <a:ea typeface="Calibri" pitchFamily="34" charset="-122"/>
-                <a:cs typeface="Calibri" pitchFamily="34" charset="-120"/>
-              </a:rPr>
-              <a:t>But a deeper valley may exist elsewhere</a:t>
-            </a:r>
-            <a:endParaRPr lang="en-US" sz="1500" dirty="0"/>
-          </a:p>
-        </p:txBody>
-      </p:sp>
-      <p:sp>
-        <p:nvSpPr>
-          <p:cNvPr id="11" name="Shape 8"/>
-          <p:cNvSpPr/>
-          <p:nvPr/>
-        </p:nvSpPr>
-        <p:spPr>
-          <a:xfrm>
-            <a:off x="8092440" y="5166360"/>
-            <a:ext cx="3520440" cy="914400"/>
-          </a:xfrm>
-          <a:prstGeom prst="rect">
-            <a:avLst/>
-          </a:prstGeom>
-          <a:solidFill>
-            <a:srgbClr val="FFFFFF"/>
-          </a:solidFill>
-          <a:ln w="19050">
-            <a:solidFill>
-              <a:srgbClr val="39C2D7"/>
-            </a:solidFill>
-            <a:prstDash val="solid"/>
-          </a:ln>
-        </p:spPr>
-      </p:sp>
-      <p:sp>
-        <p:nvSpPr>
-          <p:cNvPr id="12" name="Text 9"/>
-          <p:cNvSpPr/>
-          <p:nvPr/>
-        </p:nvSpPr>
-        <p:spPr>
-          <a:xfrm>
-            <a:off x="8183880" y="5166360"/>
-            <a:ext cx="3383280" cy="914400"/>
-          </a:xfrm>
-          <a:prstGeom prst="rect">
-            <a:avLst/>
-          </a:prstGeom>
-          <a:noFill/>
-          <a:ln/>
-        </p:spPr>
-        <p:txBody>
-          <a:bodyPr wrap="square" lIns="254" tIns="254" rIns="254" bIns="254" rtlCol="0" anchor="ctr"/>
-          <a:lstStyle/>
-          <a:p>
-            <a:pPr marL="0" indent="0">
-              <a:buNone/>
-            </a:pPr>
-            <a:r>
-              <a:rPr lang="en-US" sz="1300" b="1" dirty="0">
-                <a:solidFill>
-                  <a:srgbClr val="39C2D7"/>
-                </a:solidFill>
-                <a:latin typeface="Montserrat" pitchFamily="34" charset="0"/>
-                <a:ea typeface="Montserrat" pitchFamily="34" charset="-122"/>
-                <a:cs typeface="Montserrat" pitchFamily="34" charset="-120"/>
-              </a:rPr>
-              <a:t>In ML:  </a:t>
-            </a:r>
-            <a:r>
-              <a:rPr lang="en-US" sz="1300" dirty="0">
-                <a:solidFill>
-                  <a:srgbClr val="222222"/>
-                </a:solidFill>
-                <a:latin typeface="Calibri" pitchFamily="34" charset="0"/>
-                <a:ea typeface="Calibri" pitchFamily="34" charset="-122"/>
-                <a:cs typeface="Calibri" pitchFamily="34" charset="-120"/>
-              </a:rPr>
-              <a:t>real loss surfaces have many dips - we need smarter versions of gradient descent.</a:t>
-            </a:r>
-            <a:endParaRPr lang="en-US" sz="1300" dirty="0"/>
-          </a:p>
-        </p:txBody>
-      </p:sp>
-      <p:sp>
-        <p:nvSpPr>
-          <p:cNvPr id="13" name="Text 10"/>
-          <p:cNvSpPr txBox="1"/>
-          <p:nvPr/>
-        </p:nvSpPr>
-        <p:spPr>
-          <a:xfrm>
-            <a:off x="457200" y="6382512"/>
-            <a:ext cx="1097280" cy="292608"/>
-          </a:xfrm>
-          <a:prstGeom prst="rect">
-            <a:avLst/>
-          </a:prstGeom>
-          <a:noFill/>
-          <a:ln/>
-        </p:spPr>
-        <p:txBody>
-          <a:bodyPr wrap="square" lIns="0" tIns="0" rIns="0" bIns="0" rtlCol="0" anchor="ctr"/>
-          <a:lstStyle/>
-          <a:p>
-            <a:pPr marL="0" indent="0">
-              <a:buNone/>
-            </a:pPr>
-            <a:r>
-              <a:rPr lang="en-US" sz="1300" b="1" dirty="0">
-                <a:solidFill>
-                  <a:srgbClr val="39C2D7"/>
-                </a:solidFill>
-                <a:latin typeface="Montserrat" pitchFamily="34" charset="0"/>
-                <a:ea typeface="Montserrat" pitchFamily="34" charset="-122"/>
-                <a:cs typeface="Montserrat" pitchFamily="34" charset="-120"/>
-              </a:rPr>
-              <a:t>iTPU</a:t>
-            </a:r>
-            <a:endParaRPr lang="en-US" sz="1300" dirty="0"/>
-          </a:p>
-        </p:txBody>
-      </p:sp>
-      <p:sp>
-        <p:nvSpPr>
-          <p:cNvPr id="14" name="Text 11"/>
-          <p:cNvSpPr txBox="1"/>
-          <p:nvPr/>
-        </p:nvSpPr>
-        <p:spPr>
-          <a:xfrm>
-            <a:off x="1371600" y="6400800"/>
-            <a:ext cx="6400800" cy="256032"/>
-          </a:xfrm>
-          <a:prstGeom prst="rect">
-            <a:avLst/>
-          </a:prstGeom>
-          <a:noFill/>
-          <a:ln/>
-        </p:spPr>
-        <p:txBody>
-          <a:bodyPr wrap="square" lIns="0" tIns="0" rIns="0" bIns="0" rtlCol="0" anchor="ctr"/>
-          <a:lstStyle/>
-          <a:p>
-            <a:pPr marL="0" indent="0">
-              <a:buNone/>
-            </a:pPr>
-            <a:r>
-              <a:rPr lang="en-US" sz="900" dirty="0">
-                <a:solidFill>
-                  <a:srgbClr val="464547"/>
-                </a:solidFill>
-                <a:latin typeface="Calibri" pitchFamily="34" charset="0"/>
-                <a:ea typeface="Calibri" pitchFamily="34" charset="-122"/>
-                <a:cs typeface="Calibri" pitchFamily="34" charset="-120"/>
-              </a:rPr>
-              <a:t>Part 1  |  Calculus - how a model learns</a:t>
-            </a:r>
-            <a:endParaRPr lang="en-US" sz="900" dirty="0"/>
-          </a:p>
-        </p:txBody>
-      </p:sp>
-    </p:spTree>
-  </p:cSld>
-  <p:clrMapOvr>
-    <a:masterClrMapping/>
-  </p:clrMapOvr>
-</p:sld>
-</file>
-
-<file path=ppt/slides/slide22.xml><?xml version="1.0" encoding="utf-8"?>
-<p:sld xmlns:a="http://schemas.openxmlformats.org/drawingml/2006/main" xmlns:r="http://schemas.openxmlformats.org/officeDocument/2006/relationships" xmlns:p="http://schemas.openxmlformats.org/presentationml/2006/main">
   <p:cSld name="Slide 22">
     <p:bg>
       <p:bgPr>
@@ -14765,263 +13370,7 @@
 </p:sld>
 </file>
 
-<file path=ppt/slides/slide23.xml><?xml version="1.0" encoding="utf-8"?>
-<p:sld xmlns:a="http://schemas.openxmlformats.org/drawingml/2006/main" xmlns:r="http://schemas.openxmlformats.org/officeDocument/2006/relationships" xmlns:p="http://schemas.openxmlformats.org/presentationml/2006/main">
-  <p:cSld name="Slide 23">
-    <p:bg>
-      <p:bgPr>
-        <a:solidFill>
-          <a:srgbClr val="39C2D7"/>
-        </a:solidFill>
-        <a:effectLst/>
-      </p:bgPr>
-    </p:bg>
-    <p:spTree>
-      <p:nvGrpSpPr>
-        <p:cNvPr id="1" name=""/>
-        <p:cNvGrpSpPr/>
-        <p:nvPr/>
-      </p:nvGrpSpPr>
-      <p:grpSpPr>
-        <a:xfrm>
-          <a:off x="0" y="0"/>
-          <a:ext cx="0" cy="0"/>
-          <a:chOff x="0" y="0"/>
-          <a:chExt cx="0" cy="0"/>
-        </a:xfrm>
-      </p:grpSpPr>
-      <p:sp>
-        <p:nvSpPr>
-          <p:cNvPr id="2" name="Shape 0"/>
-          <p:cNvSpPr/>
-          <p:nvPr/>
-        </p:nvSpPr>
-        <p:spPr>
-          <a:xfrm>
-            <a:off x="457200" y="411480"/>
-            <a:ext cx="3657600" cy="502920"/>
-          </a:xfrm>
-          <a:prstGeom prst="rect">
-            <a:avLst/>
-          </a:prstGeom>
-          <a:solidFill>
-            <a:srgbClr val="FFFFFF"/>
-          </a:solidFill>
-          <a:ln/>
-        </p:spPr>
-      </p:sp>
-      <p:sp>
-        <p:nvSpPr>
-          <p:cNvPr id="3" name="Text 1"/>
-          <p:cNvSpPr txBox="1"/>
-          <p:nvPr/>
-        </p:nvSpPr>
-        <p:spPr>
-          <a:xfrm>
-            <a:off x="457200" y="411480"/>
-            <a:ext cx="3657600" cy="502920"/>
-          </a:xfrm>
-          <a:prstGeom prst="rect">
-            <a:avLst/>
-          </a:prstGeom>
-          <a:noFill/>
-          <a:ln/>
-        </p:spPr>
-        <p:txBody>
-          <a:bodyPr wrap="square" lIns="0" tIns="0" rIns="0" bIns="0" rtlCol="0" anchor="ctr"/>
-          <a:lstStyle/>
-          <a:p>
-            <a:pPr marL="0" indent="0" algn="ctr">
-              <a:buNone/>
-            </a:pPr>
-            <a:r>
-              <a:rPr lang="en-US" sz="1400" b="1" dirty="0">
-                <a:solidFill>
-                  <a:srgbClr val="39C2D7"/>
-                </a:solidFill>
-                <a:latin typeface="Montserrat" pitchFamily="34" charset="0"/>
-                <a:ea typeface="Montserrat" pitchFamily="34" charset="-122"/>
-                <a:cs typeface="Montserrat" pitchFamily="34" charset="-120"/>
-              </a:rPr>
-              <a:t>MENTI  |  Open ended</a:t>
-            </a:r>
-            <a:endParaRPr lang="en-US" sz="1400" dirty="0"/>
-          </a:p>
-        </p:txBody>
-      </p:sp>
-      <p:sp>
-        <p:nvSpPr>
-          <p:cNvPr id="5" name="Shape 3"/>
-          <p:cNvSpPr/>
-          <p:nvPr/>
-        </p:nvSpPr>
-        <p:spPr>
-          <a:xfrm>
-            <a:off x="7818120" y="1051560"/>
-            <a:ext cx="3931920" cy="502920"/>
-          </a:xfrm>
-          <a:prstGeom prst="rect">
-            <a:avLst/>
-          </a:prstGeom>
-          <a:solidFill>
-            <a:srgbClr val="FFFFFF"/>
-          </a:solidFill>
-          <a:ln/>
-        </p:spPr>
-      </p:sp>
-      <p:sp>
-        <p:nvSpPr>
-          <p:cNvPr id="7" name="Text 5"/>
-          <p:cNvSpPr txBox="1"/>
-          <p:nvPr/>
-        </p:nvSpPr>
-        <p:spPr>
-          <a:xfrm>
-            <a:off x="640080" y="1691640"/>
-            <a:ext cx="10972800" cy="1325880"/>
-          </a:xfrm>
-          <a:prstGeom prst="rect">
-            <a:avLst/>
-          </a:prstGeom>
-          <a:noFill/>
-          <a:ln/>
-        </p:spPr>
-        <p:txBody>
-          <a:bodyPr wrap="square" lIns="0" tIns="0" rIns="0" bIns="0" rtlCol="0" anchor="t"/>
-          <a:lstStyle/>
-          <a:p>
-            <a:pPr marL="0" indent="0">
-              <a:buNone/>
-            </a:pPr>
-            <a:r>
-              <a:rPr lang="en-US" sz="2700" b="1" dirty="0">
-                <a:solidFill>
-                  <a:srgbClr val="FFFFFF"/>
-                </a:solidFill>
-                <a:latin typeface="Montserrat" pitchFamily="34" charset="0"/>
-                <a:ea typeface="Montserrat" pitchFamily="34" charset="-122"/>
-                <a:cs typeface="Montserrat" pitchFamily="34" charset="-120"/>
-              </a:rPr>
-              <a:t>Name an ML algorithm you know that is trained with gradient descent</a:t>
-            </a:r>
-            <a:endParaRPr lang="en-US" sz="2700" dirty="0"/>
-          </a:p>
-        </p:txBody>
-      </p:sp>
-      <p:sp>
-        <p:nvSpPr>
-          <p:cNvPr id="8" name="Shape 6"/>
-          <p:cNvSpPr/>
-          <p:nvPr/>
-        </p:nvSpPr>
-        <p:spPr>
-          <a:xfrm>
-            <a:off x="822960" y="3108960"/>
-            <a:ext cx="10515600" cy="2651760"/>
-          </a:xfrm>
-          <a:prstGeom prst="rect">
-            <a:avLst/>
-          </a:prstGeom>
-          <a:solidFill>
-            <a:srgbClr val="FFFFFF">
-              <a:alpha val="20000"/>
-            </a:srgbClr>
-          </a:solidFill>
-          <a:ln w="25400">
-            <a:solidFill>
-              <a:srgbClr val="FFFFFF"/>
-            </a:solidFill>
-            <a:prstDash val="dash"/>
-          </a:ln>
-        </p:spPr>
-      </p:sp>
-      <p:sp>
-        <p:nvSpPr>
-          <p:cNvPr id="9" name="Text 7"/>
-          <p:cNvSpPr txBox="1"/>
-          <p:nvPr/>
-        </p:nvSpPr>
-        <p:spPr>
-          <a:xfrm>
-            <a:off x="822960" y="3108960"/>
-            <a:ext cx="10515600" cy="2651760"/>
-          </a:xfrm>
-          <a:prstGeom prst="rect">
-            <a:avLst/>
-          </a:prstGeom>
-          <a:noFill/>
-          <a:ln/>
-        </p:spPr>
-        <p:txBody>
-          <a:bodyPr wrap="square" lIns="0" tIns="0" rIns="0" bIns="0" rtlCol="0" anchor="ctr"/>
-          <a:lstStyle/>
-          <a:p>
-            <a:pPr marL="0" indent="0" algn="ctr">
-              <a:buNone/>
-            </a:pPr>
-            <a:r>
-              <a:rPr lang="en-US" sz="2200" b="1" dirty="0">
-                <a:solidFill>
-                  <a:srgbClr val="FFFFFF"/>
-                </a:solidFill>
-                <a:latin typeface="Montserrat" pitchFamily="34" charset="0"/>
-                <a:ea typeface="Montserrat" pitchFamily="34" charset="-122"/>
-                <a:cs typeface="Montserrat" pitchFamily="34" charset="-120"/>
-              </a:rPr>
-              <a:t>Live answers appear here on Menti</a:t>
-            </a:r>
-            <a:endParaRPr lang="en-US" sz="2200" dirty="0"/>
-          </a:p>
-        </p:txBody>
-      </p:sp>
-      <p:sp>
-        <p:nvSpPr>
-          <p:cNvPr id="10" name="Text 8"/>
-          <p:cNvSpPr txBox="1"/>
-          <p:nvPr/>
-        </p:nvSpPr>
-        <p:spPr>
-          <a:xfrm>
-            <a:off x="640080" y="5897880"/>
-            <a:ext cx="10058400" cy="365760"/>
-          </a:xfrm>
-          <a:prstGeom prst="rect">
-            <a:avLst/>
-          </a:prstGeom>
-          <a:noFill/>
-          <a:ln/>
-        </p:spPr>
-        <p:txBody>
-          <a:bodyPr wrap="square" lIns="0" tIns="0" rIns="0" bIns="0" rtlCol="0" anchor="ctr"/>
-          <a:lstStyle/>
-          <a:p>
-            <a:pPr marL="0" indent="0">
-              <a:buNone/>
-            </a:pPr>
-            <a:r>
-              <a:rPr lang="en-US" sz="1500" i="1" dirty="0">
-                <a:solidFill>
-                  <a:srgbClr val="FFFFFF"/>
-                </a:solidFill>
-                <a:latin typeface="Calibri" pitchFamily="34" charset="0"/>
-                <a:ea typeface="Calibri" pitchFamily="34" charset="-122"/>
-                <a:cs typeface="Calibri" pitchFamily="34" charset="-120"/>
-              </a:rPr>
-              <a:t>Type your answer on menti.com</a:t>
-            </a:r>
-            <a:endParaRPr lang="en-US" sz="1500" dirty="0"/>
-          </a:p>
-        </p:txBody>
-      </p:sp>
-    </p:spTree>
-  </p:cSld>
-  <p:clrMapOvr>
-    <a:masterClrMapping/>
-  </p:clrMapOvr>
-</p:sld>
-</file>
-
-<file path=ppt/slides/slide24.xml><?xml version="1.0" encoding="utf-8"?>
+<file path=ppt/slides/slide21.xml><?xml version="1.0" encoding="utf-8"?>
 <p:sld xmlns:a="http://schemas.openxmlformats.org/drawingml/2006/main" xmlns:r="http://schemas.openxmlformats.org/officeDocument/2006/relationships" xmlns:p="http://schemas.openxmlformats.org/presentationml/2006/main">
   <p:cSld name="Slide 24">
     <p:bg>
@@ -15759,7 +14108,7 @@
 </p:sld>
 </file>
 
-<file path=ppt/slides/slide25.xml><?xml version="1.0" encoding="utf-8"?>
+<file path=ppt/slides/slide22.xml><?xml version="1.0" encoding="utf-8"?>
 <p:sld xmlns:a="http://schemas.openxmlformats.org/drawingml/2006/main" xmlns:r="http://schemas.openxmlformats.org/officeDocument/2006/relationships" xmlns:p="http://schemas.openxmlformats.org/presentationml/2006/main">
   <p:cSld name="Slide 25">
     <p:bg>
@@ -15909,7 +14258,7 @@
 </p:sld>
 </file>
 
-<file path=ppt/slides/slide26.xml><?xml version="1.0" encoding="utf-8"?>
+<file path=ppt/slides/slide23.xml><?xml version="1.0" encoding="utf-8"?>
 <p:sld xmlns:a="http://schemas.openxmlformats.org/drawingml/2006/main" xmlns:r="http://schemas.openxmlformats.org/officeDocument/2006/relationships" xmlns:p="http://schemas.openxmlformats.org/presentationml/2006/main">
   <p:cSld name="Slide 26">
     <p:bg>
@@ -16530,7 +14879,7 @@
 </p:sld>
 </file>
 
-<file path=ppt/slides/slide27.xml><?xml version="1.0" encoding="utf-8"?>
+<file path=ppt/slides/slide24.xml><?xml version="1.0" encoding="utf-8"?>
 <p:sld xmlns:a="http://schemas.openxmlformats.org/drawingml/2006/main" xmlns:r="http://schemas.openxmlformats.org/officeDocument/2006/relationships" xmlns:p="http://schemas.openxmlformats.org/presentationml/2006/main">
   <p:cSld name="Slide 27">
     <p:bg>
@@ -17444,539 +15793,7 @@
 </p:sld>
 </file>
 
-<file path=ppt/slides/slide28.xml><?xml version="1.0" encoding="utf-8"?>
-<p:sld xmlns:a="http://schemas.openxmlformats.org/drawingml/2006/main" xmlns:r="http://schemas.openxmlformats.org/officeDocument/2006/relationships" xmlns:p="http://schemas.openxmlformats.org/presentationml/2006/main">
-  <p:cSld name="Slide 28">
-    <p:bg>
-      <p:bgPr>
-        <a:solidFill>
-          <a:srgbClr val="FFFFFF"/>
-        </a:solidFill>
-        <a:effectLst/>
-      </p:bgPr>
-    </p:bg>
-    <p:spTree>
-      <p:nvGrpSpPr>
-        <p:cNvPr id="1" name=""/>
-        <p:cNvGrpSpPr/>
-        <p:nvPr/>
-      </p:nvGrpSpPr>
-      <p:grpSpPr>
-        <a:xfrm>
-          <a:off x="0" y="0"/>
-          <a:ext cx="0" cy="0"/>
-          <a:chOff x="0" y="0"/>
-          <a:chExt cx="0" cy="0"/>
-        </a:xfrm>
-      </p:grpSpPr>
-      <p:sp>
-        <p:nvSpPr>
-          <p:cNvPr id="2" name="Shape 0"/>
-          <p:cNvSpPr/>
-          <p:nvPr/>
-        </p:nvSpPr>
-        <p:spPr>
-          <a:xfrm>
-            <a:off x="457200" y="411480"/>
-            <a:ext cx="2340864" cy="502920"/>
-          </a:xfrm>
-          <a:prstGeom prst="rect">
-            <a:avLst/>
-          </a:prstGeom>
-          <a:solidFill>
-            <a:srgbClr val="39C2D7"/>
-          </a:solidFill>
-          <a:ln/>
-        </p:spPr>
-      </p:sp>
-      <p:sp>
-        <p:nvSpPr>
-          <p:cNvPr id="3" name="Text 1"/>
-          <p:cNvSpPr txBox="1"/>
-          <p:nvPr/>
-        </p:nvSpPr>
-        <p:spPr>
-          <a:xfrm>
-            <a:off x="457200" y="411480"/>
-            <a:ext cx="2340864" cy="502920"/>
-          </a:xfrm>
-          <a:prstGeom prst="rect">
-            <a:avLst/>
-          </a:prstGeom>
-          <a:noFill/>
-          <a:ln/>
-        </p:spPr>
-        <p:txBody>
-          <a:bodyPr wrap="square" lIns="0" tIns="0" rIns="0" bIns="0" rtlCol="0" anchor="ctr"/>
-          <a:lstStyle/>
-          <a:p>
-            <a:pPr marL="0" indent="0" algn="ctr">
-              <a:buNone/>
-            </a:pPr>
-            <a:r>
-              <a:rPr lang="en-US" sz="1400" b="1" dirty="0">
-                <a:solidFill>
-                  <a:srgbClr val="FFFFFF"/>
-                </a:solidFill>
-                <a:latin typeface="Montserrat" pitchFamily="34" charset="0"/>
-                <a:ea typeface="Montserrat" pitchFamily="34" charset="-122"/>
-                <a:cs typeface="Montserrat" pitchFamily="34" charset="-120"/>
-              </a:rPr>
-              <a:t>Conditional</a:t>
-            </a:r>
-            <a:endParaRPr lang="en-US" sz="1400" dirty="0"/>
-          </a:p>
-        </p:txBody>
-      </p:sp>
-      <p:sp>
-        <p:nvSpPr>
-          <p:cNvPr id="4" name="Text 2"/>
-          <p:cNvSpPr txBox="1"/>
-          <p:nvPr/>
-        </p:nvSpPr>
-        <p:spPr>
-          <a:xfrm>
-            <a:off x="10149840" y="457200"/>
-            <a:ext cx="1600200" cy="411480"/>
-          </a:xfrm>
-          <a:prstGeom prst="rect">
-            <a:avLst/>
-          </a:prstGeom>
-          <a:noFill/>
-          <a:ln/>
-        </p:spPr>
-        <p:txBody>
-          <a:bodyPr wrap="square" lIns="0" tIns="0" rIns="0" bIns="0" rtlCol="0" anchor="ctr"/>
-          <a:lstStyle/>
-          <a:p>
-            <a:pPr marL="0" indent="0" algn="r">
-              <a:buNone/>
-            </a:pPr>
-            <a:r>
-              <a:rPr lang="en-US" sz="1300" i="1" dirty="0">
-                <a:solidFill>
-                  <a:srgbClr val="464547"/>
-                </a:solidFill>
-                <a:latin typeface="Calibri" pitchFamily="34" charset="0"/>
-                <a:ea typeface="Calibri" pitchFamily="34" charset="-122"/>
-                <a:cs typeface="Calibri" pitchFamily="34" charset="-120"/>
-              </a:rPr>
-              <a:t>~4 min</a:t>
-            </a:r>
-            <a:endParaRPr lang="en-US" sz="1300" dirty="0"/>
-          </a:p>
-        </p:txBody>
-      </p:sp>
-      <p:sp>
-        <p:nvSpPr>
-          <p:cNvPr id="5" name="Text 3"/>
-          <p:cNvSpPr txBox="1"/>
-          <p:nvPr/>
-        </p:nvSpPr>
-        <p:spPr>
-          <a:xfrm>
-            <a:off x="457200" y="1024128"/>
-            <a:ext cx="11247120" cy="594360"/>
-          </a:xfrm>
-          <a:prstGeom prst="rect">
-            <a:avLst/>
-          </a:prstGeom>
-          <a:noFill/>
-          <a:ln/>
-        </p:spPr>
-        <p:txBody>
-          <a:bodyPr wrap="square" lIns="0" tIns="0" rIns="0" bIns="0" rtlCol="0" anchor="ctr"/>
-          <a:lstStyle/>
-          <a:p>
-            <a:pPr marL="0" indent="0">
-              <a:buNone/>
-            </a:pPr>
-            <a:r>
-              <a:rPr lang="en-US" sz="2500" b="1" dirty="0">
-                <a:solidFill>
-                  <a:srgbClr val="222222"/>
-                </a:solidFill>
-                <a:latin typeface="Montserrat" pitchFamily="34" charset="0"/>
-                <a:ea typeface="Montserrat" pitchFamily="34" charset="-122"/>
-                <a:cs typeface="Montserrat" pitchFamily="34" charset="-120"/>
-              </a:rPr>
-              <a:t>Conditional probability  P(A | B)</a:t>
-            </a:r>
-            <a:endParaRPr lang="en-US" sz="2500" dirty="0"/>
-          </a:p>
-        </p:txBody>
-      </p:sp>
-      <p:pic>
-        <p:nvPicPr>
-          <p:cNvPr id="6" name="Image 0" descr="/home/claude/d78/emails.png"/>
-          <p:cNvPicPr>
-            <a:picLocks noChangeAspect="1"/>
-          </p:cNvPicPr>
-          <p:nvPr/>
-        </p:nvPicPr>
-        <p:blipFill>
-          <a:blip r:embed="rId3"/>
-          <a:stretch>
-            <a:fillRect/>
-          </a:stretch>
-        </p:blipFill>
-        <p:spPr>
-          <a:xfrm>
-            <a:off x="1484583" y="1737360"/>
-            <a:ext cx="5168994" cy="4480560"/>
-          </a:xfrm>
-          <a:prstGeom prst="rect">
-            <a:avLst/>
-          </a:prstGeom>
-        </p:spPr>
-      </p:pic>
-      <p:sp>
-        <p:nvSpPr>
-          <p:cNvPr id="7" name="Shape 4"/>
-          <p:cNvSpPr/>
-          <p:nvPr/>
-        </p:nvSpPr>
-        <p:spPr>
-          <a:xfrm>
-            <a:off x="7955280" y="1737360"/>
-            <a:ext cx="3794760" cy="4480560"/>
-          </a:xfrm>
-          <a:prstGeom prst="rect">
-            <a:avLst/>
-          </a:prstGeom>
-          <a:solidFill>
-            <a:srgbClr val="F6F6F6"/>
-          </a:solidFill>
-          <a:ln/>
-        </p:spPr>
-      </p:sp>
-      <p:sp>
-        <p:nvSpPr>
-          <p:cNvPr id="8" name="Shape 5"/>
-          <p:cNvSpPr/>
-          <p:nvPr/>
-        </p:nvSpPr>
-        <p:spPr>
-          <a:xfrm>
-            <a:off x="7955280" y="1737360"/>
-            <a:ext cx="3794760" cy="457200"/>
-          </a:xfrm>
-          <a:prstGeom prst="rect">
-            <a:avLst/>
-          </a:prstGeom>
-          <a:solidFill>
-            <a:srgbClr val="39C2D7"/>
-          </a:solidFill>
-          <a:ln/>
-        </p:spPr>
-      </p:sp>
-      <p:sp>
-        <p:nvSpPr>
-          <p:cNvPr id="9" name="Text 6"/>
-          <p:cNvSpPr txBox="1"/>
-          <p:nvPr/>
-        </p:nvSpPr>
-        <p:spPr>
-          <a:xfrm>
-            <a:off x="8138160" y="1737360"/>
-            <a:ext cx="3474720" cy="457200"/>
-          </a:xfrm>
-          <a:prstGeom prst="rect">
-            <a:avLst/>
-          </a:prstGeom>
-          <a:noFill/>
-          <a:ln/>
-        </p:spPr>
-        <p:txBody>
-          <a:bodyPr wrap="square" lIns="0" tIns="0" rIns="0" bIns="0" rtlCol="0" anchor="ctr"/>
-          <a:lstStyle/>
-          <a:p>
-            <a:pPr marL="0" indent="0">
-              <a:buNone/>
-            </a:pPr>
-            <a:r>
-              <a:rPr lang="en-US" sz="1300" b="1" dirty="0">
-                <a:solidFill>
-                  <a:srgbClr val="FFFFFF"/>
-                </a:solidFill>
-                <a:latin typeface="Montserrat" pitchFamily="34" charset="0"/>
-                <a:ea typeface="Montserrat" pitchFamily="34" charset="-122"/>
-                <a:cs typeface="Montserrat" pitchFamily="34" charset="-120"/>
-              </a:rPr>
-              <a:t>KEY IDEA</a:t>
-            </a:r>
-            <a:endParaRPr lang="en-US" sz="1300" dirty="0"/>
-          </a:p>
-        </p:txBody>
-      </p:sp>
-      <p:sp>
-        <p:nvSpPr>
-          <p:cNvPr id="10" name="Text 7"/>
-          <p:cNvSpPr/>
-          <p:nvPr/>
-        </p:nvSpPr>
-        <p:spPr>
-          <a:xfrm>
-            <a:off x="8092440" y="2331720"/>
-            <a:ext cx="3520440" cy="2743200"/>
-          </a:xfrm>
-          <a:prstGeom prst="rect">
-            <a:avLst/>
-          </a:prstGeom>
-          <a:noFill/>
-          <a:ln/>
-        </p:spPr>
-        <p:txBody>
-          <a:bodyPr wrap="square" lIns="254" tIns="254" rIns="254" bIns="254" rtlCol="0" anchor="t"/>
-          <a:lstStyle/>
-          <a:p>
-            <a:pPr marL="342900" indent="-342900">
-              <a:spcAft>
-                <a:spcPts val="800"/>
-              </a:spcAft>
-              <a:buSzPct val="100000"/>
-              <a:buChar char="•"/>
-            </a:pPr>
-            <a:r>
-              <a:rPr lang="en-US" sz="1500" dirty="0">
-                <a:solidFill>
-                  <a:srgbClr val="222222"/>
-                </a:solidFill>
-                <a:latin typeface="Calibri" pitchFamily="34" charset="0"/>
-                <a:ea typeface="Calibri" pitchFamily="34" charset="-122"/>
-                <a:cs typeface="Calibri" pitchFamily="34" charset="-120"/>
-              </a:rPr>
-              <a:t>100 emails: 40 spam (red), 50 contain 'free' (ring)</a:t>
-            </a:r>
-            <a:endParaRPr lang="en-US" sz="1500" dirty="0"/>
-          </a:p>
-          <a:p>
-            <a:pPr marL="342900" indent="-342900">
-              <a:spcAft>
-                <a:spcPts val="800"/>
-              </a:spcAft>
-              <a:buSzPct val="100000"/>
-              <a:buChar char="•"/>
-            </a:pPr>
-            <a:r>
-              <a:rPr lang="en-US" sz="1500" dirty="0">
-                <a:solidFill>
-                  <a:srgbClr val="222222"/>
-                </a:solidFill>
-                <a:latin typeface="Calibri" pitchFamily="34" charset="0"/>
-                <a:ea typeface="Calibri" pitchFamily="34" charset="-122"/>
-                <a:cs typeface="Calibri" pitchFamily="34" charset="-120"/>
-              </a:rPr>
-              <a:t>30 are spam AND contain 'free'</a:t>
-            </a:r>
-            <a:endParaRPr lang="en-US" sz="1500" dirty="0"/>
-          </a:p>
-          <a:p>
-            <a:pPr marL="342900" indent="-342900">
-              <a:spcAft>
-                <a:spcPts val="800"/>
-              </a:spcAft>
-              <a:buSzPct val="100000"/>
-              <a:buChar char="•"/>
-            </a:pPr>
-            <a:r>
-              <a:rPr lang="en-US" sz="1500" dirty="0">
-                <a:solidFill>
-                  <a:srgbClr val="222222"/>
-                </a:solidFill>
-                <a:latin typeface="Calibri" pitchFamily="34" charset="0"/>
-                <a:ea typeface="Calibri" pitchFamily="34" charset="-122"/>
-                <a:cs typeface="Calibri" pitchFamily="34" charset="-120"/>
-              </a:rPr>
-              <a:t>P(spam | 'free') = 30 / 50 = 0.6</a:t>
-            </a:r>
-            <a:endParaRPr lang="en-US" sz="1500" dirty="0"/>
-          </a:p>
-          <a:p>
-            <a:pPr marL="342900" indent="-342900">
-              <a:spcAft>
-                <a:spcPts val="800"/>
-              </a:spcAft>
-              <a:buSzPct val="100000"/>
-              <a:buChar char="•"/>
-            </a:pPr>
-            <a:r>
-              <a:rPr lang="en-US" sz="1500" dirty="0">
-                <a:solidFill>
-                  <a:srgbClr val="222222"/>
-                </a:solidFill>
-                <a:latin typeface="Calibri" pitchFamily="34" charset="0"/>
-                <a:ea typeface="Calibri" pitchFamily="34" charset="-122"/>
-                <a:cs typeface="Calibri" pitchFamily="34" charset="-120"/>
-              </a:rPr>
-              <a:t>Independent: knowing B tells nothing about A (two coin flips)</a:t>
-            </a:r>
-            <a:endParaRPr lang="en-US" sz="1500" dirty="0"/>
-          </a:p>
-        </p:txBody>
-      </p:sp>
-      <p:sp>
-        <p:nvSpPr>
-          <p:cNvPr id="11" name="Shape 8"/>
-          <p:cNvSpPr/>
-          <p:nvPr/>
-        </p:nvSpPr>
-        <p:spPr>
-          <a:xfrm>
-            <a:off x="8092440" y="5166360"/>
-            <a:ext cx="3520440" cy="914400"/>
-          </a:xfrm>
-          <a:prstGeom prst="rect">
-            <a:avLst/>
-          </a:prstGeom>
-          <a:solidFill>
-            <a:srgbClr val="FFFFFF"/>
-          </a:solidFill>
-          <a:ln w="19050">
-            <a:solidFill>
-              <a:srgbClr val="39C2D7"/>
-            </a:solidFill>
-            <a:prstDash val="solid"/>
-          </a:ln>
-        </p:spPr>
-      </p:sp>
-      <p:sp>
-        <p:nvSpPr>
-          <p:cNvPr id="12" name="Text 9"/>
-          <p:cNvSpPr/>
-          <p:nvPr/>
-        </p:nvSpPr>
-        <p:spPr>
-          <a:xfrm>
-            <a:off x="8183880" y="5166360"/>
-            <a:ext cx="3383280" cy="914400"/>
-          </a:xfrm>
-          <a:prstGeom prst="rect">
-            <a:avLst/>
-          </a:prstGeom>
-          <a:noFill/>
-          <a:ln/>
-        </p:spPr>
-        <p:txBody>
-          <a:bodyPr wrap="square" lIns="254" tIns="254" rIns="254" bIns="254" rtlCol="0" anchor="ctr"/>
-          <a:lstStyle/>
-          <a:p>
-            <a:pPr marL="0" indent="0">
-              <a:buNone/>
-            </a:pPr>
-            <a:r>
-              <a:rPr lang="en-US" sz="1300" b="1" dirty="0">
-                <a:solidFill>
-                  <a:srgbClr val="39C2D7"/>
-                </a:solidFill>
-                <a:latin typeface="Montserrat" pitchFamily="34" charset="0"/>
-                <a:ea typeface="Montserrat" pitchFamily="34" charset="-122"/>
-                <a:cs typeface="Montserrat" pitchFamily="34" charset="-120"/>
-              </a:rPr>
-              <a:t>In ML:  </a:t>
-            </a:r>
-            <a:r>
-              <a:rPr lang="en-US" sz="1300" dirty="0">
-                <a:solidFill>
-                  <a:srgbClr val="222222"/>
-                </a:solidFill>
-                <a:latin typeface="Calibri" pitchFamily="34" charset="0"/>
-                <a:ea typeface="Calibri" pitchFamily="34" charset="-122"/>
-                <a:cs typeface="Calibri" pitchFamily="34" charset="-120"/>
-              </a:rPr>
-              <a:t>Naive Bayes assumes words are independent given the class - simple but powerful.</a:t>
-            </a:r>
-            <a:endParaRPr lang="en-US" sz="1300" dirty="0"/>
-          </a:p>
-        </p:txBody>
-      </p:sp>
-      <p:sp>
-        <p:nvSpPr>
-          <p:cNvPr id="13" name="Text 10"/>
-          <p:cNvSpPr txBox="1"/>
-          <p:nvPr/>
-        </p:nvSpPr>
-        <p:spPr>
-          <a:xfrm>
-            <a:off x="457200" y="6382512"/>
-            <a:ext cx="1097280" cy="292608"/>
-          </a:xfrm>
-          <a:prstGeom prst="rect">
-            <a:avLst/>
-          </a:prstGeom>
-          <a:noFill/>
-          <a:ln/>
-        </p:spPr>
-        <p:txBody>
-          <a:bodyPr wrap="square" lIns="0" tIns="0" rIns="0" bIns="0" rtlCol="0" anchor="ctr"/>
-          <a:lstStyle/>
-          <a:p>
-            <a:pPr marL="0" indent="0">
-              <a:buNone/>
-            </a:pPr>
-            <a:r>
-              <a:rPr lang="en-US" sz="1300" b="1" dirty="0">
-                <a:solidFill>
-                  <a:srgbClr val="39C2D7"/>
-                </a:solidFill>
-                <a:latin typeface="Montserrat" pitchFamily="34" charset="0"/>
-                <a:ea typeface="Montserrat" pitchFamily="34" charset="-122"/>
-                <a:cs typeface="Montserrat" pitchFamily="34" charset="-120"/>
-              </a:rPr>
-              <a:t>iTPU</a:t>
-            </a:r>
-            <a:endParaRPr lang="en-US" sz="1300" dirty="0"/>
-          </a:p>
-        </p:txBody>
-      </p:sp>
-      <p:sp>
-        <p:nvSpPr>
-          <p:cNvPr id="14" name="Text 11"/>
-          <p:cNvSpPr txBox="1"/>
-          <p:nvPr/>
-        </p:nvSpPr>
-        <p:spPr>
-          <a:xfrm>
-            <a:off x="1371600" y="6400800"/>
-            <a:ext cx="6400800" cy="256032"/>
-          </a:xfrm>
-          <a:prstGeom prst="rect">
-            <a:avLst/>
-          </a:prstGeom>
-          <a:noFill/>
-          <a:ln/>
-        </p:spPr>
-        <p:txBody>
-          <a:bodyPr wrap="square" lIns="0" tIns="0" rIns="0" bIns="0" rtlCol="0" anchor="ctr"/>
-          <a:lstStyle/>
-          <a:p>
-            <a:pPr marL="0" indent="0">
-              <a:buNone/>
-            </a:pPr>
-            <a:r>
-              <a:rPr lang="en-US" sz="900" dirty="0">
-                <a:solidFill>
-                  <a:srgbClr val="464547"/>
-                </a:solidFill>
-                <a:latin typeface="Calibri" pitchFamily="34" charset="0"/>
-                <a:ea typeface="Calibri" pitchFamily="34" charset="-122"/>
-                <a:cs typeface="Calibri" pitchFamily="34" charset="-120"/>
-              </a:rPr>
-              <a:t>Part 2  |  Probability &amp; Statistics - handling uncertainty</a:t>
-            </a:r>
-            <a:endParaRPr lang="en-US" sz="900" dirty="0"/>
-          </a:p>
-        </p:txBody>
-      </p:sp>
-    </p:spTree>
-  </p:cSld>
-  <p:clrMapOvr>
-    <a:masterClrMapping/>
-  </p:clrMapOvr>
-</p:sld>
-</file>
-
-<file path=ppt/slides/slide29.xml><?xml version="1.0" encoding="utf-8"?>
+<file path=ppt/slides/slide25.xml><?xml version="1.0" encoding="utf-8"?>
 <p:sld xmlns:a="http://schemas.openxmlformats.org/drawingml/2006/main" xmlns:r="http://schemas.openxmlformats.org/officeDocument/2006/relationships" xmlns:p="http://schemas.openxmlformats.org/presentationml/2006/main">
   <p:cSld name="Slide 29">
     <p:bg>
@@ -18363,341 +16180,7 @@
 </p:sld>
 </file>
 
-<file path=ppt/slides/slide3.xml><?xml version="1.0" encoding="utf-8"?>
-<p:sld xmlns:a="http://schemas.openxmlformats.org/drawingml/2006/main" xmlns:r="http://schemas.openxmlformats.org/officeDocument/2006/relationships" xmlns:p="http://schemas.openxmlformats.org/presentationml/2006/main">
-  <p:cSld name="Slide 3">
-    <p:bg>
-      <p:bgPr>
-        <a:solidFill>
-          <a:srgbClr val="39C2D7"/>
-        </a:solidFill>
-        <a:effectLst/>
-      </p:bgPr>
-    </p:bg>
-    <p:spTree>
-      <p:nvGrpSpPr>
-        <p:cNvPr id="1" name=""/>
-        <p:cNvGrpSpPr/>
-        <p:nvPr/>
-      </p:nvGrpSpPr>
-      <p:grpSpPr>
-        <a:xfrm>
-          <a:off x="0" y="0"/>
-          <a:ext cx="0" cy="0"/>
-          <a:chOff x="0" y="0"/>
-          <a:chExt cx="0" cy="0"/>
-        </a:xfrm>
-      </p:grpSpPr>
-      <p:sp>
-        <p:nvSpPr>
-          <p:cNvPr id="2" name="Shape 0"/>
-          <p:cNvSpPr/>
-          <p:nvPr/>
-        </p:nvSpPr>
-        <p:spPr>
-          <a:xfrm>
-            <a:off x="457200" y="411480"/>
-            <a:ext cx="3657600" cy="502920"/>
-          </a:xfrm>
-          <a:prstGeom prst="rect">
-            <a:avLst/>
-          </a:prstGeom>
-          <a:solidFill>
-            <a:srgbClr val="FFFFFF"/>
-          </a:solidFill>
-          <a:ln/>
-        </p:spPr>
-      </p:sp>
-      <p:sp>
-        <p:nvSpPr>
-          <p:cNvPr id="3" name="Text 1"/>
-          <p:cNvSpPr txBox="1"/>
-          <p:nvPr/>
-        </p:nvSpPr>
-        <p:spPr>
-          <a:xfrm>
-            <a:off x="457200" y="411480"/>
-            <a:ext cx="3657600" cy="502920"/>
-          </a:xfrm>
-          <a:prstGeom prst="rect">
-            <a:avLst/>
-          </a:prstGeom>
-          <a:noFill/>
-          <a:ln/>
-        </p:spPr>
-        <p:txBody>
-          <a:bodyPr wrap="square" lIns="0" tIns="0" rIns="0" bIns="0" rtlCol="0" anchor="ctr"/>
-          <a:lstStyle/>
-          <a:p>
-            <a:pPr marL="0" indent="0" algn="ctr">
-              <a:buNone/>
-            </a:pPr>
-            <a:r>
-              <a:rPr lang="en-US" sz="1400" b="1" dirty="0">
-                <a:solidFill>
-                  <a:srgbClr val="39C2D7"/>
-                </a:solidFill>
-                <a:latin typeface="Montserrat" pitchFamily="34" charset="0"/>
-                <a:ea typeface="Montserrat" pitchFamily="34" charset="-122"/>
-                <a:cs typeface="Montserrat" pitchFamily="34" charset="-120"/>
-              </a:rPr>
-              <a:t>MENTI  |  Word cloud</a:t>
-            </a:r>
-            <a:endParaRPr lang="en-US" sz="1400" dirty="0"/>
-          </a:p>
-        </p:txBody>
-      </p:sp>
-      <p:sp>
-        <p:nvSpPr>
-          <p:cNvPr id="4" name="Text 2"/>
-          <p:cNvSpPr txBox="1"/>
-          <p:nvPr/>
-        </p:nvSpPr>
-        <p:spPr>
-          <a:xfrm>
-            <a:off x="10149840" y="457200"/>
-            <a:ext cx="1600200" cy="411480"/>
-          </a:xfrm>
-          <a:prstGeom prst="rect">
-            <a:avLst/>
-          </a:prstGeom>
-          <a:noFill/>
-          <a:ln/>
-        </p:spPr>
-        <p:txBody>
-          <a:bodyPr wrap="square" lIns="0" tIns="0" rIns="0" bIns="0" rtlCol="0" anchor="ctr"/>
-          <a:lstStyle/>
-          <a:p>
-            <a:pPr marL="0" indent="0" algn="r">
-              <a:buNone/>
-            </a:pPr>
-            <a:r>
-              <a:rPr lang="en-US" sz="1300" i="1" dirty="0">
-                <a:solidFill>
-                  <a:srgbClr val="FFFFFF"/>
-                </a:solidFill>
-                <a:latin typeface="Calibri" pitchFamily="34" charset="0"/>
-                <a:ea typeface="Calibri" pitchFamily="34" charset="-122"/>
-                <a:cs typeface="Calibri" pitchFamily="34" charset="-120"/>
-              </a:rPr>
-              <a:t>~3 min</a:t>
-            </a:r>
-            <a:endParaRPr lang="en-US" sz="1300" dirty="0"/>
-          </a:p>
-        </p:txBody>
-      </p:sp>
-      <p:sp>
-        <p:nvSpPr>
-          <p:cNvPr id="5" name="Shape 3"/>
-          <p:cNvSpPr/>
-          <p:nvPr/>
-        </p:nvSpPr>
-        <p:spPr>
-          <a:xfrm>
-            <a:off x="7818120" y="1051560"/>
-            <a:ext cx="3931920" cy="502920"/>
-          </a:xfrm>
-          <a:prstGeom prst="rect">
-            <a:avLst/>
-          </a:prstGeom>
-          <a:solidFill>
-            <a:srgbClr val="FFFFFF"/>
-          </a:solidFill>
-          <a:ln/>
-        </p:spPr>
-      </p:sp>
-      <p:sp>
-        <p:nvSpPr>
-          <p:cNvPr id="6" name="Text 4"/>
-          <p:cNvSpPr txBox="1"/>
-          <p:nvPr/>
-        </p:nvSpPr>
-        <p:spPr>
-          <a:xfrm>
-            <a:off x="7818120" y="1051560"/>
-            <a:ext cx="3931920" cy="502920"/>
-          </a:xfrm>
-          <a:prstGeom prst="rect">
-            <a:avLst/>
-          </a:prstGeom>
-          <a:noFill/>
-          <a:ln/>
-        </p:spPr>
-        <p:txBody>
-          <a:bodyPr wrap="square" lIns="0" tIns="0" rIns="0" bIns="0" rtlCol="0" anchor="ctr"/>
-          <a:lstStyle/>
-          <a:p>
-            <a:pPr marL="0" indent="0" algn="ctr">
-              <a:buNone/>
-            </a:pPr>
-            <a:r>
-              <a:rPr lang="en-US" sz="1300" b="1" dirty="0">
-                <a:solidFill>
-                  <a:srgbClr val="39C2D7"/>
-                </a:solidFill>
-                <a:latin typeface="Montserrat" pitchFamily="34" charset="0"/>
-                <a:ea typeface="Montserrat" pitchFamily="34" charset="-122"/>
-                <a:cs typeface="Montserrat" pitchFamily="34" charset="-120"/>
-              </a:rPr>
-              <a:t>menti.com   code:  ____ ____</a:t>
-            </a:r>
-            <a:endParaRPr lang="en-US" sz="1300" dirty="0"/>
-          </a:p>
-        </p:txBody>
-      </p:sp>
-      <p:sp>
-        <p:nvSpPr>
-          <p:cNvPr id="7" name="Text 5"/>
-          <p:cNvSpPr txBox="1"/>
-          <p:nvPr/>
-        </p:nvSpPr>
-        <p:spPr>
-          <a:xfrm>
-            <a:off x="640080" y="1691640"/>
-            <a:ext cx="10972800" cy="1325880"/>
-          </a:xfrm>
-          <a:prstGeom prst="rect">
-            <a:avLst/>
-          </a:prstGeom>
-          <a:noFill/>
-          <a:ln/>
-        </p:spPr>
-        <p:txBody>
-          <a:bodyPr wrap="square" lIns="0" tIns="0" rIns="0" bIns="0" rtlCol="0" anchor="t"/>
-          <a:lstStyle/>
-          <a:p>
-            <a:pPr marL="0" indent="0">
-              <a:buNone/>
-            </a:pPr>
-            <a:r>
-              <a:rPr lang="en-US" sz="2700" b="1" dirty="0">
-                <a:solidFill>
-                  <a:srgbClr val="FFFFFF"/>
-                </a:solidFill>
-                <a:latin typeface="Montserrat" pitchFamily="34" charset="0"/>
-                <a:ea typeface="Montserrat" pitchFamily="34" charset="-122"/>
-                <a:cs typeface="Montserrat" pitchFamily="34" charset="-120"/>
-              </a:rPr>
-              <a:t>In ONE word: what does it mean for a machine to 'learn'?</a:t>
-            </a:r>
-            <a:endParaRPr lang="en-US" sz="2700" dirty="0"/>
-          </a:p>
-        </p:txBody>
-      </p:sp>
-      <p:sp>
-        <p:nvSpPr>
-          <p:cNvPr id="8" name="Shape 6"/>
-          <p:cNvSpPr/>
-          <p:nvPr/>
-        </p:nvSpPr>
-        <p:spPr>
-          <a:xfrm>
-            <a:off x="822960" y="3108960"/>
-            <a:ext cx="10515600" cy="2651760"/>
-          </a:xfrm>
-          <a:prstGeom prst="rect">
-            <a:avLst/>
-          </a:prstGeom>
-          <a:solidFill>
-            <a:srgbClr val="FFFFFF">
-              <a:alpha val="20000"/>
-            </a:srgbClr>
-          </a:solidFill>
-          <a:ln w="25400">
-            <a:solidFill>
-              <a:srgbClr val="FFFFFF"/>
-            </a:solidFill>
-            <a:prstDash val="dash"/>
-          </a:ln>
-        </p:spPr>
-      </p:sp>
-      <p:sp>
-        <p:nvSpPr>
-          <p:cNvPr id="9" name="Text 7"/>
-          <p:cNvSpPr txBox="1"/>
-          <p:nvPr/>
-        </p:nvSpPr>
-        <p:spPr>
-          <a:xfrm>
-            <a:off x="822960" y="3108960"/>
-            <a:ext cx="10515600" cy="2651760"/>
-          </a:xfrm>
-          <a:prstGeom prst="rect">
-            <a:avLst/>
-          </a:prstGeom>
-          <a:noFill/>
-          <a:ln/>
-        </p:spPr>
-        <p:txBody>
-          <a:bodyPr wrap="square" lIns="0" tIns="0" rIns="0" bIns="0" rtlCol="0" anchor="ctr"/>
-          <a:lstStyle/>
-          <a:p>
-            <a:pPr marL="0" indent="0" algn="ctr">
-              <a:buNone/>
-            </a:pPr>
-            <a:r>
-              <a:rPr lang="en-US" sz="2200" b="1" dirty="0">
-                <a:solidFill>
-                  <a:srgbClr val="FFFFFF"/>
-                </a:solidFill>
-                <a:latin typeface="Montserrat" pitchFamily="34" charset="0"/>
-                <a:ea typeface="Montserrat" pitchFamily="34" charset="-122"/>
-                <a:cs typeface="Montserrat" pitchFamily="34" charset="-120"/>
-              </a:rPr>
-              <a:t>Live answers appear here on Menti</a:t>
-            </a:r>
-            <a:endParaRPr lang="en-US" sz="2200" dirty="0"/>
-          </a:p>
-        </p:txBody>
-      </p:sp>
-      <p:sp>
-        <p:nvSpPr>
-          <p:cNvPr id="10" name="Text 8"/>
-          <p:cNvSpPr txBox="1"/>
-          <p:nvPr/>
-        </p:nvSpPr>
-        <p:spPr>
-          <a:xfrm>
-            <a:off x="640080" y="5897880"/>
-            <a:ext cx="10058400" cy="365760"/>
-          </a:xfrm>
-          <a:prstGeom prst="rect">
-            <a:avLst/>
-          </a:prstGeom>
-          <a:noFill/>
-          <a:ln/>
-        </p:spPr>
-        <p:txBody>
-          <a:bodyPr wrap="square" lIns="0" tIns="0" rIns="0" bIns="0" rtlCol="0" anchor="ctr"/>
-          <a:lstStyle/>
-          <a:p>
-            <a:pPr marL="0" indent="0">
-              <a:buNone/>
-            </a:pPr>
-            <a:r>
-              <a:rPr lang="en-US" sz="1500" i="1" dirty="0">
-                <a:solidFill>
-                  <a:srgbClr val="FFFFFF"/>
-                </a:solidFill>
-                <a:latin typeface="Calibri" pitchFamily="34" charset="0"/>
-                <a:ea typeface="Calibri" pitchFamily="34" charset="-122"/>
-                <a:cs typeface="Calibri" pitchFamily="34" charset="-120"/>
-              </a:rPr>
-              <a:t>Type 1-2 words on menti.com  -  watch the cloud grow!</a:t>
-            </a:r>
-            <a:endParaRPr lang="en-US" sz="1500" dirty="0"/>
-          </a:p>
-        </p:txBody>
-      </p:sp>
-    </p:spTree>
-  </p:cSld>
-  <p:clrMapOvr>
-    <a:masterClrMapping/>
-  </p:clrMapOvr>
-</p:sld>
-</file>
-
-<file path=ppt/slides/slide30.xml><?xml version="1.0" encoding="utf-8"?>
+<file path=ppt/slides/slide26.xml><?xml version="1.0" encoding="utf-8"?>
 <p:sld xmlns:a="http://schemas.openxmlformats.org/drawingml/2006/main" xmlns:r="http://schemas.openxmlformats.org/officeDocument/2006/relationships" xmlns:p="http://schemas.openxmlformats.org/presentationml/2006/main">
   <p:cSld name="Slide 30">
     <p:bg>
@@ -19229,7 +16712,7 @@
 </p:sld>
 </file>
 
-<file path=ppt/slides/slide31.xml><?xml version="1.0" encoding="utf-8"?>
+<file path=ppt/slides/slide27.xml><?xml version="1.0" encoding="utf-8"?>
 <p:sld xmlns:a="http://schemas.openxmlformats.org/drawingml/2006/main" xmlns:r="http://schemas.openxmlformats.org/officeDocument/2006/relationships" xmlns:p="http://schemas.openxmlformats.org/presentationml/2006/main">
   <p:cSld name="Slide 31">
     <p:bg>
@@ -19761,7 +17244,7 @@
 </p:sld>
 </file>
 
-<file path=ppt/slides/slide32.xml><?xml version="1.0" encoding="utf-8"?>
+<file path=ppt/slides/slide28.xml><?xml version="1.0" encoding="utf-8"?>
 <p:sld xmlns:a="http://schemas.openxmlformats.org/drawingml/2006/main" xmlns:r="http://schemas.openxmlformats.org/officeDocument/2006/relationships" xmlns:p="http://schemas.openxmlformats.org/presentationml/2006/main">
   <p:cSld name="Slide 32">
     <p:bg>
@@ -20820,7 +18303,7 @@
 </p:sld>
 </file>
 
-<file path=ppt/slides/slide33.xml><?xml version="1.0" encoding="utf-8"?>
+<file path=ppt/slides/slide29.xml><?xml version="1.0" encoding="utf-8"?>
 <p:sld xmlns:a="http://schemas.openxmlformats.org/drawingml/2006/main" xmlns:r="http://schemas.openxmlformats.org/officeDocument/2006/relationships" xmlns:p="http://schemas.openxmlformats.org/presentationml/2006/main">
   <p:cSld name="Slide 33">
     <p:bg>
@@ -21815,7 +19298,157 @@
 </p:sld>
 </file>
 
-<file path=ppt/slides/slide34.xml><?xml version="1.0" encoding="utf-8"?>
+<file path=ppt/slides/slide3.xml><?xml version="1.0" encoding="utf-8"?>
+<p:sld xmlns:a="http://schemas.openxmlformats.org/drawingml/2006/main" xmlns:r="http://schemas.openxmlformats.org/officeDocument/2006/relationships" xmlns:p="http://schemas.openxmlformats.org/presentationml/2006/main">
+  <p:cSld name="Slide 4">
+    <p:bg>
+      <p:bgPr>
+        <a:solidFill>
+          <a:srgbClr val="39C2D7"/>
+        </a:solidFill>
+        <a:effectLst/>
+      </p:bgPr>
+    </p:bg>
+    <p:spTree>
+      <p:nvGrpSpPr>
+        <p:cNvPr id="1" name=""/>
+        <p:cNvGrpSpPr/>
+        <p:nvPr/>
+      </p:nvGrpSpPr>
+      <p:grpSpPr>
+        <a:xfrm>
+          <a:off x="0" y="0"/>
+          <a:ext cx="0" cy="0"/>
+          <a:chOff x="0" y="0"/>
+          <a:chExt cx="0" cy="0"/>
+        </a:xfrm>
+      </p:grpSpPr>
+      <p:sp>
+        <p:nvSpPr>
+          <p:cNvPr id="2" name="Text 0"/>
+          <p:cNvSpPr txBox="1"/>
+          <p:nvPr/>
+        </p:nvSpPr>
+        <p:spPr>
+          <a:xfrm>
+            <a:off x="731520" y="2011680"/>
+            <a:ext cx="10058400" cy="640080"/>
+          </a:xfrm>
+          <a:prstGeom prst="rect">
+            <a:avLst/>
+          </a:prstGeom>
+          <a:noFill/>
+          <a:ln/>
+        </p:spPr>
+        <p:txBody>
+          <a:bodyPr wrap="square" lIns="0" tIns="0" rIns="0" bIns="0" rtlCol="0" anchor="ctr"/>
+          <a:lstStyle/>
+          <a:p>
+            <a:pPr marL="0" indent="0">
+              <a:buNone/>
+            </a:pPr>
+            <a:r>
+              <a:rPr lang="en-US" sz="2600" b="1" dirty="0">
+                <a:solidFill>
+                  <a:srgbClr val="FFFFFF"/>
+                </a:solidFill>
+                <a:latin typeface="Montserrat" pitchFamily="34" charset="0"/>
+                <a:ea typeface="Montserrat" pitchFamily="34" charset="-122"/>
+                <a:cs typeface="Montserrat" pitchFamily="34" charset="-120"/>
+              </a:rPr>
+              <a:t>PART 1</a:t>
+            </a:r>
+            <a:endParaRPr lang="en-US" sz="2600" dirty="0"/>
+          </a:p>
+        </p:txBody>
+      </p:sp>
+      <p:sp>
+        <p:nvSpPr>
+          <p:cNvPr id="3" name="Text 1"/>
+          <p:cNvSpPr txBox="1"/>
+          <p:nvPr/>
+        </p:nvSpPr>
+        <p:spPr>
+          <a:xfrm>
+            <a:off x="731520" y="2697480"/>
+            <a:ext cx="10698480" cy="914400"/>
+          </a:xfrm>
+          <a:prstGeom prst="rect">
+            <a:avLst/>
+          </a:prstGeom>
+          <a:noFill/>
+          <a:ln/>
+        </p:spPr>
+        <p:txBody>
+          <a:bodyPr wrap="square" lIns="0" tIns="0" rIns="0" bIns="0" rtlCol="0" anchor="ctr"/>
+          <a:lstStyle/>
+          <a:p>
+            <a:pPr marL="0" indent="0">
+              <a:buNone/>
+            </a:pPr>
+            <a:r>
+              <a:rPr lang="en-US" sz="4600" b="1" dirty="0">
+                <a:solidFill>
+                  <a:srgbClr val="FFFFFF"/>
+                </a:solidFill>
+                <a:latin typeface="Montserrat" pitchFamily="34" charset="0"/>
+                <a:ea typeface="Montserrat" pitchFamily="34" charset="-122"/>
+                <a:cs typeface="Montserrat" pitchFamily="34" charset="-120"/>
+              </a:rPr>
+              <a:t>Calculus - how a model learns</a:t>
+            </a:r>
+            <a:endParaRPr lang="en-US" sz="4600" dirty="0"/>
+          </a:p>
+        </p:txBody>
+      </p:sp>
+      <p:sp>
+        <p:nvSpPr>
+          <p:cNvPr id="4" name="Text 2"/>
+          <p:cNvSpPr txBox="1"/>
+          <p:nvPr/>
+        </p:nvSpPr>
+        <p:spPr>
+          <a:xfrm>
+            <a:off x="749808" y="3749040"/>
+            <a:ext cx="10058400" cy="548640"/>
+          </a:xfrm>
+          <a:prstGeom prst="rect">
+            <a:avLst/>
+          </a:prstGeom>
+          <a:noFill/>
+          <a:ln/>
+        </p:spPr>
+        <p:txBody>
+          <a:bodyPr wrap="square" lIns="0" tIns="0" rIns="0" bIns="0" rtlCol="0" anchor="ctr"/>
+          <a:lstStyle/>
+          <a:p>
+            <a:pPr marL="0" indent="0">
+              <a:buNone/>
+            </a:pPr>
+            <a:r>
+              <a:rPr lang="en-US" sz="2000" dirty="0">
+                <a:solidFill>
+                  <a:srgbClr val="FFFFFF"/>
+                </a:solidFill>
+                <a:latin typeface="Calibri" pitchFamily="34" charset="0"/>
+                <a:ea typeface="Calibri" pitchFamily="34" charset="-122"/>
+                <a:cs typeface="Calibri" pitchFamily="34" charset="-120"/>
+              </a:rPr>
+              <a:t>Learning = reducing error, one small step at a time</a:t>
+            </a:r>
+            <a:endParaRPr lang="en-US" sz="2000" dirty="0"/>
+          </a:p>
+        </p:txBody>
+      </p:sp>
+    </p:spTree>
+  </p:cSld>
+  <p:clrMapOvr>
+    <a:masterClrMapping/>
+  </p:clrMapOvr>
+</p:sld>
+</file>
+
+<file path=ppt/slides/slide30.xml><?xml version="1.0" encoding="utf-8"?>
 <p:sld xmlns:a="http://schemas.openxmlformats.org/drawingml/2006/main" xmlns:r="http://schemas.openxmlformats.org/officeDocument/2006/relationships" xmlns:p="http://schemas.openxmlformats.org/presentationml/2006/main">
   <p:cSld name="Slide 34">
     <p:bg>
@@ -22177,7 +19810,7 @@
 </p:sld>
 </file>
 
-<file path=ppt/slides/slide35.xml><?xml version="1.0" encoding="utf-8"?>
+<file path=ppt/slides/slide31.xml><?xml version="1.0" encoding="utf-8"?>
 <p:sld xmlns:a="http://schemas.openxmlformats.org/drawingml/2006/main" xmlns:r="http://schemas.openxmlformats.org/officeDocument/2006/relationships" xmlns:p="http://schemas.openxmlformats.org/presentationml/2006/main">
   <p:cSld name="Slide 35">
     <p:bg>
@@ -22578,7 +20211,7 @@
 </p:sld>
 </file>
 
-<file path=ppt/slides/slide36.xml><?xml version="1.0" encoding="utf-8"?>
+<file path=ppt/slides/slide32.xml><?xml version="1.0" encoding="utf-8"?>
 <p:sld xmlns:a="http://schemas.openxmlformats.org/drawingml/2006/main" xmlns:r="http://schemas.openxmlformats.org/officeDocument/2006/relationships" xmlns:p="http://schemas.openxmlformats.org/presentationml/2006/main">
   <p:cSld name="Slide 36">
     <p:bg>
@@ -23089,7 +20722,7 @@
 </p:sld>
 </file>
 
-<file path=ppt/slides/slide37.xml><?xml version="1.0" encoding="utf-8"?>
+<file path=ppt/slides/slide33.xml><?xml version="1.0" encoding="utf-8"?>
 <p:sld xmlns:a="http://schemas.openxmlformats.org/drawingml/2006/main" xmlns:r="http://schemas.openxmlformats.org/officeDocument/2006/relationships" xmlns:p="http://schemas.openxmlformats.org/presentationml/2006/main">
   <p:cSld name="Slide 37">
     <p:bg>
@@ -23621,7 +21254,7 @@
 </p:sld>
 </file>
 
-<file path=ppt/slides/slide38.xml><?xml version="1.0" encoding="utf-8"?>
+<file path=ppt/slides/slide34.xml><?xml version="1.0" encoding="utf-8"?>
 <p:sld xmlns:a="http://schemas.openxmlformats.org/drawingml/2006/main" xmlns:r="http://schemas.openxmlformats.org/officeDocument/2006/relationships" xmlns:p="http://schemas.openxmlformats.org/presentationml/2006/main">
   <p:cSld name="Slide 38">
     <p:bg>
@@ -24153,7 +21786,7 @@
 </p:sld>
 </file>
 
-<file path=ppt/slides/slide39.xml><?xml version="1.0" encoding="utf-8"?>
+<file path=ppt/slides/slide35.xml><?xml version="1.0" encoding="utf-8"?>
 <p:sld xmlns:a="http://schemas.openxmlformats.org/drawingml/2006/main" xmlns:r="http://schemas.openxmlformats.org/officeDocument/2006/relationships" xmlns:p="http://schemas.openxmlformats.org/presentationml/2006/main">
   <p:cSld name="Slide 39">
     <p:bg>
@@ -24422,157 +22055,7 @@
 </p:sld>
 </file>
 
-<file path=ppt/slides/slide4.xml><?xml version="1.0" encoding="utf-8"?>
-<p:sld xmlns:a="http://schemas.openxmlformats.org/drawingml/2006/main" xmlns:r="http://schemas.openxmlformats.org/officeDocument/2006/relationships" xmlns:p="http://schemas.openxmlformats.org/presentationml/2006/main">
-  <p:cSld name="Slide 4">
-    <p:bg>
-      <p:bgPr>
-        <a:solidFill>
-          <a:srgbClr val="39C2D7"/>
-        </a:solidFill>
-        <a:effectLst/>
-      </p:bgPr>
-    </p:bg>
-    <p:spTree>
-      <p:nvGrpSpPr>
-        <p:cNvPr id="1" name=""/>
-        <p:cNvGrpSpPr/>
-        <p:nvPr/>
-      </p:nvGrpSpPr>
-      <p:grpSpPr>
-        <a:xfrm>
-          <a:off x="0" y="0"/>
-          <a:ext cx="0" cy="0"/>
-          <a:chOff x="0" y="0"/>
-          <a:chExt cx="0" cy="0"/>
-        </a:xfrm>
-      </p:grpSpPr>
-      <p:sp>
-        <p:nvSpPr>
-          <p:cNvPr id="2" name="Text 0"/>
-          <p:cNvSpPr txBox="1"/>
-          <p:nvPr/>
-        </p:nvSpPr>
-        <p:spPr>
-          <a:xfrm>
-            <a:off x="731520" y="2011680"/>
-            <a:ext cx="10058400" cy="640080"/>
-          </a:xfrm>
-          <a:prstGeom prst="rect">
-            <a:avLst/>
-          </a:prstGeom>
-          <a:noFill/>
-          <a:ln/>
-        </p:spPr>
-        <p:txBody>
-          <a:bodyPr wrap="square" lIns="0" tIns="0" rIns="0" bIns="0" rtlCol="0" anchor="ctr"/>
-          <a:lstStyle/>
-          <a:p>
-            <a:pPr marL="0" indent="0">
-              <a:buNone/>
-            </a:pPr>
-            <a:r>
-              <a:rPr lang="en-US" sz="2600" b="1" dirty="0">
-                <a:solidFill>
-                  <a:srgbClr val="FFFFFF"/>
-                </a:solidFill>
-                <a:latin typeface="Montserrat" pitchFamily="34" charset="0"/>
-                <a:ea typeface="Montserrat" pitchFamily="34" charset="-122"/>
-                <a:cs typeface="Montserrat" pitchFamily="34" charset="-120"/>
-              </a:rPr>
-              <a:t>PART 1</a:t>
-            </a:r>
-            <a:endParaRPr lang="en-US" sz="2600" dirty="0"/>
-          </a:p>
-        </p:txBody>
-      </p:sp>
-      <p:sp>
-        <p:nvSpPr>
-          <p:cNvPr id="3" name="Text 1"/>
-          <p:cNvSpPr txBox="1"/>
-          <p:nvPr/>
-        </p:nvSpPr>
-        <p:spPr>
-          <a:xfrm>
-            <a:off x="731520" y="2697480"/>
-            <a:ext cx="10698480" cy="914400"/>
-          </a:xfrm>
-          <a:prstGeom prst="rect">
-            <a:avLst/>
-          </a:prstGeom>
-          <a:noFill/>
-          <a:ln/>
-        </p:spPr>
-        <p:txBody>
-          <a:bodyPr wrap="square" lIns="0" tIns="0" rIns="0" bIns="0" rtlCol="0" anchor="ctr"/>
-          <a:lstStyle/>
-          <a:p>
-            <a:pPr marL="0" indent="0">
-              <a:buNone/>
-            </a:pPr>
-            <a:r>
-              <a:rPr lang="en-US" sz="4600" b="1" dirty="0">
-                <a:solidFill>
-                  <a:srgbClr val="FFFFFF"/>
-                </a:solidFill>
-                <a:latin typeface="Montserrat" pitchFamily="34" charset="0"/>
-                <a:ea typeface="Montserrat" pitchFamily="34" charset="-122"/>
-                <a:cs typeface="Montserrat" pitchFamily="34" charset="-120"/>
-              </a:rPr>
-              <a:t>Calculus - how a model learns</a:t>
-            </a:r>
-            <a:endParaRPr lang="en-US" sz="4600" dirty="0"/>
-          </a:p>
-        </p:txBody>
-      </p:sp>
-      <p:sp>
-        <p:nvSpPr>
-          <p:cNvPr id="4" name="Text 2"/>
-          <p:cNvSpPr txBox="1"/>
-          <p:nvPr/>
-        </p:nvSpPr>
-        <p:spPr>
-          <a:xfrm>
-            <a:off x="749808" y="3749040"/>
-            <a:ext cx="10058400" cy="548640"/>
-          </a:xfrm>
-          <a:prstGeom prst="rect">
-            <a:avLst/>
-          </a:prstGeom>
-          <a:noFill/>
-          <a:ln/>
-        </p:spPr>
-        <p:txBody>
-          <a:bodyPr wrap="square" lIns="0" tIns="0" rIns="0" bIns="0" rtlCol="0" anchor="ctr"/>
-          <a:lstStyle/>
-          <a:p>
-            <a:pPr marL="0" indent="0">
-              <a:buNone/>
-            </a:pPr>
-            <a:r>
-              <a:rPr lang="en-US" sz="2000" dirty="0">
-                <a:solidFill>
-                  <a:srgbClr val="FFFFFF"/>
-                </a:solidFill>
-                <a:latin typeface="Calibri" pitchFamily="34" charset="0"/>
-                <a:ea typeface="Calibri" pitchFamily="34" charset="-122"/>
-                <a:cs typeface="Calibri" pitchFamily="34" charset="-120"/>
-              </a:rPr>
-              <a:t>Learning = reducing error, one small step at a time</a:t>
-            </a:r>
-            <a:endParaRPr lang="en-US" sz="2000" dirty="0"/>
-          </a:p>
-        </p:txBody>
-      </p:sp>
-    </p:spTree>
-  </p:cSld>
-  <p:clrMapOvr>
-    <a:masterClrMapping/>
-  </p:clrMapOvr>
-</p:sld>
-</file>
-
-<file path=ppt/slides/slide40.xml><?xml version="1.0" encoding="utf-8"?>
+<file path=ppt/slides/slide36.xml><?xml version="1.0" encoding="utf-8"?>
 <p:sld xmlns:a="http://schemas.openxmlformats.org/drawingml/2006/main" xmlns:r="http://schemas.openxmlformats.org/officeDocument/2006/relationships" xmlns:p="http://schemas.openxmlformats.org/presentationml/2006/main">
   <p:cSld name="Slide 40">
     <p:bg>
@@ -25083,7 +22566,7 @@
 </p:sld>
 </file>
 
-<file path=ppt/slides/slide41.xml><?xml version="1.0" encoding="utf-8"?>
+<file path=ppt/slides/slide37.xml><?xml version="1.0" encoding="utf-8"?>
 <p:sld xmlns:a="http://schemas.openxmlformats.org/drawingml/2006/main" xmlns:r="http://schemas.openxmlformats.org/officeDocument/2006/relationships" xmlns:p="http://schemas.openxmlformats.org/presentationml/2006/main">
   <p:cSld name="Slide 41">
     <p:bg>
@@ -25411,7 +22894,7 @@
 </p:sld>
 </file>
 
-<file path=ppt/slides/slide42.xml><?xml version="1.0" encoding="utf-8"?>
+<file path=ppt/slides/slide38.xml><?xml version="1.0" encoding="utf-8"?>
 <p:sld xmlns:a="http://schemas.openxmlformats.org/drawingml/2006/main" xmlns:r="http://schemas.openxmlformats.org/officeDocument/2006/relationships" xmlns:p="http://schemas.openxmlformats.org/presentationml/2006/main">
   <p:cSld name="Slide 42">
     <p:bg>
@@ -25812,7 +23295,7 @@
 </p:sld>
 </file>
 
-<file path=ppt/slides/slide43.xml><?xml version="1.0" encoding="utf-8"?>
+<file path=ppt/slides/slide39.xml><?xml version="1.0" encoding="utf-8"?>
 <p:sld xmlns:a="http://schemas.openxmlformats.org/drawingml/2006/main" xmlns:r="http://schemas.openxmlformats.org/officeDocument/2006/relationships" xmlns:p="http://schemas.openxmlformats.org/presentationml/2006/main">
   <p:cSld name="Slide 43">
     <p:bg>
@@ -26591,7 +24074,518 @@
 </p:sld>
 </file>
 
-<file path=ppt/slides/slide44.xml><?xml version="1.0" encoding="utf-8"?>
+<file path=ppt/slides/slide4.xml><?xml version="1.0" encoding="utf-8"?>
+<p:sld xmlns:a="http://schemas.openxmlformats.org/drawingml/2006/main" xmlns:r="http://schemas.openxmlformats.org/officeDocument/2006/relationships" xmlns:p="http://schemas.openxmlformats.org/presentationml/2006/main">
+  <p:cSld name="Slide 5">
+    <p:bg>
+      <p:bgPr>
+        <a:solidFill>
+          <a:srgbClr val="FFFFFF"/>
+        </a:solidFill>
+        <a:effectLst/>
+      </p:bgPr>
+    </p:bg>
+    <p:spTree>
+      <p:nvGrpSpPr>
+        <p:cNvPr id="1" name=""/>
+        <p:cNvGrpSpPr/>
+        <p:nvPr/>
+      </p:nvGrpSpPr>
+      <p:grpSpPr>
+        <a:xfrm>
+          <a:off x="0" y="0"/>
+          <a:ext cx="0" cy="0"/>
+          <a:chOff x="0" y="0"/>
+          <a:chExt cx="0" cy="0"/>
+        </a:xfrm>
+      </p:grpSpPr>
+      <p:sp>
+        <p:nvSpPr>
+          <p:cNvPr id="2" name="Shape 0"/>
+          <p:cNvSpPr/>
+          <p:nvPr/>
+        </p:nvSpPr>
+        <p:spPr>
+          <a:xfrm>
+            <a:off x="457200" y="411480"/>
+            <a:ext cx="2103120" cy="502920"/>
+          </a:xfrm>
+          <a:prstGeom prst="rect">
+            <a:avLst/>
+          </a:prstGeom>
+          <a:solidFill>
+            <a:srgbClr val="39C2D7"/>
+          </a:solidFill>
+          <a:ln/>
+        </p:spPr>
+      </p:sp>
+      <p:sp>
+        <p:nvSpPr>
+          <p:cNvPr id="3" name="Text 1"/>
+          <p:cNvSpPr txBox="1"/>
+          <p:nvPr/>
+        </p:nvSpPr>
+        <p:spPr>
+          <a:xfrm>
+            <a:off x="457200" y="411480"/>
+            <a:ext cx="2103120" cy="502920"/>
+          </a:xfrm>
+          <a:prstGeom prst="rect">
+            <a:avLst/>
+          </a:prstGeom>
+          <a:noFill/>
+          <a:ln/>
+        </p:spPr>
+        <p:txBody>
+          <a:bodyPr wrap="square" lIns="0" tIns="0" rIns="0" bIns="0" rtlCol="0" anchor="ctr"/>
+          <a:lstStyle/>
+          <a:p>
+            <a:pPr marL="0" indent="0" algn="ctr">
+              <a:buNone/>
+            </a:pPr>
+            <a:r>
+              <a:rPr lang="en-US" sz="1400" b="1" dirty="0">
+                <a:solidFill>
+                  <a:srgbClr val="FFFFFF"/>
+                </a:solidFill>
+                <a:latin typeface="Montserrat" pitchFamily="34" charset="0"/>
+                <a:ea typeface="Montserrat" pitchFamily="34" charset="-122"/>
+                <a:cs typeface="Montserrat" pitchFamily="34" charset="-120"/>
+              </a:rPr>
+              <a:t>The hook</a:t>
+            </a:r>
+            <a:endParaRPr lang="en-US" sz="1400" dirty="0"/>
+          </a:p>
+        </p:txBody>
+      </p:sp>
+      <p:sp>
+        <p:nvSpPr>
+          <p:cNvPr id="4" name="Text 2"/>
+          <p:cNvSpPr txBox="1"/>
+          <p:nvPr/>
+        </p:nvSpPr>
+        <p:spPr>
+          <a:xfrm>
+            <a:off x="10149840" y="457200"/>
+            <a:ext cx="1600200" cy="411480"/>
+          </a:xfrm>
+          <a:prstGeom prst="rect">
+            <a:avLst/>
+          </a:prstGeom>
+          <a:noFill/>
+          <a:ln/>
+        </p:spPr>
+        <p:txBody>
+          <a:bodyPr wrap="square" lIns="0" tIns="0" rIns="0" bIns="0" rtlCol="0" anchor="ctr"/>
+          <a:lstStyle/>
+          <a:p>
+            <a:pPr marL="0" indent="0" algn="r">
+              <a:buNone/>
+            </a:pPr>
+            <a:r>
+              <a:rPr lang="en-US" sz="1300" i="1" dirty="0">
+                <a:solidFill>
+                  <a:srgbClr val="464547"/>
+                </a:solidFill>
+                <a:latin typeface="Calibri" pitchFamily="34" charset="0"/>
+                <a:ea typeface="Calibri" pitchFamily="34" charset="-122"/>
+                <a:cs typeface="Calibri" pitchFamily="34" charset="-120"/>
+              </a:rPr>
+              <a:t>~3 min</a:t>
+            </a:r>
+            <a:endParaRPr lang="en-US" sz="1300" dirty="0"/>
+          </a:p>
+        </p:txBody>
+      </p:sp>
+      <p:sp>
+        <p:nvSpPr>
+          <p:cNvPr id="5" name="Text 3"/>
+          <p:cNvSpPr txBox="1"/>
+          <p:nvPr/>
+        </p:nvSpPr>
+        <p:spPr>
+          <a:xfrm>
+            <a:off x="457200" y="1024128"/>
+            <a:ext cx="11247120" cy="594360"/>
+          </a:xfrm>
+          <a:prstGeom prst="rect">
+            <a:avLst/>
+          </a:prstGeom>
+          <a:noFill/>
+          <a:ln/>
+        </p:spPr>
+        <p:txBody>
+          <a:bodyPr wrap="square" lIns="0" tIns="0" rIns="0" bIns="0" rtlCol="0" anchor="ctr"/>
+          <a:lstStyle/>
+          <a:p>
+            <a:pPr marL="0" indent="0">
+              <a:buNone/>
+            </a:pPr>
+            <a:r>
+              <a:rPr lang="en-US" sz="2500" b="1" dirty="0">
+                <a:solidFill>
+                  <a:srgbClr val="222222"/>
+                </a:solidFill>
+                <a:latin typeface="Montserrat" pitchFamily="34" charset="0"/>
+                <a:ea typeface="Montserrat" pitchFamily="34" charset="-122"/>
+                <a:cs typeface="Montserrat" pitchFamily="34" charset="-120"/>
+              </a:rPr>
+              <a:t>You are blindfolded on a mountain...</a:t>
+            </a:r>
+            <a:endParaRPr lang="en-US" sz="2500" dirty="0"/>
+          </a:p>
+        </p:txBody>
+      </p:sp>
+      <p:pic>
+        <p:nvPicPr>
+          <p:cNvPr id="6" name="Image 0" descr="/home/claude/d78/hook_mountain.png"/>
+          <p:cNvPicPr>
+            <a:picLocks noChangeAspect="1"/>
+          </p:cNvPicPr>
+          <p:nvPr/>
+        </p:nvPicPr>
+        <p:blipFill>
+          <a:blip r:embed="rId3"/>
+          <a:stretch>
+            <a:fillRect/>
+          </a:stretch>
+        </p:blipFill>
+        <p:spPr>
+          <a:xfrm>
+            <a:off x="411480" y="1914378"/>
+            <a:ext cx="7315200" cy="4126523"/>
+          </a:xfrm>
+          <a:prstGeom prst="rect">
+            <a:avLst/>
+          </a:prstGeom>
+        </p:spPr>
+      </p:pic>
+      <p:sp>
+        <p:nvSpPr>
+          <p:cNvPr id="7" name="Shape 4"/>
+          <p:cNvSpPr/>
+          <p:nvPr/>
+        </p:nvSpPr>
+        <p:spPr>
+          <a:xfrm>
+            <a:off x="7955280" y="1737360"/>
+            <a:ext cx="3794760" cy="4480560"/>
+          </a:xfrm>
+          <a:prstGeom prst="rect">
+            <a:avLst/>
+          </a:prstGeom>
+          <a:solidFill>
+            <a:srgbClr val="F6F6F6"/>
+          </a:solidFill>
+          <a:ln/>
+        </p:spPr>
+      </p:sp>
+      <p:sp>
+        <p:nvSpPr>
+          <p:cNvPr id="8" name="Shape 5"/>
+          <p:cNvSpPr/>
+          <p:nvPr/>
+        </p:nvSpPr>
+        <p:spPr>
+          <a:xfrm>
+            <a:off x="7955280" y="1737360"/>
+            <a:ext cx="3794760" cy="457200"/>
+          </a:xfrm>
+          <a:prstGeom prst="rect">
+            <a:avLst/>
+          </a:prstGeom>
+          <a:solidFill>
+            <a:srgbClr val="39C2D7"/>
+          </a:solidFill>
+          <a:ln/>
+        </p:spPr>
+      </p:sp>
+      <p:sp>
+        <p:nvSpPr>
+          <p:cNvPr id="9" name="Text 6"/>
+          <p:cNvSpPr txBox="1"/>
+          <p:nvPr/>
+        </p:nvSpPr>
+        <p:spPr>
+          <a:xfrm>
+            <a:off x="8138160" y="1737360"/>
+            <a:ext cx="3474720" cy="457200"/>
+          </a:xfrm>
+          <a:prstGeom prst="rect">
+            <a:avLst/>
+          </a:prstGeom>
+          <a:noFill/>
+          <a:ln/>
+        </p:spPr>
+        <p:txBody>
+          <a:bodyPr wrap="square" lIns="0" tIns="0" rIns="0" bIns="0" rtlCol="0" anchor="ctr"/>
+          <a:lstStyle/>
+          <a:p>
+            <a:pPr marL="0" indent="0">
+              <a:buNone/>
+            </a:pPr>
+            <a:r>
+              <a:rPr lang="en-US" sz="1300" b="1" dirty="0">
+                <a:solidFill>
+                  <a:srgbClr val="FFFFFF"/>
+                </a:solidFill>
+                <a:latin typeface="Montserrat" pitchFamily="34" charset="0"/>
+                <a:ea typeface="Montserrat" pitchFamily="34" charset="-122"/>
+                <a:cs typeface="Montserrat" pitchFamily="34" charset="-120"/>
+              </a:rPr>
+              <a:t>KEY IDEA</a:t>
+            </a:r>
+            <a:endParaRPr lang="en-US" sz="1300" dirty="0"/>
+          </a:p>
+        </p:txBody>
+      </p:sp>
+      <p:sp>
+        <p:nvSpPr>
+          <p:cNvPr id="10" name="Text 7"/>
+          <p:cNvSpPr/>
+          <p:nvPr/>
+        </p:nvSpPr>
+        <p:spPr>
+          <a:xfrm>
+            <a:off x="8092440" y="2331720"/>
+            <a:ext cx="3520440" cy="2743200"/>
+          </a:xfrm>
+          <a:prstGeom prst="rect">
+            <a:avLst/>
+          </a:prstGeom>
+          <a:noFill/>
+          <a:ln/>
+        </p:spPr>
+        <p:txBody>
+          <a:bodyPr wrap="square" lIns="254" tIns="254" rIns="254" bIns="254" rtlCol="0" anchor="t"/>
+          <a:lstStyle/>
+          <a:p>
+            <a:pPr marL="342900" indent="-342900">
+              <a:spcAft>
+                <a:spcPts val="800"/>
+              </a:spcAft>
+              <a:buSzPct val="100000"/>
+              <a:buChar char="•"/>
+            </a:pPr>
+            <a:r>
+              <a:rPr lang="en-US" sz="1500" dirty="0">
+                <a:solidFill>
+                  <a:srgbClr val="222222"/>
+                </a:solidFill>
+                <a:latin typeface="Calibri" pitchFamily="34" charset="0"/>
+                <a:ea typeface="Calibri" pitchFamily="34" charset="-122"/>
+                <a:cs typeface="Calibri" pitchFamily="34" charset="-120"/>
+              </a:rPr>
+              <a:t>Goal: reach the valley (lowest point)</a:t>
+            </a:r>
+            <a:endParaRPr lang="en-US" sz="1500" dirty="0"/>
+          </a:p>
+          <a:p>
+            <a:pPr marL="342900" indent="-342900">
+              <a:spcAft>
+                <a:spcPts val="800"/>
+              </a:spcAft>
+              <a:buSzPct val="100000"/>
+              <a:buChar char="•"/>
+            </a:pPr>
+            <a:r>
+              <a:rPr lang="en-US" sz="1500" dirty="0">
+                <a:solidFill>
+                  <a:srgbClr val="222222"/>
+                </a:solidFill>
+                <a:latin typeface="Calibri" pitchFamily="34" charset="0"/>
+                <a:ea typeface="Calibri" pitchFamily="34" charset="-122"/>
+                <a:cs typeface="Calibri" pitchFamily="34" charset="-120"/>
+              </a:rPr>
+              <a:t>You can't see - but you can feel the slope under your feet</a:t>
+            </a:r>
+            <a:endParaRPr lang="en-US" sz="1500" dirty="0"/>
+          </a:p>
+          <a:p>
+            <a:pPr marL="342900" indent="-342900">
+              <a:spcAft>
+                <a:spcPts val="800"/>
+              </a:spcAft>
+              <a:buSzPct val="100000"/>
+              <a:buChar char="•"/>
+            </a:pPr>
+            <a:r>
+              <a:rPr lang="en-US" sz="1500" dirty="0">
+                <a:solidFill>
+                  <a:srgbClr val="222222"/>
+                </a:solidFill>
+                <a:latin typeface="Calibri" pitchFamily="34" charset="0"/>
+                <a:ea typeface="Calibri" pitchFamily="34" charset="-122"/>
+                <a:cs typeface="Calibri" pitchFamily="34" charset="-120"/>
+              </a:rPr>
+              <a:t>Feel slope -&gt; step downhill -&gt; repeat</a:t>
+            </a:r>
+            <a:endParaRPr lang="en-US" sz="1500" dirty="0"/>
+          </a:p>
+        </p:txBody>
+      </p:sp>
+      <p:sp>
+        <p:nvSpPr>
+          <p:cNvPr id="11" name="Shape 8"/>
+          <p:cNvSpPr/>
+          <p:nvPr/>
+        </p:nvSpPr>
+        <p:spPr>
+          <a:xfrm>
+            <a:off x="8092440" y="5166360"/>
+            <a:ext cx="3520440" cy="914400"/>
+          </a:xfrm>
+          <a:prstGeom prst="rect">
+            <a:avLst/>
+          </a:prstGeom>
+          <a:solidFill>
+            <a:srgbClr val="FFFFFF"/>
+          </a:solidFill>
+          <a:ln w="19050">
+            <a:solidFill>
+              <a:srgbClr val="39C2D7"/>
+            </a:solidFill>
+            <a:prstDash val="solid"/>
+          </a:ln>
+        </p:spPr>
+      </p:sp>
+      <p:sp>
+        <p:nvSpPr>
+          <p:cNvPr id="12" name="Text 9"/>
+          <p:cNvSpPr/>
+          <p:nvPr/>
+        </p:nvSpPr>
+        <p:spPr>
+          <a:xfrm>
+            <a:off x="8183880" y="5166360"/>
+            <a:ext cx="3383280" cy="914400"/>
+          </a:xfrm>
+          <a:prstGeom prst="rect">
+            <a:avLst/>
+          </a:prstGeom>
+          <a:noFill/>
+          <a:ln/>
+        </p:spPr>
+        <p:txBody>
+          <a:bodyPr wrap="square" lIns="254" tIns="254" rIns="254" bIns="254" rtlCol="0" anchor="ctr"/>
+          <a:lstStyle/>
+          <a:p>
+            <a:pPr marL="0" indent="0">
+              <a:buNone/>
+            </a:pPr>
+            <a:r>
+              <a:rPr lang="en-US" sz="1300" b="1" dirty="0">
+                <a:solidFill>
+                  <a:srgbClr val="39C2D7"/>
+                </a:solidFill>
+                <a:latin typeface="Montserrat" pitchFamily="34" charset="0"/>
+                <a:ea typeface="Montserrat" pitchFamily="34" charset="-122"/>
+                <a:cs typeface="Montserrat" pitchFamily="34" charset="-120"/>
+              </a:rPr>
+              <a:t>In ML:  </a:t>
+            </a:r>
+            <a:r>
+              <a:rPr lang="en-US" sz="1300" dirty="0">
+                <a:solidFill>
+                  <a:srgbClr val="222222"/>
+                </a:solidFill>
+                <a:latin typeface="Calibri" pitchFamily="34" charset="0"/>
+                <a:ea typeface="Calibri" pitchFamily="34" charset="-122"/>
+                <a:cs typeface="Calibri" pitchFamily="34" charset="-120"/>
+              </a:rPr>
+              <a:t>the mountain is the ERROR; your position is the model's WEIGHTS. Training = walking down.</a:t>
+            </a:r>
+            <a:endParaRPr lang="en-US" sz="1300" dirty="0"/>
+          </a:p>
+        </p:txBody>
+      </p:sp>
+      <p:sp>
+        <p:nvSpPr>
+          <p:cNvPr id="13" name="Text 10"/>
+          <p:cNvSpPr txBox="1"/>
+          <p:nvPr/>
+        </p:nvSpPr>
+        <p:spPr>
+          <a:xfrm>
+            <a:off x="457200" y="6382512"/>
+            <a:ext cx="1097280" cy="292608"/>
+          </a:xfrm>
+          <a:prstGeom prst="rect">
+            <a:avLst/>
+          </a:prstGeom>
+          <a:noFill/>
+          <a:ln/>
+        </p:spPr>
+        <p:txBody>
+          <a:bodyPr wrap="square" lIns="0" tIns="0" rIns="0" bIns="0" rtlCol="0" anchor="ctr"/>
+          <a:lstStyle/>
+          <a:p>
+            <a:pPr marL="0" indent="0">
+              <a:buNone/>
+            </a:pPr>
+            <a:r>
+              <a:rPr lang="en-US" sz="1300" b="1" dirty="0">
+                <a:solidFill>
+                  <a:srgbClr val="39C2D7"/>
+                </a:solidFill>
+                <a:latin typeface="Montserrat" pitchFamily="34" charset="0"/>
+                <a:ea typeface="Montserrat" pitchFamily="34" charset="-122"/>
+                <a:cs typeface="Montserrat" pitchFamily="34" charset="-120"/>
+              </a:rPr>
+              <a:t>iTPU</a:t>
+            </a:r>
+            <a:endParaRPr lang="en-US" sz="1300" dirty="0"/>
+          </a:p>
+        </p:txBody>
+      </p:sp>
+      <p:sp>
+        <p:nvSpPr>
+          <p:cNvPr id="14" name="Text 11"/>
+          <p:cNvSpPr txBox="1"/>
+          <p:nvPr/>
+        </p:nvSpPr>
+        <p:spPr>
+          <a:xfrm>
+            <a:off x="1371600" y="6400800"/>
+            <a:ext cx="6400800" cy="256032"/>
+          </a:xfrm>
+          <a:prstGeom prst="rect">
+            <a:avLst/>
+          </a:prstGeom>
+          <a:noFill/>
+          <a:ln/>
+        </p:spPr>
+        <p:txBody>
+          <a:bodyPr wrap="square" lIns="0" tIns="0" rIns="0" bIns="0" rtlCol="0" anchor="ctr"/>
+          <a:lstStyle/>
+          <a:p>
+            <a:pPr marL="0" indent="0">
+              <a:buNone/>
+            </a:pPr>
+            <a:r>
+              <a:rPr lang="en-US" sz="900" dirty="0">
+                <a:solidFill>
+                  <a:srgbClr val="464547"/>
+                </a:solidFill>
+                <a:latin typeface="Calibri" pitchFamily="34" charset="0"/>
+                <a:ea typeface="Calibri" pitchFamily="34" charset="-122"/>
+                <a:cs typeface="Calibri" pitchFamily="34" charset="-120"/>
+              </a:rPr>
+              <a:t>Part 1  |  Calculus - how a model learns</a:t>
+            </a:r>
+            <a:endParaRPr lang="en-US" sz="900" dirty="0"/>
+          </a:p>
+        </p:txBody>
+      </p:sp>
+    </p:spTree>
+  </p:cSld>
+  <p:clrMapOvr>
+    <a:masterClrMapping/>
+  </p:clrMapOvr>
+</p:sld>
+</file>
+
+<file path=ppt/slides/slide40.xml><?xml version="1.0" encoding="utf-8"?>
 <p:sld xmlns:a="http://schemas.openxmlformats.org/drawingml/2006/main" xmlns:r="http://schemas.openxmlformats.org/officeDocument/2006/relationships" xmlns:p="http://schemas.openxmlformats.org/presentationml/2006/main">
   <p:cSld name="Slide 44">
     <p:bg>
@@ -27329,7 +25323,7 @@
 </p:sld>
 </file>
 
-<file path=ppt/slides/slide45.xml><?xml version="1.0" encoding="utf-8"?>
+<file path=ppt/slides/slide41.xml><?xml version="1.0" encoding="utf-8"?>
 <p:sld xmlns:a="http://schemas.openxmlformats.org/drawingml/2006/main" xmlns:r="http://schemas.openxmlformats.org/officeDocument/2006/relationships" xmlns:p="http://schemas.openxmlformats.org/presentationml/2006/main">
   <p:cSld name="Slide 45">
     <p:bg>
@@ -27833,7 +25827,7 @@
 </p:sld>
 </file>
 
-<file path=ppt/slides/slide46.xml><?xml version="1.0" encoding="utf-8"?>
+<file path=ppt/slides/slide42.xml><?xml version="1.0" encoding="utf-8"?>
 <p:sld xmlns:a="http://schemas.openxmlformats.org/drawingml/2006/main" xmlns:r="http://schemas.openxmlformats.org/officeDocument/2006/relationships" xmlns:p="http://schemas.openxmlformats.org/presentationml/2006/main">
   <p:cSld name="Slide 46">
     <p:bg>
@@ -28563,7 +26557,7 @@
 </p:sld>
 </file>
 
-<file path=ppt/slides/slide47.xml><?xml version="1.0" encoding="utf-8"?>
+<file path=ppt/slides/slide43.xml><?xml version="1.0" encoding="utf-8"?>
 <p:sld xmlns:a="http://schemas.openxmlformats.org/drawingml/2006/main" xmlns:r="http://schemas.openxmlformats.org/officeDocument/2006/relationships" xmlns:p="http://schemas.openxmlformats.org/presentationml/2006/main">
   <p:cSld name="Slide 47">
     <p:bg>
@@ -28897,7 +26891,7 @@
 </p:sld>
 </file>
 
-<file path=ppt/slides/slide48.xml><?xml version="1.0" encoding="utf-8"?>
+<file path=ppt/slides/slide44.xml><?xml version="1.0" encoding="utf-8"?>
 <p:sld xmlns:a="http://schemas.openxmlformats.org/drawingml/2006/main" xmlns:r="http://schemas.openxmlformats.org/officeDocument/2006/relationships" xmlns:p="http://schemas.openxmlformats.org/presentationml/2006/main">
   <p:cSld name="Slide 48">
     <p:bg>
@@ -29010,517 +27004,6 @@
 
 <file path=ppt/slides/slide5.xml><?xml version="1.0" encoding="utf-8"?>
 <p:sld xmlns:a="http://schemas.openxmlformats.org/drawingml/2006/main" xmlns:r="http://schemas.openxmlformats.org/officeDocument/2006/relationships" xmlns:p="http://schemas.openxmlformats.org/presentationml/2006/main">
-  <p:cSld name="Slide 5">
-    <p:bg>
-      <p:bgPr>
-        <a:solidFill>
-          <a:srgbClr val="FFFFFF"/>
-        </a:solidFill>
-        <a:effectLst/>
-      </p:bgPr>
-    </p:bg>
-    <p:spTree>
-      <p:nvGrpSpPr>
-        <p:cNvPr id="1" name=""/>
-        <p:cNvGrpSpPr/>
-        <p:nvPr/>
-      </p:nvGrpSpPr>
-      <p:grpSpPr>
-        <a:xfrm>
-          <a:off x="0" y="0"/>
-          <a:ext cx="0" cy="0"/>
-          <a:chOff x="0" y="0"/>
-          <a:chExt cx="0" cy="0"/>
-        </a:xfrm>
-      </p:grpSpPr>
-      <p:sp>
-        <p:nvSpPr>
-          <p:cNvPr id="2" name="Shape 0"/>
-          <p:cNvSpPr/>
-          <p:nvPr/>
-        </p:nvSpPr>
-        <p:spPr>
-          <a:xfrm>
-            <a:off x="457200" y="411480"/>
-            <a:ext cx="2103120" cy="502920"/>
-          </a:xfrm>
-          <a:prstGeom prst="rect">
-            <a:avLst/>
-          </a:prstGeom>
-          <a:solidFill>
-            <a:srgbClr val="39C2D7"/>
-          </a:solidFill>
-          <a:ln/>
-        </p:spPr>
-      </p:sp>
-      <p:sp>
-        <p:nvSpPr>
-          <p:cNvPr id="3" name="Text 1"/>
-          <p:cNvSpPr txBox="1"/>
-          <p:nvPr/>
-        </p:nvSpPr>
-        <p:spPr>
-          <a:xfrm>
-            <a:off x="457200" y="411480"/>
-            <a:ext cx="2103120" cy="502920"/>
-          </a:xfrm>
-          <a:prstGeom prst="rect">
-            <a:avLst/>
-          </a:prstGeom>
-          <a:noFill/>
-          <a:ln/>
-        </p:spPr>
-        <p:txBody>
-          <a:bodyPr wrap="square" lIns="0" tIns="0" rIns="0" bIns="0" rtlCol="0" anchor="ctr"/>
-          <a:lstStyle/>
-          <a:p>
-            <a:pPr marL="0" indent="0" algn="ctr">
-              <a:buNone/>
-            </a:pPr>
-            <a:r>
-              <a:rPr lang="en-US" sz="1400" b="1" dirty="0">
-                <a:solidFill>
-                  <a:srgbClr val="FFFFFF"/>
-                </a:solidFill>
-                <a:latin typeface="Montserrat" pitchFamily="34" charset="0"/>
-                <a:ea typeface="Montserrat" pitchFamily="34" charset="-122"/>
-                <a:cs typeface="Montserrat" pitchFamily="34" charset="-120"/>
-              </a:rPr>
-              <a:t>The hook</a:t>
-            </a:r>
-            <a:endParaRPr lang="en-US" sz="1400" dirty="0"/>
-          </a:p>
-        </p:txBody>
-      </p:sp>
-      <p:sp>
-        <p:nvSpPr>
-          <p:cNvPr id="4" name="Text 2"/>
-          <p:cNvSpPr txBox="1"/>
-          <p:nvPr/>
-        </p:nvSpPr>
-        <p:spPr>
-          <a:xfrm>
-            <a:off x="10149840" y="457200"/>
-            <a:ext cx="1600200" cy="411480"/>
-          </a:xfrm>
-          <a:prstGeom prst="rect">
-            <a:avLst/>
-          </a:prstGeom>
-          <a:noFill/>
-          <a:ln/>
-        </p:spPr>
-        <p:txBody>
-          <a:bodyPr wrap="square" lIns="0" tIns="0" rIns="0" bIns="0" rtlCol="0" anchor="ctr"/>
-          <a:lstStyle/>
-          <a:p>
-            <a:pPr marL="0" indent="0" algn="r">
-              <a:buNone/>
-            </a:pPr>
-            <a:r>
-              <a:rPr lang="en-US" sz="1300" i="1" dirty="0">
-                <a:solidFill>
-                  <a:srgbClr val="464547"/>
-                </a:solidFill>
-                <a:latin typeface="Calibri" pitchFamily="34" charset="0"/>
-                <a:ea typeface="Calibri" pitchFamily="34" charset="-122"/>
-                <a:cs typeface="Calibri" pitchFamily="34" charset="-120"/>
-              </a:rPr>
-              <a:t>~3 min</a:t>
-            </a:r>
-            <a:endParaRPr lang="en-US" sz="1300" dirty="0"/>
-          </a:p>
-        </p:txBody>
-      </p:sp>
-      <p:sp>
-        <p:nvSpPr>
-          <p:cNvPr id="5" name="Text 3"/>
-          <p:cNvSpPr txBox="1"/>
-          <p:nvPr/>
-        </p:nvSpPr>
-        <p:spPr>
-          <a:xfrm>
-            <a:off x="457200" y="1024128"/>
-            <a:ext cx="11247120" cy="594360"/>
-          </a:xfrm>
-          <a:prstGeom prst="rect">
-            <a:avLst/>
-          </a:prstGeom>
-          <a:noFill/>
-          <a:ln/>
-        </p:spPr>
-        <p:txBody>
-          <a:bodyPr wrap="square" lIns="0" tIns="0" rIns="0" bIns="0" rtlCol="0" anchor="ctr"/>
-          <a:lstStyle/>
-          <a:p>
-            <a:pPr marL="0" indent="0">
-              <a:buNone/>
-            </a:pPr>
-            <a:r>
-              <a:rPr lang="en-US" sz="2500" b="1" dirty="0">
-                <a:solidFill>
-                  <a:srgbClr val="222222"/>
-                </a:solidFill>
-                <a:latin typeface="Montserrat" pitchFamily="34" charset="0"/>
-                <a:ea typeface="Montserrat" pitchFamily="34" charset="-122"/>
-                <a:cs typeface="Montserrat" pitchFamily="34" charset="-120"/>
-              </a:rPr>
-              <a:t>You are blindfolded on a mountain...</a:t>
-            </a:r>
-            <a:endParaRPr lang="en-US" sz="2500" dirty="0"/>
-          </a:p>
-        </p:txBody>
-      </p:sp>
-      <p:pic>
-        <p:nvPicPr>
-          <p:cNvPr id="6" name="Image 0" descr="/home/claude/d78/hook_mountain.png"/>
-          <p:cNvPicPr>
-            <a:picLocks noChangeAspect="1"/>
-          </p:cNvPicPr>
-          <p:nvPr/>
-        </p:nvPicPr>
-        <p:blipFill>
-          <a:blip r:embed="rId3"/>
-          <a:stretch>
-            <a:fillRect/>
-          </a:stretch>
-        </p:blipFill>
-        <p:spPr>
-          <a:xfrm>
-            <a:off x="411480" y="1914378"/>
-            <a:ext cx="7315200" cy="4126523"/>
-          </a:xfrm>
-          <a:prstGeom prst="rect">
-            <a:avLst/>
-          </a:prstGeom>
-        </p:spPr>
-      </p:pic>
-      <p:sp>
-        <p:nvSpPr>
-          <p:cNvPr id="7" name="Shape 4"/>
-          <p:cNvSpPr/>
-          <p:nvPr/>
-        </p:nvSpPr>
-        <p:spPr>
-          <a:xfrm>
-            <a:off x="7955280" y="1737360"/>
-            <a:ext cx="3794760" cy="4480560"/>
-          </a:xfrm>
-          <a:prstGeom prst="rect">
-            <a:avLst/>
-          </a:prstGeom>
-          <a:solidFill>
-            <a:srgbClr val="F6F6F6"/>
-          </a:solidFill>
-          <a:ln/>
-        </p:spPr>
-      </p:sp>
-      <p:sp>
-        <p:nvSpPr>
-          <p:cNvPr id="8" name="Shape 5"/>
-          <p:cNvSpPr/>
-          <p:nvPr/>
-        </p:nvSpPr>
-        <p:spPr>
-          <a:xfrm>
-            <a:off x="7955280" y="1737360"/>
-            <a:ext cx="3794760" cy="457200"/>
-          </a:xfrm>
-          <a:prstGeom prst="rect">
-            <a:avLst/>
-          </a:prstGeom>
-          <a:solidFill>
-            <a:srgbClr val="39C2D7"/>
-          </a:solidFill>
-          <a:ln/>
-        </p:spPr>
-      </p:sp>
-      <p:sp>
-        <p:nvSpPr>
-          <p:cNvPr id="9" name="Text 6"/>
-          <p:cNvSpPr txBox="1"/>
-          <p:nvPr/>
-        </p:nvSpPr>
-        <p:spPr>
-          <a:xfrm>
-            <a:off x="8138160" y="1737360"/>
-            <a:ext cx="3474720" cy="457200"/>
-          </a:xfrm>
-          <a:prstGeom prst="rect">
-            <a:avLst/>
-          </a:prstGeom>
-          <a:noFill/>
-          <a:ln/>
-        </p:spPr>
-        <p:txBody>
-          <a:bodyPr wrap="square" lIns="0" tIns="0" rIns="0" bIns="0" rtlCol="0" anchor="ctr"/>
-          <a:lstStyle/>
-          <a:p>
-            <a:pPr marL="0" indent="0">
-              <a:buNone/>
-            </a:pPr>
-            <a:r>
-              <a:rPr lang="en-US" sz="1300" b="1" dirty="0">
-                <a:solidFill>
-                  <a:srgbClr val="FFFFFF"/>
-                </a:solidFill>
-                <a:latin typeface="Montserrat" pitchFamily="34" charset="0"/>
-                <a:ea typeface="Montserrat" pitchFamily="34" charset="-122"/>
-                <a:cs typeface="Montserrat" pitchFamily="34" charset="-120"/>
-              </a:rPr>
-              <a:t>KEY IDEA</a:t>
-            </a:r>
-            <a:endParaRPr lang="en-US" sz="1300" dirty="0"/>
-          </a:p>
-        </p:txBody>
-      </p:sp>
-      <p:sp>
-        <p:nvSpPr>
-          <p:cNvPr id="10" name="Text 7"/>
-          <p:cNvSpPr/>
-          <p:nvPr/>
-        </p:nvSpPr>
-        <p:spPr>
-          <a:xfrm>
-            <a:off x="8092440" y="2331720"/>
-            <a:ext cx="3520440" cy="2743200"/>
-          </a:xfrm>
-          <a:prstGeom prst="rect">
-            <a:avLst/>
-          </a:prstGeom>
-          <a:noFill/>
-          <a:ln/>
-        </p:spPr>
-        <p:txBody>
-          <a:bodyPr wrap="square" lIns="254" tIns="254" rIns="254" bIns="254" rtlCol="0" anchor="t"/>
-          <a:lstStyle/>
-          <a:p>
-            <a:pPr marL="342900" indent="-342900">
-              <a:spcAft>
-                <a:spcPts val="800"/>
-              </a:spcAft>
-              <a:buSzPct val="100000"/>
-              <a:buChar char="•"/>
-            </a:pPr>
-            <a:r>
-              <a:rPr lang="en-US" sz="1500" dirty="0">
-                <a:solidFill>
-                  <a:srgbClr val="222222"/>
-                </a:solidFill>
-                <a:latin typeface="Calibri" pitchFamily="34" charset="0"/>
-                <a:ea typeface="Calibri" pitchFamily="34" charset="-122"/>
-                <a:cs typeface="Calibri" pitchFamily="34" charset="-120"/>
-              </a:rPr>
-              <a:t>Goal: reach the valley (lowest point)</a:t>
-            </a:r>
-            <a:endParaRPr lang="en-US" sz="1500" dirty="0"/>
-          </a:p>
-          <a:p>
-            <a:pPr marL="342900" indent="-342900">
-              <a:spcAft>
-                <a:spcPts val="800"/>
-              </a:spcAft>
-              <a:buSzPct val="100000"/>
-              <a:buChar char="•"/>
-            </a:pPr>
-            <a:r>
-              <a:rPr lang="en-US" sz="1500" dirty="0">
-                <a:solidFill>
-                  <a:srgbClr val="222222"/>
-                </a:solidFill>
-                <a:latin typeface="Calibri" pitchFamily="34" charset="0"/>
-                <a:ea typeface="Calibri" pitchFamily="34" charset="-122"/>
-                <a:cs typeface="Calibri" pitchFamily="34" charset="-120"/>
-              </a:rPr>
-              <a:t>You can't see - but you can feel the slope under your feet</a:t>
-            </a:r>
-            <a:endParaRPr lang="en-US" sz="1500" dirty="0"/>
-          </a:p>
-          <a:p>
-            <a:pPr marL="342900" indent="-342900">
-              <a:spcAft>
-                <a:spcPts val="800"/>
-              </a:spcAft>
-              <a:buSzPct val="100000"/>
-              <a:buChar char="•"/>
-            </a:pPr>
-            <a:r>
-              <a:rPr lang="en-US" sz="1500" dirty="0">
-                <a:solidFill>
-                  <a:srgbClr val="222222"/>
-                </a:solidFill>
-                <a:latin typeface="Calibri" pitchFamily="34" charset="0"/>
-                <a:ea typeface="Calibri" pitchFamily="34" charset="-122"/>
-                <a:cs typeface="Calibri" pitchFamily="34" charset="-120"/>
-              </a:rPr>
-              <a:t>Feel slope -&gt; step downhill -&gt; repeat</a:t>
-            </a:r>
-            <a:endParaRPr lang="en-US" sz="1500" dirty="0"/>
-          </a:p>
-        </p:txBody>
-      </p:sp>
-      <p:sp>
-        <p:nvSpPr>
-          <p:cNvPr id="11" name="Shape 8"/>
-          <p:cNvSpPr/>
-          <p:nvPr/>
-        </p:nvSpPr>
-        <p:spPr>
-          <a:xfrm>
-            <a:off x="8092440" y="5166360"/>
-            <a:ext cx="3520440" cy="914400"/>
-          </a:xfrm>
-          <a:prstGeom prst="rect">
-            <a:avLst/>
-          </a:prstGeom>
-          <a:solidFill>
-            <a:srgbClr val="FFFFFF"/>
-          </a:solidFill>
-          <a:ln w="19050">
-            <a:solidFill>
-              <a:srgbClr val="39C2D7"/>
-            </a:solidFill>
-            <a:prstDash val="solid"/>
-          </a:ln>
-        </p:spPr>
-      </p:sp>
-      <p:sp>
-        <p:nvSpPr>
-          <p:cNvPr id="12" name="Text 9"/>
-          <p:cNvSpPr/>
-          <p:nvPr/>
-        </p:nvSpPr>
-        <p:spPr>
-          <a:xfrm>
-            <a:off x="8183880" y="5166360"/>
-            <a:ext cx="3383280" cy="914400"/>
-          </a:xfrm>
-          <a:prstGeom prst="rect">
-            <a:avLst/>
-          </a:prstGeom>
-          <a:noFill/>
-          <a:ln/>
-        </p:spPr>
-        <p:txBody>
-          <a:bodyPr wrap="square" lIns="254" tIns="254" rIns="254" bIns="254" rtlCol="0" anchor="ctr"/>
-          <a:lstStyle/>
-          <a:p>
-            <a:pPr marL="0" indent="0">
-              <a:buNone/>
-            </a:pPr>
-            <a:r>
-              <a:rPr lang="en-US" sz="1300" b="1" dirty="0">
-                <a:solidFill>
-                  <a:srgbClr val="39C2D7"/>
-                </a:solidFill>
-                <a:latin typeface="Montserrat" pitchFamily="34" charset="0"/>
-                <a:ea typeface="Montserrat" pitchFamily="34" charset="-122"/>
-                <a:cs typeface="Montserrat" pitchFamily="34" charset="-120"/>
-              </a:rPr>
-              <a:t>In ML:  </a:t>
-            </a:r>
-            <a:r>
-              <a:rPr lang="en-US" sz="1300" dirty="0">
-                <a:solidFill>
-                  <a:srgbClr val="222222"/>
-                </a:solidFill>
-                <a:latin typeface="Calibri" pitchFamily="34" charset="0"/>
-                <a:ea typeface="Calibri" pitchFamily="34" charset="-122"/>
-                <a:cs typeface="Calibri" pitchFamily="34" charset="-120"/>
-              </a:rPr>
-              <a:t>the mountain is the ERROR; your position is the model's WEIGHTS. Training = walking down.</a:t>
-            </a:r>
-            <a:endParaRPr lang="en-US" sz="1300" dirty="0"/>
-          </a:p>
-        </p:txBody>
-      </p:sp>
-      <p:sp>
-        <p:nvSpPr>
-          <p:cNvPr id="13" name="Text 10"/>
-          <p:cNvSpPr txBox="1"/>
-          <p:nvPr/>
-        </p:nvSpPr>
-        <p:spPr>
-          <a:xfrm>
-            <a:off x="457200" y="6382512"/>
-            <a:ext cx="1097280" cy="292608"/>
-          </a:xfrm>
-          <a:prstGeom prst="rect">
-            <a:avLst/>
-          </a:prstGeom>
-          <a:noFill/>
-          <a:ln/>
-        </p:spPr>
-        <p:txBody>
-          <a:bodyPr wrap="square" lIns="0" tIns="0" rIns="0" bIns="0" rtlCol="0" anchor="ctr"/>
-          <a:lstStyle/>
-          <a:p>
-            <a:pPr marL="0" indent="0">
-              <a:buNone/>
-            </a:pPr>
-            <a:r>
-              <a:rPr lang="en-US" sz="1300" b="1" dirty="0">
-                <a:solidFill>
-                  <a:srgbClr val="39C2D7"/>
-                </a:solidFill>
-                <a:latin typeface="Montserrat" pitchFamily="34" charset="0"/>
-                <a:ea typeface="Montserrat" pitchFamily="34" charset="-122"/>
-                <a:cs typeface="Montserrat" pitchFamily="34" charset="-120"/>
-              </a:rPr>
-              <a:t>iTPU</a:t>
-            </a:r>
-            <a:endParaRPr lang="en-US" sz="1300" dirty="0"/>
-          </a:p>
-        </p:txBody>
-      </p:sp>
-      <p:sp>
-        <p:nvSpPr>
-          <p:cNvPr id="14" name="Text 11"/>
-          <p:cNvSpPr txBox="1"/>
-          <p:nvPr/>
-        </p:nvSpPr>
-        <p:spPr>
-          <a:xfrm>
-            <a:off x="1371600" y="6400800"/>
-            <a:ext cx="6400800" cy="256032"/>
-          </a:xfrm>
-          <a:prstGeom prst="rect">
-            <a:avLst/>
-          </a:prstGeom>
-          <a:noFill/>
-          <a:ln/>
-        </p:spPr>
-        <p:txBody>
-          <a:bodyPr wrap="square" lIns="0" tIns="0" rIns="0" bIns="0" rtlCol="0" anchor="ctr"/>
-          <a:lstStyle/>
-          <a:p>
-            <a:pPr marL="0" indent="0">
-              <a:buNone/>
-            </a:pPr>
-            <a:r>
-              <a:rPr lang="en-US" sz="900" dirty="0">
-                <a:solidFill>
-                  <a:srgbClr val="464547"/>
-                </a:solidFill>
-                <a:latin typeface="Calibri" pitchFamily="34" charset="0"/>
-                <a:ea typeface="Calibri" pitchFamily="34" charset="-122"/>
-                <a:cs typeface="Calibri" pitchFamily="34" charset="-120"/>
-              </a:rPr>
-              <a:t>Part 1  |  Calculus - how a model learns</a:t>
-            </a:r>
-            <a:endParaRPr lang="en-US" sz="900" dirty="0"/>
-          </a:p>
-        </p:txBody>
-      </p:sp>
-    </p:spTree>
-  </p:cSld>
-  <p:clrMapOvr>
-    <a:masterClrMapping/>
-  </p:clrMapOvr>
-</p:sld>
-</file>
-
-<file path=ppt/slides/slide6.xml><?xml version="1.0" encoding="utf-8"?>
-<p:sld xmlns:a="http://schemas.openxmlformats.org/drawingml/2006/main" xmlns:r="http://schemas.openxmlformats.org/officeDocument/2006/relationships" xmlns:p="http://schemas.openxmlformats.org/presentationml/2006/main">
   <p:cSld name="Slide 6">
     <p:bg>
       <p:bgPr>
@@ -29909,7 +27392,7 @@
 </p:sld>
 </file>
 
-<file path=ppt/slides/slide7.xml><?xml version="1.0" encoding="utf-8"?>
+<file path=ppt/slides/slide6.xml><?xml version="1.0" encoding="utf-8"?>
 <p:sld xmlns:a="http://schemas.openxmlformats.org/drawingml/2006/main" xmlns:r="http://schemas.openxmlformats.org/officeDocument/2006/relationships" xmlns:p="http://schemas.openxmlformats.org/presentationml/2006/main">
   <p:cSld name="Slide 7">
     <p:bg>
@@ -30441,7 +27924,7 @@
 </p:sld>
 </file>
 
-<file path=ppt/slides/slide8.xml><?xml version="1.0" encoding="utf-8"?>
+<file path=ppt/slides/slide7.xml><?xml version="1.0" encoding="utf-8"?>
 <p:sld xmlns:a="http://schemas.openxmlformats.org/drawingml/2006/main" xmlns:r="http://schemas.openxmlformats.org/officeDocument/2006/relationships" xmlns:p="http://schemas.openxmlformats.org/presentationml/2006/main">
   <p:cSld name="Slide 8">
     <p:bg>
@@ -30912,7 +28395,7 @@
 </p:sld>
 </file>
 
-<file path=ppt/slides/slide9.xml><?xml version="1.0" encoding="utf-8"?>
+<file path=ppt/slides/slide8.xml><?xml version="1.0" encoding="utf-8"?>
 <p:sld xmlns:a="http://schemas.openxmlformats.org/drawingml/2006/main" xmlns:r="http://schemas.openxmlformats.org/officeDocument/2006/relationships" xmlns:p="http://schemas.openxmlformats.org/presentationml/2006/main">
   <p:cSld name="Slide 9">
     <p:bg>
@@ -31269,6 +28752,538 @@
       <p:sp>
         <p:nvSpPr>
           <p:cNvPr id="12" name="Text 9"/>
+          <p:cNvSpPr txBox="1"/>
+          <p:nvPr/>
+        </p:nvSpPr>
+        <p:spPr>
+          <a:xfrm>
+            <a:off x="1371600" y="6400800"/>
+            <a:ext cx="6400800" cy="256032"/>
+          </a:xfrm>
+          <a:prstGeom prst="rect">
+            <a:avLst/>
+          </a:prstGeom>
+          <a:noFill/>
+          <a:ln/>
+        </p:spPr>
+        <p:txBody>
+          <a:bodyPr wrap="square" lIns="0" tIns="0" rIns="0" bIns="0" rtlCol="0" anchor="ctr"/>
+          <a:lstStyle/>
+          <a:p>
+            <a:pPr marL="0" indent="0">
+              <a:buNone/>
+            </a:pPr>
+            <a:r>
+              <a:rPr lang="en-US" sz="900" dirty="0">
+                <a:solidFill>
+                  <a:srgbClr val="464547"/>
+                </a:solidFill>
+                <a:latin typeface="Calibri" pitchFamily="34" charset="0"/>
+                <a:ea typeface="Calibri" pitchFamily="34" charset="-122"/>
+                <a:cs typeface="Calibri" pitchFamily="34" charset="-120"/>
+              </a:rPr>
+              <a:t>Part 1  |  Calculus - how a model learns</a:t>
+            </a:r>
+            <a:endParaRPr lang="en-US" sz="900" dirty="0"/>
+          </a:p>
+        </p:txBody>
+      </p:sp>
+    </p:spTree>
+  </p:cSld>
+  <p:clrMapOvr>
+    <a:masterClrMapping/>
+  </p:clrMapOvr>
+</p:sld>
+</file>
+
+<file path=ppt/slides/slide9.xml><?xml version="1.0" encoding="utf-8"?>
+<p:sld xmlns:a="http://schemas.openxmlformats.org/drawingml/2006/main" xmlns:r="http://schemas.openxmlformats.org/officeDocument/2006/relationships" xmlns:p="http://schemas.openxmlformats.org/presentationml/2006/main">
+  <p:cSld name="Slide 10">
+    <p:bg>
+      <p:bgPr>
+        <a:solidFill>
+          <a:srgbClr val="FFFFFF"/>
+        </a:solidFill>
+        <a:effectLst/>
+      </p:bgPr>
+    </p:bg>
+    <p:spTree>
+      <p:nvGrpSpPr>
+        <p:cNvPr id="1" name=""/>
+        <p:cNvGrpSpPr/>
+        <p:nvPr/>
+      </p:nvGrpSpPr>
+      <p:grpSpPr>
+        <a:xfrm>
+          <a:off x="0" y="0"/>
+          <a:ext cx="0" cy="0"/>
+          <a:chOff x="0" y="0"/>
+          <a:chExt cx="0" cy="0"/>
+        </a:xfrm>
+      </p:grpSpPr>
+      <p:sp>
+        <p:nvSpPr>
+          <p:cNvPr id="2" name="Shape 0"/>
+          <p:cNvSpPr/>
+          <p:nvPr/>
+        </p:nvSpPr>
+        <p:spPr>
+          <a:xfrm>
+            <a:off x="457200" y="411480"/>
+            <a:ext cx="2103120" cy="502920"/>
+          </a:xfrm>
+          <a:prstGeom prst="rect">
+            <a:avLst/>
+          </a:prstGeom>
+          <a:solidFill>
+            <a:srgbClr val="39C2D7"/>
+          </a:solidFill>
+          <a:ln/>
+        </p:spPr>
+      </p:sp>
+      <p:sp>
+        <p:nvSpPr>
+          <p:cNvPr id="3" name="Text 1"/>
+          <p:cNvSpPr txBox="1"/>
+          <p:nvPr/>
+        </p:nvSpPr>
+        <p:spPr>
+          <a:xfrm>
+            <a:off x="457200" y="411480"/>
+            <a:ext cx="2103120" cy="502920"/>
+          </a:xfrm>
+          <a:prstGeom prst="rect">
+            <a:avLst/>
+          </a:prstGeom>
+          <a:noFill/>
+          <a:ln/>
+        </p:spPr>
+        <p:txBody>
+          <a:bodyPr wrap="square" lIns="0" tIns="0" rIns="0" bIns="0" rtlCol="0" anchor="ctr"/>
+          <a:lstStyle/>
+          <a:p>
+            <a:pPr marL="0" indent="0" algn="ctr">
+              <a:buNone/>
+            </a:pPr>
+            <a:r>
+              <a:rPr lang="en-US" sz="1400" b="1" dirty="0">
+                <a:solidFill>
+                  <a:srgbClr val="FFFFFF"/>
+                </a:solidFill>
+                <a:latin typeface="Montserrat" pitchFamily="34" charset="0"/>
+                <a:ea typeface="Montserrat" pitchFamily="34" charset="-122"/>
+                <a:cs typeface="Montserrat" pitchFamily="34" charset="-120"/>
+              </a:rPr>
+              <a:t>Gradient</a:t>
+            </a:r>
+            <a:endParaRPr lang="en-US" sz="1400" dirty="0"/>
+          </a:p>
+        </p:txBody>
+      </p:sp>
+      <p:sp>
+        <p:nvSpPr>
+          <p:cNvPr id="4" name="Text 2"/>
+          <p:cNvSpPr txBox="1"/>
+          <p:nvPr/>
+        </p:nvSpPr>
+        <p:spPr>
+          <a:xfrm>
+            <a:off x="10149840" y="457200"/>
+            <a:ext cx="1600200" cy="411480"/>
+          </a:xfrm>
+          <a:prstGeom prst="rect">
+            <a:avLst/>
+          </a:prstGeom>
+          <a:noFill/>
+          <a:ln/>
+        </p:spPr>
+        <p:txBody>
+          <a:bodyPr wrap="square" lIns="0" tIns="0" rIns="0" bIns="0" rtlCol="0" anchor="ctr"/>
+          <a:lstStyle/>
+          <a:p>
+            <a:pPr marL="0" indent="0" algn="r">
+              <a:buNone/>
+            </a:pPr>
+            <a:r>
+              <a:rPr lang="en-US" sz="1300" i="1" dirty="0">
+                <a:solidFill>
+                  <a:srgbClr val="464547"/>
+                </a:solidFill>
+                <a:latin typeface="Calibri" pitchFamily="34" charset="0"/>
+                <a:ea typeface="Calibri" pitchFamily="34" charset="-122"/>
+                <a:cs typeface="Calibri" pitchFamily="34" charset="-120"/>
+              </a:rPr>
+              <a:t>~4 min</a:t>
+            </a:r>
+            <a:endParaRPr lang="en-US" sz="1300" dirty="0"/>
+          </a:p>
+        </p:txBody>
+      </p:sp>
+      <p:sp>
+        <p:nvSpPr>
+          <p:cNvPr id="5" name="Text 3"/>
+          <p:cNvSpPr txBox="1"/>
+          <p:nvPr/>
+        </p:nvSpPr>
+        <p:spPr>
+          <a:xfrm>
+            <a:off x="457200" y="1024128"/>
+            <a:ext cx="11247120" cy="594360"/>
+          </a:xfrm>
+          <a:prstGeom prst="rect">
+            <a:avLst/>
+          </a:prstGeom>
+          <a:noFill/>
+          <a:ln/>
+        </p:spPr>
+        <p:txBody>
+          <a:bodyPr wrap="square" lIns="0" tIns="0" rIns="0" bIns="0" rtlCol="0" anchor="ctr"/>
+          <a:lstStyle/>
+          <a:p>
+            <a:pPr marL="0" indent="0">
+              <a:buNone/>
+            </a:pPr>
+            <a:r>
+              <a:rPr lang="en-US" sz="2500" b="1" dirty="0">
+                <a:solidFill>
+                  <a:srgbClr val="222222"/>
+                </a:solidFill>
+                <a:latin typeface="Montserrat" pitchFamily="34" charset="0"/>
+                <a:ea typeface="Montserrat" pitchFamily="34" charset="-122"/>
+                <a:cs typeface="Montserrat" pitchFamily="34" charset="-120"/>
+              </a:rPr>
+              <a:t>Gradient = all partial derivatives in one arrow</a:t>
+            </a:r>
+            <a:endParaRPr lang="en-US" sz="2500" dirty="0"/>
+          </a:p>
+        </p:txBody>
+      </p:sp>
+      <p:pic>
+        <p:nvPicPr>
+          <p:cNvPr id="6" name="Image 0" descr="/home/claude/d78/gradient.png"/>
+          <p:cNvPicPr>
+            <a:picLocks noChangeAspect="1"/>
+          </p:cNvPicPr>
+          <p:nvPr/>
+        </p:nvPicPr>
+        <p:blipFill>
+          <a:blip r:embed="rId3"/>
+          <a:stretch>
+            <a:fillRect/>
+          </a:stretch>
+        </p:blipFill>
+        <p:spPr>
+          <a:xfrm>
+            <a:off x="1744789" y="1737360"/>
+            <a:ext cx="4648581" cy="4480560"/>
+          </a:xfrm>
+          <a:prstGeom prst="rect">
+            <a:avLst/>
+          </a:prstGeom>
+        </p:spPr>
+      </p:pic>
+      <p:sp>
+        <p:nvSpPr>
+          <p:cNvPr id="7" name="Shape 4"/>
+          <p:cNvSpPr/>
+          <p:nvPr/>
+        </p:nvSpPr>
+        <p:spPr>
+          <a:xfrm>
+            <a:off x="7955280" y="1737360"/>
+            <a:ext cx="3794760" cy="4480560"/>
+          </a:xfrm>
+          <a:prstGeom prst="rect">
+            <a:avLst/>
+          </a:prstGeom>
+          <a:solidFill>
+            <a:srgbClr val="F6F6F6"/>
+          </a:solidFill>
+          <a:ln/>
+        </p:spPr>
+      </p:sp>
+      <p:sp>
+        <p:nvSpPr>
+          <p:cNvPr id="8" name="Shape 5"/>
+          <p:cNvSpPr/>
+          <p:nvPr/>
+        </p:nvSpPr>
+        <p:spPr>
+          <a:xfrm>
+            <a:off x="7955280" y="1737360"/>
+            <a:ext cx="3794760" cy="457200"/>
+          </a:xfrm>
+          <a:prstGeom prst="rect">
+            <a:avLst/>
+          </a:prstGeom>
+          <a:solidFill>
+            <a:srgbClr val="39C2D7"/>
+          </a:solidFill>
+          <a:ln/>
+        </p:spPr>
+      </p:sp>
+      <p:sp>
+        <p:nvSpPr>
+          <p:cNvPr id="9" name="Text 6"/>
+          <p:cNvSpPr txBox="1"/>
+          <p:nvPr/>
+        </p:nvSpPr>
+        <p:spPr>
+          <a:xfrm>
+            <a:off x="8138160" y="1737360"/>
+            <a:ext cx="3474720" cy="457200"/>
+          </a:xfrm>
+          <a:prstGeom prst="rect">
+            <a:avLst/>
+          </a:prstGeom>
+          <a:noFill/>
+          <a:ln/>
+        </p:spPr>
+        <p:txBody>
+          <a:bodyPr wrap="square" lIns="0" tIns="0" rIns="0" bIns="0" rtlCol="0" anchor="ctr"/>
+          <a:lstStyle/>
+          <a:p>
+            <a:pPr marL="0" indent="0">
+              <a:buNone/>
+            </a:pPr>
+            <a:r>
+              <a:rPr lang="en-US" sz="1300" b="1" dirty="0">
+                <a:solidFill>
+                  <a:srgbClr val="FFFFFF"/>
+                </a:solidFill>
+                <a:latin typeface="Montserrat" pitchFamily="34" charset="0"/>
+                <a:ea typeface="Montserrat" pitchFamily="34" charset="-122"/>
+                <a:cs typeface="Montserrat" pitchFamily="34" charset="-120"/>
+              </a:rPr>
+              <a:t>KEY IDEA</a:t>
+            </a:r>
+            <a:endParaRPr lang="en-US" sz="1300" dirty="0"/>
+          </a:p>
+        </p:txBody>
+      </p:sp>
+      <p:sp>
+        <p:nvSpPr>
+          <p:cNvPr id="10" name="Text 7"/>
+          <p:cNvSpPr/>
+          <p:nvPr/>
+        </p:nvSpPr>
+        <p:spPr>
+          <a:xfrm>
+            <a:off x="8092440" y="2331720"/>
+            <a:ext cx="3520440" cy="2743200"/>
+          </a:xfrm>
+          <a:prstGeom prst="rect">
+            <a:avLst/>
+          </a:prstGeom>
+          <a:noFill/>
+          <a:ln/>
+        </p:spPr>
+        <p:txBody>
+          <a:bodyPr wrap="square" lIns="254" tIns="254" rIns="254" bIns="254" rtlCol="0" anchor="t"/>
+          <a:lstStyle/>
+          <a:p>
+            <a:pPr marL="342900" indent="-342900">
+              <a:spcAft>
+                <a:spcPts val="800"/>
+              </a:spcAft>
+              <a:buSzPct val="100000"/>
+              <a:buChar char="•"/>
+            </a:pPr>
+            <a:r>
+              <a:rPr lang="en-US" sz="1500" dirty="0">
+                <a:solidFill>
+                  <a:srgbClr val="222222"/>
+                </a:solidFill>
+                <a:latin typeface="Calibri" pitchFamily="34" charset="0"/>
+                <a:ea typeface="Calibri" pitchFamily="34" charset="-122"/>
+                <a:cs typeface="Calibri" pitchFamily="34" charset="-120"/>
+              </a:rPr>
+              <a:t>Gradient = [df/dx, df/dy, ...] - a vector</a:t>
+            </a:r>
+            <a:endParaRPr lang="en-US" sz="1500" dirty="0"/>
+          </a:p>
+          <a:p>
+            <a:pPr marL="342900" indent="-342900">
+              <a:spcAft>
+                <a:spcPts val="800"/>
+              </a:spcAft>
+              <a:buSzPct val="100000"/>
+              <a:buChar char="•"/>
+            </a:pPr>
+            <a:r>
+              <a:rPr lang="en-US" sz="1500" dirty="0">
+                <a:solidFill>
+                  <a:srgbClr val="222222"/>
+                </a:solidFill>
+                <a:latin typeface="Calibri" pitchFamily="34" charset="0"/>
+                <a:ea typeface="Calibri" pitchFamily="34" charset="-122"/>
+                <a:cs typeface="Calibri" pitchFamily="34" charset="-120"/>
+              </a:rPr>
+              <a:t>It points in the steepest UPHILL direction</a:t>
+            </a:r>
+            <a:endParaRPr lang="en-US" sz="1500" dirty="0"/>
+          </a:p>
+          <a:p>
+            <a:pPr marL="342900" indent="-342900">
+              <a:spcAft>
+                <a:spcPts val="800"/>
+              </a:spcAft>
+              <a:buSzPct val="100000"/>
+              <a:buChar char="•"/>
+            </a:pPr>
+            <a:r>
+              <a:rPr lang="en-US" sz="1500" dirty="0">
+                <a:solidFill>
+                  <a:srgbClr val="222222"/>
+                </a:solidFill>
+                <a:latin typeface="Calibri" pitchFamily="34" charset="0"/>
+                <a:ea typeface="Calibri" pitchFamily="34" charset="-122"/>
+                <a:cs typeface="Calibri" pitchFamily="34" charset="-120"/>
+              </a:rPr>
+              <a:t>Minus gradient = steepest DOWNHILL</a:t>
+            </a:r>
+            <a:endParaRPr lang="en-US" sz="1500" dirty="0"/>
+          </a:p>
+          <a:p>
+            <a:pPr marL="342900" indent="-342900">
+              <a:spcAft>
+                <a:spcPts val="800"/>
+              </a:spcAft>
+              <a:buSzPct val="100000"/>
+              <a:buChar char="•"/>
+            </a:pPr>
+            <a:r>
+              <a:rPr lang="en-US" sz="1500" dirty="0">
+                <a:solidFill>
+                  <a:srgbClr val="222222"/>
+                </a:solidFill>
+                <a:latin typeface="Calibri" pitchFamily="34" charset="0"/>
+                <a:ea typeface="Calibri" pitchFamily="34" charset="-122"/>
+                <a:cs typeface="Calibri" pitchFamily="34" charset="-120"/>
+              </a:rPr>
+              <a:t>f(x,y)=x^2+y^2 at (2,1): gradient = [4, 2]</a:t>
+            </a:r>
+            <a:endParaRPr lang="en-US" sz="1500" dirty="0"/>
+          </a:p>
+        </p:txBody>
+      </p:sp>
+      <p:sp>
+        <p:nvSpPr>
+          <p:cNvPr id="11" name="Shape 8"/>
+          <p:cNvSpPr/>
+          <p:nvPr/>
+        </p:nvSpPr>
+        <p:spPr>
+          <a:xfrm>
+            <a:off x="8092440" y="5166360"/>
+            <a:ext cx="3520440" cy="914400"/>
+          </a:xfrm>
+          <a:prstGeom prst="rect">
+            <a:avLst/>
+          </a:prstGeom>
+          <a:solidFill>
+            <a:srgbClr val="FFFFFF"/>
+          </a:solidFill>
+          <a:ln w="19050">
+            <a:solidFill>
+              <a:srgbClr val="39C2D7"/>
+            </a:solidFill>
+            <a:prstDash val="solid"/>
+          </a:ln>
+        </p:spPr>
+      </p:sp>
+      <p:sp>
+        <p:nvSpPr>
+          <p:cNvPr id="12" name="Text 9"/>
+          <p:cNvSpPr/>
+          <p:nvPr/>
+        </p:nvSpPr>
+        <p:spPr>
+          <a:xfrm>
+            <a:off x="8183880" y="5166360"/>
+            <a:ext cx="3383280" cy="914400"/>
+          </a:xfrm>
+          <a:prstGeom prst="rect">
+            <a:avLst/>
+          </a:prstGeom>
+          <a:noFill/>
+          <a:ln/>
+        </p:spPr>
+        <p:txBody>
+          <a:bodyPr wrap="square" lIns="254" tIns="254" rIns="254" bIns="254" rtlCol="0" anchor="ctr"/>
+          <a:lstStyle/>
+          <a:p>
+            <a:pPr marL="0" indent="0">
+              <a:buNone/>
+            </a:pPr>
+            <a:r>
+              <a:rPr lang="en-US" sz="1300" b="1" dirty="0">
+                <a:solidFill>
+                  <a:srgbClr val="39C2D7"/>
+                </a:solidFill>
+                <a:latin typeface="Montserrat" pitchFamily="34" charset="0"/>
+                <a:ea typeface="Montserrat" pitchFamily="34" charset="-122"/>
+                <a:cs typeface="Montserrat" pitchFamily="34" charset="-120"/>
+              </a:rPr>
+              <a:t>In ML:  </a:t>
+            </a:r>
+            <a:r>
+              <a:rPr lang="en-US" sz="1300" dirty="0">
+                <a:solidFill>
+                  <a:srgbClr val="222222"/>
+                </a:solidFill>
+                <a:latin typeface="Calibri" pitchFamily="34" charset="0"/>
+                <a:ea typeface="Calibri" pitchFamily="34" charset="-122"/>
+                <a:cs typeface="Calibri" pitchFamily="34" charset="-120"/>
+              </a:rPr>
+              <a:t>we step in the minus-gradient direction to reduce the loss.</a:t>
+            </a:r>
+            <a:endParaRPr lang="en-US" sz="1300" dirty="0"/>
+          </a:p>
+        </p:txBody>
+      </p:sp>
+      <p:sp>
+        <p:nvSpPr>
+          <p:cNvPr id="13" name="Text 10"/>
+          <p:cNvSpPr txBox="1"/>
+          <p:nvPr/>
+        </p:nvSpPr>
+        <p:spPr>
+          <a:xfrm>
+            <a:off x="457200" y="6382512"/>
+            <a:ext cx="1097280" cy="292608"/>
+          </a:xfrm>
+          <a:prstGeom prst="rect">
+            <a:avLst/>
+          </a:prstGeom>
+          <a:noFill/>
+          <a:ln/>
+        </p:spPr>
+        <p:txBody>
+          <a:bodyPr wrap="square" lIns="0" tIns="0" rIns="0" bIns="0" rtlCol="0" anchor="ctr"/>
+          <a:lstStyle/>
+          <a:p>
+            <a:pPr marL="0" indent="0">
+              <a:buNone/>
+            </a:pPr>
+            <a:r>
+              <a:rPr lang="en-US" sz="1300" b="1" dirty="0">
+                <a:solidFill>
+                  <a:srgbClr val="39C2D7"/>
+                </a:solidFill>
+                <a:latin typeface="Montserrat" pitchFamily="34" charset="0"/>
+                <a:ea typeface="Montserrat" pitchFamily="34" charset="-122"/>
+                <a:cs typeface="Montserrat" pitchFamily="34" charset="-120"/>
+              </a:rPr>
+              <a:t>iTPU</a:t>
+            </a:r>
+            <a:endParaRPr lang="en-US" sz="1300" dirty="0"/>
+          </a:p>
+        </p:txBody>
+      </p:sp>
+      <p:sp>
+        <p:nvSpPr>
+          <p:cNvPr id="14" name="Text 11"/>
           <p:cNvSpPr txBox="1"/>
           <p:nvPr/>
         </p:nvSpPr>
